--- a/3DLV3/Plam/雨粒を使って描く.pptx
+++ b/3DLV3/Plam/雨粒を使って描く.pptx
@@ -5,25 +5,23 @@
     <p:sldMasterId id="2147483889" r:id="rId1"/>
   </p:sldMasterIdLst>
   <p:notesMasterIdLst>
-    <p:notesMasterId r:id="rId18"/>
+    <p:notesMasterId r:id="rId16"/>
   </p:notesMasterIdLst>
   <p:sldIdLst>
     <p:sldId id="264" r:id="rId2"/>
     <p:sldId id="275" r:id="rId3"/>
     <p:sldId id="258" r:id="rId4"/>
     <p:sldId id="263" r:id="rId5"/>
-    <p:sldId id="259" r:id="rId6"/>
-    <p:sldId id="257" r:id="rId7"/>
-    <p:sldId id="261" r:id="rId8"/>
-    <p:sldId id="273" r:id="rId9"/>
-    <p:sldId id="278" r:id="rId10"/>
-    <p:sldId id="277" r:id="rId11"/>
-    <p:sldId id="268" r:id="rId12"/>
-    <p:sldId id="276" r:id="rId13"/>
-    <p:sldId id="274" r:id="rId14"/>
-    <p:sldId id="267" r:id="rId15"/>
-    <p:sldId id="271" r:id="rId16"/>
-    <p:sldId id="266" r:id="rId17"/>
+    <p:sldId id="257" r:id="rId6"/>
+    <p:sldId id="261" r:id="rId7"/>
+    <p:sldId id="273" r:id="rId8"/>
+    <p:sldId id="259" r:id="rId9"/>
+    <p:sldId id="268" r:id="rId10"/>
+    <p:sldId id="276" r:id="rId11"/>
+    <p:sldId id="274" r:id="rId12"/>
+    <p:sldId id="267" r:id="rId13"/>
+    <p:sldId id="271" r:id="rId14"/>
+    <p:sldId id="266" r:id="rId15"/>
   </p:sldIdLst>
   <p:sldSz cx="12192000" cy="6858000"/>
   <p:notesSz cx="6858000" cy="9144000"/>
@@ -190,6 +188,585 @@
       </pc:sldChg>
     </pc:docChg>
   </pc:docChgLst>
+  <pc:docChgLst>
+    <pc:chgData name="kousuke yamamoto" userId="516c4d66ab16f868" providerId="LiveId" clId="{6DE8346A-485C-46ED-AFC0-899DF69DB0FD}"/>
+    <pc:docChg chg="undo custSel addSld delSld modSld sldOrd">
+      <pc:chgData name="kousuke yamamoto" userId="516c4d66ab16f868" providerId="LiveId" clId="{6DE8346A-485C-46ED-AFC0-899DF69DB0FD}" dt="2026-10-09T02:21:38.992" v="1681"/>
+      <pc:docMkLst>
+        <pc:docMk/>
+      </pc:docMkLst>
+      <pc:sldChg chg="delSp modSp mod ord">
+        <pc:chgData name="kousuke yamamoto" userId="516c4d66ab16f868" providerId="LiveId" clId="{6DE8346A-485C-46ED-AFC0-899DF69DB0FD}" dt="2026-10-09T02:21:26.384" v="1673"/>
+        <pc:sldMkLst>
+          <pc:docMk/>
+          <pc:sldMk cId="0" sldId="257"/>
+        </pc:sldMkLst>
+        <pc:spChg chg="mod">
+          <ac:chgData name="kousuke yamamoto" userId="516c4d66ab16f868" providerId="LiveId" clId="{6DE8346A-485C-46ED-AFC0-899DF69DB0FD}" dt="2026-10-08T13:54:16.244" v="1150" actId="14100"/>
+          <ac:spMkLst>
+            <pc:docMk/>
+            <pc:sldMk cId="0" sldId="257"/>
+            <ac:spMk id="2" creationId="{D9033127-4D4D-4EC3-A27C-804E62C27528}"/>
+          </ac:spMkLst>
+        </pc:spChg>
+        <pc:spChg chg="del">
+          <ac:chgData name="kousuke yamamoto" userId="516c4d66ab16f868" providerId="LiveId" clId="{6DE8346A-485C-46ED-AFC0-899DF69DB0FD}" dt="2026-10-08T13:45:08.400" v="961" actId="478"/>
+          <ac:spMkLst>
+            <pc:docMk/>
+            <pc:sldMk cId="0" sldId="257"/>
+            <ac:spMk id="6" creationId="{A30C44BD-C3CF-4D21-8AC1-84E72A8C316D}"/>
+          </ac:spMkLst>
+        </pc:spChg>
+        <pc:spChg chg="del mod">
+          <ac:chgData name="kousuke yamamoto" userId="516c4d66ab16f868" providerId="LiveId" clId="{6DE8346A-485C-46ED-AFC0-899DF69DB0FD}" dt="2026-10-08T13:45:04.427" v="959" actId="478"/>
+          <ac:spMkLst>
+            <pc:docMk/>
+            <pc:sldMk cId="0" sldId="257"/>
+            <ac:spMk id="7" creationId="{6A95D87C-FEF3-467E-B1FF-6608DFB43B23}"/>
+          </ac:spMkLst>
+        </pc:spChg>
+        <pc:spChg chg="del">
+          <ac:chgData name="kousuke yamamoto" userId="516c4d66ab16f868" providerId="LiveId" clId="{6DE8346A-485C-46ED-AFC0-899DF69DB0FD}" dt="2026-10-08T05:56:46.980" v="243" actId="478"/>
+          <ac:spMkLst>
+            <pc:docMk/>
+            <pc:sldMk cId="0" sldId="257"/>
+            <ac:spMk id="9" creationId="{00039B03-7452-4948-AB40-CEC2825954EC}"/>
+          </ac:spMkLst>
+        </pc:spChg>
+        <pc:spChg chg="del mod">
+          <ac:chgData name="kousuke yamamoto" userId="516c4d66ab16f868" providerId="LiveId" clId="{6DE8346A-485C-46ED-AFC0-899DF69DB0FD}" dt="2026-10-08T05:56:48.275" v="244" actId="478"/>
+          <ac:spMkLst>
+            <pc:docMk/>
+            <pc:sldMk cId="0" sldId="257"/>
+            <ac:spMk id="11" creationId="{13BABEA7-2FB4-4D0E-9CE5-C9EE47AFD26F}"/>
+          </ac:spMkLst>
+        </pc:spChg>
+        <pc:spChg chg="del">
+          <ac:chgData name="kousuke yamamoto" userId="516c4d66ab16f868" providerId="LiveId" clId="{6DE8346A-485C-46ED-AFC0-899DF69DB0FD}" dt="2026-10-08T13:45:06.157" v="960" actId="478"/>
+          <ac:spMkLst>
+            <pc:docMk/>
+            <pc:sldMk cId="0" sldId="257"/>
+            <ac:spMk id="12" creationId="{C0E15D93-A5A7-4816-B984-006258B007B4}"/>
+          </ac:spMkLst>
+        </pc:spChg>
+      </pc:sldChg>
+      <pc:sldChg chg="modSp mod">
+        <pc:chgData name="kousuke yamamoto" userId="516c4d66ab16f868" providerId="LiveId" clId="{6DE8346A-485C-46ED-AFC0-899DF69DB0FD}" dt="2026-10-08T14:47:33.812" v="1357" actId="20577"/>
+        <pc:sldMkLst>
+          <pc:docMk/>
+          <pc:sldMk cId="0" sldId="258"/>
+        </pc:sldMkLst>
+        <pc:spChg chg="mod">
+          <ac:chgData name="kousuke yamamoto" userId="516c4d66ab16f868" providerId="LiveId" clId="{6DE8346A-485C-46ED-AFC0-899DF69DB0FD}" dt="2026-10-08T14:47:33.812" v="1357" actId="20577"/>
+          <ac:spMkLst>
+            <pc:docMk/>
+            <pc:sldMk cId="0" sldId="258"/>
+            <ac:spMk id="2" creationId="{A32B2933-ECB3-4D47-BADF-E85DEDDE1079}"/>
+          </ac:spMkLst>
+        </pc:spChg>
+      </pc:sldChg>
+      <pc:sldChg chg="addSp delSp modSp mod">
+        <pc:chgData name="kousuke yamamoto" userId="516c4d66ab16f868" providerId="LiveId" clId="{6DE8346A-485C-46ED-AFC0-899DF69DB0FD}" dt="2026-10-08T13:44:50.143" v="958" actId="120"/>
+        <pc:sldMkLst>
+          <pc:docMk/>
+          <pc:sldMk cId="0" sldId="259"/>
+        </pc:sldMkLst>
+        <pc:spChg chg="mod">
+          <ac:chgData name="kousuke yamamoto" userId="516c4d66ab16f868" providerId="LiveId" clId="{6DE8346A-485C-46ED-AFC0-899DF69DB0FD}" dt="2026-10-08T13:40:38.899" v="792" actId="1076"/>
+          <ac:spMkLst>
+            <pc:docMk/>
+            <pc:sldMk cId="0" sldId="259"/>
+            <ac:spMk id="2" creationId="{528E3EEC-ED19-44E5-A90C-4BE60A2D4ABD}"/>
+          </ac:spMkLst>
+        </pc:spChg>
+        <pc:spChg chg="add del mod">
+          <ac:chgData name="kousuke yamamoto" userId="516c4d66ab16f868" providerId="LiveId" clId="{6DE8346A-485C-46ED-AFC0-899DF69DB0FD}" dt="2026-10-08T13:41:39.687" v="806" actId="1076"/>
+          <ac:spMkLst>
+            <pc:docMk/>
+            <pc:sldMk cId="0" sldId="259"/>
+            <ac:spMk id="5" creationId="{5F738E8E-6FD1-4FFF-9E24-5B37EDA81C3D}"/>
+          </ac:spMkLst>
+        </pc:spChg>
+        <pc:spChg chg="mod">
+          <ac:chgData name="kousuke yamamoto" userId="516c4d66ab16f868" providerId="LiveId" clId="{6DE8346A-485C-46ED-AFC0-899DF69DB0FD}" dt="2026-10-08T13:39:33.962" v="766" actId="1076"/>
+          <ac:spMkLst>
+            <pc:docMk/>
+            <pc:sldMk cId="0" sldId="259"/>
+            <ac:spMk id="7" creationId="{29C8E7E2-CABB-411F-8549-701A17FEE2C5}"/>
+          </ac:spMkLst>
+        </pc:spChg>
+        <pc:spChg chg="add mod">
+          <ac:chgData name="kousuke yamamoto" userId="516c4d66ab16f868" providerId="LiveId" clId="{6DE8346A-485C-46ED-AFC0-899DF69DB0FD}" dt="2026-10-08T13:44:50.143" v="958" actId="120"/>
+          <ac:spMkLst>
+            <pc:docMk/>
+            <pc:sldMk cId="0" sldId="259"/>
+            <ac:spMk id="10" creationId="{CC48DAE9-6E2F-4AB5-A805-0F43BF2F2202}"/>
+          </ac:spMkLst>
+        </pc:spChg>
+        <pc:picChg chg="del mod">
+          <ac:chgData name="kousuke yamamoto" userId="516c4d66ab16f868" providerId="LiveId" clId="{6DE8346A-485C-46ED-AFC0-899DF69DB0FD}" dt="2026-10-08T13:41:33.658" v="805" actId="478"/>
+          <ac:picMkLst>
+            <pc:docMk/>
+            <pc:sldMk cId="0" sldId="259"/>
+            <ac:picMk id="8" creationId="{C60C3470-23D4-43F0-BC82-8A64EEC90281}"/>
+          </ac:picMkLst>
+        </pc:picChg>
+        <pc:picChg chg="mod">
+          <ac:chgData name="kousuke yamamoto" userId="516c4d66ab16f868" providerId="LiveId" clId="{6DE8346A-485C-46ED-AFC0-899DF69DB0FD}" dt="2026-10-08T13:39:36.562" v="767" actId="1076"/>
+          <ac:picMkLst>
+            <pc:docMk/>
+            <pc:sldMk cId="0" sldId="259"/>
+            <ac:picMk id="9" creationId="{05B52EF4-83E1-45B0-AA9E-EBBCD65FBCE7}"/>
+          </ac:picMkLst>
+        </pc:picChg>
+        <pc:picChg chg="mod">
+          <ac:chgData name="kousuke yamamoto" userId="516c4d66ab16f868" providerId="LiveId" clId="{6DE8346A-485C-46ED-AFC0-899DF69DB0FD}" dt="2026-10-08T13:40:41.218" v="793" actId="1076"/>
+          <ac:picMkLst>
+            <pc:docMk/>
+            <pc:sldMk cId="0" sldId="259"/>
+            <ac:picMk id="12" creationId="{77A588C8-9C41-42FC-AC42-0CA488F60093}"/>
+          </ac:picMkLst>
+        </pc:picChg>
+      </pc:sldChg>
+      <pc:sldChg chg="addSp delSp modSp mod ord">
+        <pc:chgData name="kousuke yamamoto" userId="516c4d66ab16f868" providerId="LiveId" clId="{6DE8346A-485C-46ED-AFC0-899DF69DB0FD}" dt="2026-10-09T02:21:34.726" v="1675"/>
+        <pc:sldMkLst>
+          <pc:docMk/>
+          <pc:sldMk cId="0" sldId="261"/>
+        </pc:sldMkLst>
+        <pc:spChg chg="mod">
+          <ac:chgData name="kousuke yamamoto" userId="516c4d66ab16f868" providerId="LiveId" clId="{6DE8346A-485C-46ED-AFC0-899DF69DB0FD}" dt="2026-10-08T13:54:56.066" v="1156" actId="14100"/>
+          <ac:spMkLst>
+            <pc:docMk/>
+            <pc:sldMk cId="0" sldId="261"/>
+            <ac:spMk id="3" creationId="{70EAE7B8-2E7A-4AF5-9F80-324BE3D322C8}"/>
+          </ac:spMkLst>
+        </pc:spChg>
+        <pc:spChg chg="mod">
+          <ac:chgData name="kousuke yamamoto" userId="516c4d66ab16f868" providerId="LiveId" clId="{6DE8346A-485C-46ED-AFC0-899DF69DB0FD}" dt="2026-10-08T14:45:18.941" v="1292" actId="1076"/>
+          <ac:spMkLst>
+            <pc:docMk/>
+            <pc:sldMk cId="0" sldId="261"/>
+            <ac:spMk id="4" creationId="{2A6CE379-9DB5-4E43-AE4A-565D343B3DEF}"/>
+          </ac:spMkLst>
+        </pc:spChg>
+        <pc:spChg chg="mod">
+          <ac:chgData name="kousuke yamamoto" userId="516c4d66ab16f868" providerId="LiveId" clId="{6DE8346A-485C-46ED-AFC0-899DF69DB0FD}" dt="2026-10-08T14:47:08.346" v="1344" actId="1076"/>
+          <ac:spMkLst>
+            <pc:docMk/>
+            <pc:sldMk cId="0" sldId="261"/>
+            <ac:spMk id="5" creationId="{91870252-9069-4CF2-BDB1-5539DA6535CC}"/>
+          </ac:spMkLst>
+        </pc:spChg>
+        <pc:spChg chg="mod">
+          <ac:chgData name="kousuke yamamoto" userId="516c4d66ab16f868" providerId="LiveId" clId="{6DE8346A-485C-46ED-AFC0-899DF69DB0FD}" dt="2026-10-08T14:47:14.104" v="1346" actId="14100"/>
+          <ac:spMkLst>
+            <pc:docMk/>
+            <pc:sldMk cId="0" sldId="261"/>
+            <ac:spMk id="6" creationId="{595A4AA4-1310-49B0-B0FA-38D93BAA4E46}"/>
+          </ac:spMkLst>
+        </pc:spChg>
+        <pc:spChg chg="mod">
+          <ac:chgData name="kousuke yamamoto" userId="516c4d66ab16f868" providerId="LiveId" clId="{6DE8346A-485C-46ED-AFC0-899DF69DB0FD}" dt="2026-10-08T14:45:21.500" v="1293" actId="1076"/>
+          <ac:spMkLst>
+            <pc:docMk/>
+            <pc:sldMk cId="0" sldId="261"/>
+            <ac:spMk id="8" creationId="{B583C0F8-8C54-4417-9EE0-84A0AF84E0DF}"/>
+          </ac:spMkLst>
+        </pc:spChg>
+        <pc:spChg chg="mod">
+          <ac:chgData name="kousuke yamamoto" userId="516c4d66ab16f868" providerId="LiveId" clId="{6DE8346A-485C-46ED-AFC0-899DF69DB0FD}" dt="2026-10-08T14:52:31.579" v="1607" actId="1076"/>
+          <ac:spMkLst>
+            <pc:docMk/>
+            <pc:sldMk cId="0" sldId="261"/>
+            <ac:spMk id="9" creationId="{0D6B0945-959E-46D4-9780-A6377E1640D8}"/>
+          </ac:spMkLst>
+        </pc:spChg>
+        <pc:spChg chg="del mod">
+          <ac:chgData name="kousuke yamamoto" userId="516c4d66ab16f868" providerId="LiveId" clId="{6DE8346A-485C-46ED-AFC0-899DF69DB0FD}" dt="2026-10-08T14:49:30.247" v="1423" actId="478"/>
+          <ac:spMkLst>
+            <pc:docMk/>
+            <pc:sldMk cId="0" sldId="261"/>
+            <ac:spMk id="14" creationId="{BA078506-7E4C-4F5D-B9A4-35A7E62517A2}"/>
+          </ac:spMkLst>
+        </pc:spChg>
+        <pc:spChg chg="mod">
+          <ac:chgData name="kousuke yamamoto" userId="516c4d66ab16f868" providerId="LiveId" clId="{6DE8346A-485C-46ED-AFC0-899DF69DB0FD}" dt="2026-10-08T14:47:18.904" v="1348" actId="14100"/>
+          <ac:spMkLst>
+            <pc:docMk/>
+            <pc:sldMk cId="0" sldId="261"/>
+            <ac:spMk id="16" creationId="{CFB47AD2-AE9E-45A7-968A-6F4AF3BE494A}"/>
+          </ac:spMkLst>
+        </pc:spChg>
+        <pc:spChg chg="add mod">
+          <ac:chgData name="kousuke yamamoto" userId="516c4d66ab16f868" providerId="LiveId" clId="{6DE8346A-485C-46ED-AFC0-899DF69DB0FD}" dt="2026-10-08T14:53:03.971" v="1621" actId="14100"/>
+          <ac:spMkLst>
+            <pc:docMk/>
+            <pc:sldMk cId="0" sldId="261"/>
+            <ac:spMk id="18" creationId="{AF97EBDD-B6B0-4209-97C2-591BEBCBF71B}"/>
+          </ac:spMkLst>
+        </pc:spChg>
+        <pc:spChg chg="mod">
+          <ac:chgData name="kousuke yamamoto" userId="516c4d66ab16f868" providerId="LiveId" clId="{6DE8346A-485C-46ED-AFC0-899DF69DB0FD}" dt="2026-10-08T14:45:26.309" v="1295" actId="1076"/>
+          <ac:spMkLst>
+            <pc:docMk/>
+            <pc:sldMk cId="0" sldId="261"/>
+            <ac:spMk id="19" creationId="{25A60F97-B616-4CEB-A0D8-7362FB3B7E19}"/>
+          </ac:spMkLst>
+        </pc:spChg>
+        <pc:spChg chg="mod">
+          <ac:chgData name="kousuke yamamoto" userId="516c4d66ab16f868" providerId="LiveId" clId="{6DE8346A-485C-46ED-AFC0-899DF69DB0FD}" dt="2026-10-08T14:45:33.906" v="1297" actId="1076"/>
+          <ac:spMkLst>
+            <pc:docMk/>
+            <pc:sldMk cId="0" sldId="261"/>
+            <ac:spMk id="20" creationId="{7BA5D4A2-CECA-4F42-AD75-907BD8F905BA}"/>
+          </ac:spMkLst>
+        </pc:spChg>
+        <pc:spChg chg="mod">
+          <ac:chgData name="kousuke yamamoto" userId="516c4d66ab16f868" providerId="LiveId" clId="{6DE8346A-485C-46ED-AFC0-899DF69DB0FD}" dt="2026-10-08T14:48:20.775" v="1368" actId="1076"/>
+          <ac:spMkLst>
+            <pc:docMk/>
+            <pc:sldMk cId="0" sldId="261"/>
+            <ac:spMk id="21" creationId="{ADD38AD8-08A4-4D68-ACDC-7161086FCB9D}"/>
+          </ac:spMkLst>
+        </pc:spChg>
+        <pc:spChg chg="del mod">
+          <ac:chgData name="kousuke yamamoto" userId="516c4d66ab16f868" providerId="LiveId" clId="{6DE8346A-485C-46ED-AFC0-899DF69DB0FD}" dt="2026-10-08T14:50:50.020" v="1515" actId="478"/>
+          <ac:spMkLst>
+            <pc:docMk/>
+            <pc:sldMk cId="0" sldId="261"/>
+            <ac:spMk id="22" creationId="{7806784A-4868-4A8F-BB54-800602572138}"/>
+          </ac:spMkLst>
+        </pc:spChg>
+        <pc:spChg chg="del mod">
+          <ac:chgData name="kousuke yamamoto" userId="516c4d66ab16f868" providerId="LiveId" clId="{6DE8346A-485C-46ED-AFC0-899DF69DB0FD}" dt="2026-10-08T14:52:58.258" v="1620" actId="478"/>
+          <ac:spMkLst>
+            <pc:docMk/>
+            <pc:sldMk cId="0" sldId="261"/>
+            <ac:spMk id="23" creationId="{E2D9D0D3-D19E-47EF-9969-C3597AD4EDB4}"/>
+          </ac:spMkLst>
+        </pc:spChg>
+        <pc:spChg chg="mod">
+          <ac:chgData name="kousuke yamamoto" userId="516c4d66ab16f868" providerId="LiveId" clId="{6DE8346A-485C-46ED-AFC0-899DF69DB0FD}" dt="2026-10-08T14:52:45.059" v="1616" actId="14100"/>
+          <ac:spMkLst>
+            <pc:docMk/>
+            <pc:sldMk cId="0" sldId="261"/>
+            <ac:spMk id="24" creationId="{B92945C9-D043-4A1F-BC8A-7A0428356C38}"/>
+          </ac:spMkLst>
+        </pc:spChg>
+        <pc:spChg chg="add mod">
+          <ac:chgData name="kousuke yamamoto" userId="516c4d66ab16f868" providerId="LiveId" clId="{6DE8346A-485C-46ED-AFC0-899DF69DB0FD}" dt="2026-10-08T14:53:36.990" v="1632" actId="1076"/>
+          <ac:spMkLst>
+            <pc:docMk/>
+            <pc:sldMk cId="0" sldId="261"/>
+            <ac:spMk id="25" creationId="{BE15DC54-AE7A-4F8E-918F-363DE7902632}"/>
+          </ac:spMkLst>
+        </pc:spChg>
+        <pc:spChg chg="add mod">
+          <ac:chgData name="kousuke yamamoto" userId="516c4d66ab16f868" providerId="LiveId" clId="{6DE8346A-485C-46ED-AFC0-899DF69DB0FD}" dt="2026-10-08T14:53:16.850" v="1626" actId="14100"/>
+          <ac:spMkLst>
+            <pc:docMk/>
+            <pc:sldMk cId="0" sldId="261"/>
+            <ac:spMk id="26" creationId="{EC408C00-334B-48E6-BDB7-C0B273946351}"/>
+          </ac:spMkLst>
+        </pc:spChg>
+        <pc:spChg chg="add mod">
+          <ac:chgData name="kousuke yamamoto" userId="516c4d66ab16f868" providerId="LiveId" clId="{6DE8346A-485C-46ED-AFC0-899DF69DB0FD}" dt="2026-10-08T14:53:31.831" v="1630" actId="1076"/>
+          <ac:spMkLst>
+            <pc:docMk/>
+            <pc:sldMk cId="0" sldId="261"/>
+            <ac:spMk id="27" creationId="{94ABE33A-3EDD-4FFD-98E0-1A17C9858C07}"/>
+          </ac:spMkLst>
+        </pc:spChg>
+        <pc:spChg chg="add mod">
+          <ac:chgData name="kousuke yamamoto" userId="516c4d66ab16f868" providerId="LiveId" clId="{6DE8346A-485C-46ED-AFC0-899DF69DB0FD}" dt="2026-10-08T14:53:59.948" v="1667" actId="14100"/>
+          <ac:spMkLst>
+            <pc:docMk/>
+            <pc:sldMk cId="0" sldId="261"/>
+            <ac:spMk id="28" creationId="{A4379FB6-A154-4892-8EFC-85261F9DFC79}"/>
+          </ac:spMkLst>
+        </pc:spChg>
+        <pc:picChg chg="add del">
+          <ac:chgData name="kousuke yamamoto" userId="516c4d66ab16f868" providerId="LiveId" clId="{6DE8346A-485C-46ED-AFC0-899DF69DB0FD}" dt="2026-10-08T14:49:37.559" v="1426" actId="22"/>
+          <ac:picMkLst>
+            <pc:docMk/>
+            <pc:sldMk cId="0" sldId="261"/>
+            <ac:picMk id="7" creationId="{09DAB708-E88B-4DB9-B185-42DCA2B6BEF6}"/>
+          </ac:picMkLst>
+        </pc:picChg>
+      </pc:sldChg>
+      <pc:sldChg chg="addSp delSp modSp mod">
+        <pc:chgData name="kousuke yamamoto" userId="516c4d66ab16f868" providerId="LiveId" clId="{6DE8346A-485C-46ED-AFC0-899DF69DB0FD}" dt="2026-10-08T13:38:59.554" v="759" actId="1076"/>
+        <pc:sldMkLst>
+          <pc:docMk/>
+          <pc:sldMk cId="0" sldId="263"/>
+        </pc:sldMkLst>
+        <pc:spChg chg="del mod">
+          <ac:chgData name="kousuke yamamoto" userId="516c4d66ab16f868" providerId="LiveId" clId="{6DE8346A-485C-46ED-AFC0-899DF69DB0FD}" dt="2026-10-08T13:05:58.608" v="490" actId="478"/>
+          <ac:spMkLst>
+            <pc:docMk/>
+            <pc:sldMk cId="0" sldId="263"/>
+            <ac:spMk id="2" creationId="{376B169F-2FD1-4F7E-BD85-FF8DA51CEE45}"/>
+          </ac:spMkLst>
+        </pc:spChg>
+        <pc:spChg chg="add mod">
+          <ac:chgData name="kousuke yamamoto" userId="516c4d66ab16f868" providerId="LiveId" clId="{6DE8346A-485C-46ED-AFC0-899DF69DB0FD}" dt="2026-10-08T13:07:32.041" v="511" actId="1076"/>
+          <ac:spMkLst>
+            <pc:docMk/>
+            <pc:sldMk cId="0" sldId="263"/>
+            <ac:spMk id="3" creationId="{FB759AF9-7281-48AC-8DBF-B36CB5CCE18B}"/>
+          </ac:spMkLst>
+        </pc:spChg>
+        <pc:spChg chg="add mod">
+          <ac:chgData name="kousuke yamamoto" userId="516c4d66ab16f868" providerId="LiveId" clId="{6DE8346A-485C-46ED-AFC0-899DF69DB0FD}" dt="2026-10-08T13:37:00.121" v="745" actId="255"/>
+          <ac:spMkLst>
+            <pc:docMk/>
+            <pc:sldMk cId="0" sldId="263"/>
+            <ac:spMk id="4" creationId="{D063401D-D46E-42DF-90E2-DF297FF1B942}"/>
+          </ac:spMkLst>
+        </pc:spChg>
+        <pc:spChg chg="add mod">
+          <ac:chgData name="kousuke yamamoto" userId="516c4d66ab16f868" providerId="LiveId" clId="{6DE8346A-485C-46ED-AFC0-899DF69DB0FD}" dt="2026-10-08T13:38:59.554" v="759" actId="1076"/>
+          <ac:spMkLst>
+            <pc:docMk/>
+            <pc:sldMk cId="0" sldId="263"/>
+            <ac:spMk id="5" creationId="{7EE809D5-24E5-4881-8988-806117AED71C}"/>
+          </ac:spMkLst>
+        </pc:spChg>
+        <pc:spChg chg="mod">
+          <ac:chgData name="kousuke yamamoto" userId="516c4d66ab16f868" providerId="LiveId" clId="{6DE8346A-485C-46ED-AFC0-899DF69DB0FD}" dt="2026-10-08T13:23:05.381" v="739" actId="1076"/>
+          <ac:spMkLst>
+            <pc:docMk/>
+            <pc:sldMk cId="0" sldId="263"/>
+            <ac:spMk id="9" creationId="{31CC81D0-7A6F-4454-B188-C57577CE4627}"/>
+          </ac:spMkLst>
+        </pc:spChg>
+        <pc:spChg chg="add del mod">
+          <ac:chgData name="kousuke yamamoto" userId="516c4d66ab16f868" providerId="LiveId" clId="{6DE8346A-485C-46ED-AFC0-899DF69DB0FD}" dt="2026-10-08T13:20:35.626" v="628"/>
+          <ac:spMkLst>
+            <pc:docMk/>
+            <pc:sldMk cId="0" sldId="263"/>
+            <ac:spMk id="12" creationId="{D18E6C2A-FBAC-404A-B9A0-6E854BB11B49}"/>
+          </ac:spMkLst>
+        </pc:spChg>
+        <pc:spChg chg="add mod">
+          <ac:chgData name="kousuke yamamoto" userId="516c4d66ab16f868" providerId="LiveId" clId="{6DE8346A-485C-46ED-AFC0-899DF69DB0FD}" dt="2026-10-08T13:38:25.752" v="757" actId="14100"/>
+          <ac:spMkLst>
+            <pc:docMk/>
+            <pc:sldMk cId="0" sldId="263"/>
+            <ac:spMk id="13" creationId="{18E44EB3-9135-4711-BFF9-4EE0C51469A4}"/>
+          </ac:spMkLst>
+        </pc:spChg>
+        <pc:graphicFrameChg chg="add del mod">
+          <ac:chgData name="kousuke yamamoto" userId="516c4d66ab16f868" providerId="LiveId" clId="{6DE8346A-485C-46ED-AFC0-899DF69DB0FD}" dt="2026-10-08T13:15:37.562" v="520"/>
+          <ac:graphicFrameMkLst>
+            <pc:docMk/>
+            <pc:sldMk cId="0" sldId="263"/>
+            <ac:graphicFrameMk id="6" creationId="{117B0E2F-55CD-48B9-AC6D-A1BE1D8A98E9}"/>
+          </ac:graphicFrameMkLst>
+        </pc:graphicFrameChg>
+        <pc:graphicFrameChg chg="add del mod">
+          <ac:chgData name="kousuke yamamoto" userId="516c4d66ab16f868" providerId="LiveId" clId="{6DE8346A-485C-46ED-AFC0-899DF69DB0FD}" dt="2026-10-08T13:15:37.562" v="520"/>
+          <ac:graphicFrameMkLst>
+            <pc:docMk/>
+            <pc:sldMk cId="0" sldId="263"/>
+            <ac:graphicFrameMk id="8" creationId="{3F2E9702-9657-4003-A5CA-507B44C6B2B2}"/>
+          </ac:graphicFrameMkLst>
+        </pc:graphicFrameChg>
+        <pc:graphicFrameChg chg="add mod">
+          <ac:chgData name="kousuke yamamoto" userId="516c4d66ab16f868" providerId="LiveId" clId="{6DE8346A-485C-46ED-AFC0-899DF69DB0FD}" dt="2026-10-08T13:20:44.638" v="631" actId="1076"/>
+          <ac:graphicFrameMkLst>
+            <pc:docMk/>
+            <pc:sldMk cId="0" sldId="263"/>
+            <ac:graphicFrameMk id="10" creationId="{0324B8CD-ACFE-498B-81C7-CA26BE4FCA6C}"/>
+          </ac:graphicFrameMkLst>
+        </pc:graphicFrameChg>
+        <pc:graphicFrameChg chg="add del mod">
+          <ac:chgData name="kousuke yamamoto" userId="516c4d66ab16f868" providerId="LiveId" clId="{6DE8346A-485C-46ED-AFC0-899DF69DB0FD}" dt="2026-10-08T13:17:09.850" v="611" actId="478"/>
+          <ac:graphicFrameMkLst>
+            <pc:docMk/>
+            <pc:sldMk cId="0" sldId="263"/>
+            <ac:graphicFrameMk id="11" creationId="{65C61016-ACE7-4497-9E3D-3C1EC8032D7A}"/>
+          </ac:graphicFrameMkLst>
+        </pc:graphicFrameChg>
+        <pc:graphicFrameChg chg="add del mod">
+          <ac:chgData name="kousuke yamamoto" userId="516c4d66ab16f868" providerId="LiveId" clId="{6DE8346A-485C-46ED-AFC0-899DF69DB0FD}" dt="2026-10-08T13:37:52.773" v="752" actId="478"/>
+          <ac:graphicFrameMkLst>
+            <pc:docMk/>
+            <pc:sldMk cId="0" sldId="263"/>
+            <ac:graphicFrameMk id="14" creationId="{8882B0A0-8771-47A5-8765-C1D1B318D62A}"/>
+          </ac:graphicFrameMkLst>
+        </pc:graphicFrameChg>
+        <pc:graphicFrameChg chg="add del mod">
+          <ac:chgData name="kousuke yamamoto" userId="516c4d66ab16f868" providerId="LiveId" clId="{6DE8346A-485C-46ED-AFC0-899DF69DB0FD}" dt="2026-10-08T13:22:26.529" v="731" actId="478"/>
+          <ac:graphicFrameMkLst>
+            <pc:docMk/>
+            <pc:sldMk cId="0" sldId="263"/>
+            <ac:graphicFrameMk id="15" creationId="{C84B2099-4523-409D-9D37-044F24E3CF95}"/>
+          </ac:graphicFrameMkLst>
+        </pc:graphicFrameChg>
+      </pc:sldChg>
+      <pc:sldChg chg="modSp mod">
+        <pc:chgData name="kousuke yamamoto" userId="516c4d66ab16f868" providerId="LiveId" clId="{6DE8346A-485C-46ED-AFC0-899DF69DB0FD}" dt="2026-10-08T14:48:07.294" v="1365" actId="20577"/>
+        <pc:sldMkLst>
+          <pc:docMk/>
+          <pc:sldMk cId="3622600241" sldId="264"/>
+        </pc:sldMkLst>
+        <pc:spChg chg="mod">
+          <ac:chgData name="kousuke yamamoto" userId="516c4d66ab16f868" providerId="LiveId" clId="{6DE8346A-485C-46ED-AFC0-899DF69DB0FD}" dt="2026-10-08T14:48:07.294" v="1365" actId="20577"/>
+          <ac:spMkLst>
+            <pc:docMk/>
+            <pc:sldMk cId="3622600241" sldId="264"/>
+            <ac:spMk id="3" creationId="{3C9E4263-8370-4EC0-B987-B59700E54FA7}"/>
+          </ac:spMkLst>
+        </pc:spChg>
+        <pc:spChg chg="mod">
+          <ac:chgData name="kousuke yamamoto" userId="516c4d66ab16f868" providerId="LiveId" clId="{6DE8346A-485C-46ED-AFC0-899DF69DB0FD}" dt="2026-10-08T05:40:01.680" v="8" actId="20577"/>
+          <ac:spMkLst>
+            <pc:docMk/>
+            <pc:sldMk cId="3622600241" sldId="264"/>
+            <ac:spMk id="5" creationId="{7BD15FD0-936A-427E-B92E-3358E9AE87D9}"/>
+          </ac:spMkLst>
+        </pc:spChg>
+      </pc:sldChg>
+      <pc:sldChg chg="modSp mod">
+        <pc:chgData name="kousuke yamamoto" userId="516c4d66ab16f868" providerId="LiveId" clId="{6DE8346A-485C-46ED-AFC0-899DF69DB0FD}" dt="2026-10-08T05:48:05.063" v="242" actId="14100"/>
+        <pc:sldMkLst>
+          <pc:docMk/>
+          <pc:sldMk cId="4047880640" sldId="267"/>
+        </pc:sldMkLst>
+        <pc:spChg chg="mod">
+          <ac:chgData name="kousuke yamamoto" userId="516c4d66ab16f868" providerId="LiveId" clId="{6DE8346A-485C-46ED-AFC0-899DF69DB0FD}" dt="2026-10-08T05:47:07.765" v="190" actId="20577"/>
+          <ac:spMkLst>
+            <pc:docMk/>
+            <pc:sldMk cId="4047880640" sldId="267"/>
+            <ac:spMk id="4" creationId="{FDE00C1E-5F09-44B3-9D60-249CD5642B5B}"/>
+          </ac:spMkLst>
+        </pc:spChg>
+        <pc:spChg chg="mod">
+          <ac:chgData name="kousuke yamamoto" userId="516c4d66ab16f868" providerId="LiveId" clId="{6DE8346A-485C-46ED-AFC0-899DF69DB0FD}" dt="2026-10-08T05:47:34.202" v="216" actId="20577"/>
+          <ac:spMkLst>
+            <pc:docMk/>
+            <pc:sldMk cId="4047880640" sldId="267"/>
+            <ac:spMk id="7" creationId="{5507A22D-974F-4D2F-9E4C-0869B25B6561}"/>
+          </ac:spMkLst>
+        </pc:spChg>
+        <pc:spChg chg="mod">
+          <ac:chgData name="kousuke yamamoto" userId="516c4d66ab16f868" providerId="LiveId" clId="{6DE8346A-485C-46ED-AFC0-899DF69DB0FD}" dt="2026-10-08T05:48:05.063" v="242" actId="14100"/>
+          <ac:spMkLst>
+            <pc:docMk/>
+            <pc:sldMk cId="4047880640" sldId="267"/>
+            <ac:spMk id="13" creationId="{4AF0D3BD-546E-4F94-BF34-BE6901DB6F25}"/>
+          </ac:spMkLst>
+        </pc:spChg>
+      </pc:sldChg>
+      <pc:sldChg chg="modSp mod ord">
+        <pc:chgData name="kousuke yamamoto" userId="516c4d66ab16f868" providerId="LiveId" clId="{6DE8346A-485C-46ED-AFC0-899DF69DB0FD}" dt="2026-10-09T02:21:37.695" v="1679"/>
+        <pc:sldMkLst>
+          <pc:docMk/>
+          <pc:sldMk cId="1417576500" sldId="268"/>
+        </pc:sldMkLst>
+        <pc:spChg chg="mod">
+          <ac:chgData name="kousuke yamamoto" userId="516c4d66ab16f868" providerId="LiveId" clId="{6DE8346A-485C-46ED-AFC0-899DF69DB0FD}" dt="2026-10-08T14:54:44.843" v="1671" actId="255"/>
+          <ac:spMkLst>
+            <pc:docMk/>
+            <pc:sldMk cId="1417576500" sldId="268"/>
+            <ac:spMk id="9" creationId="{AE2D33BF-6DBF-49C0-BADC-46794B569439}"/>
+          </ac:spMkLst>
+        </pc:spChg>
+      </pc:sldChg>
+      <pc:sldChg chg="ord">
+        <pc:chgData name="kousuke yamamoto" userId="516c4d66ab16f868" providerId="LiveId" clId="{6DE8346A-485C-46ED-AFC0-899DF69DB0FD}" dt="2026-10-09T02:21:38.992" v="1681"/>
+        <pc:sldMkLst>
+          <pc:docMk/>
+          <pc:sldMk cId="3929329428" sldId="273"/>
+        </pc:sldMkLst>
+      </pc:sldChg>
+      <pc:sldChg chg="addSp delSp modSp mod">
+        <pc:chgData name="kousuke yamamoto" userId="516c4d66ab16f868" providerId="LiveId" clId="{6DE8346A-485C-46ED-AFC0-899DF69DB0FD}" dt="2026-10-08T13:00:57.495" v="486" actId="1076"/>
+        <pc:sldMkLst>
+          <pc:docMk/>
+          <pc:sldMk cId="1368519107" sldId="275"/>
+        </pc:sldMkLst>
+        <pc:spChg chg="mod">
+          <ac:chgData name="kousuke yamamoto" userId="516c4d66ab16f868" providerId="LiveId" clId="{6DE8346A-485C-46ED-AFC0-899DF69DB0FD}" dt="2026-10-08T12:52:45.274" v="417" actId="1076"/>
+          <ac:spMkLst>
+            <pc:docMk/>
+            <pc:sldMk cId="1368519107" sldId="275"/>
+            <ac:spMk id="2" creationId="{833A4E06-EE75-40A7-A1FD-D57D73A87CA8}"/>
+          </ac:spMkLst>
+        </pc:spChg>
+        <pc:spChg chg="add mod">
+          <ac:chgData name="kousuke yamamoto" userId="516c4d66ab16f868" providerId="LiveId" clId="{6DE8346A-485C-46ED-AFC0-899DF69DB0FD}" dt="2026-10-08T13:00:57.495" v="486" actId="1076"/>
+          <ac:spMkLst>
+            <pc:docMk/>
+            <pc:sldMk cId="1368519107" sldId="275"/>
+            <ac:spMk id="3" creationId="{C5F7D07E-6853-4ABA-B72B-D02643933F6E}"/>
+          </ac:spMkLst>
+        </pc:spChg>
+        <pc:picChg chg="del mod">
+          <ac:chgData name="kousuke yamamoto" userId="516c4d66ab16f868" providerId="LiveId" clId="{6DE8346A-485C-46ED-AFC0-899DF69DB0FD}" dt="2026-10-08T05:41:48.719" v="22" actId="478"/>
+          <ac:picMkLst>
+            <pc:docMk/>
+            <pc:sldMk cId="1368519107" sldId="275"/>
+            <ac:picMk id="6" creationId="{66BC014B-14C2-4592-BF96-484CACF5DD74}"/>
+          </ac:picMkLst>
+        </pc:picChg>
+      </pc:sldChg>
+      <pc:sldChg chg="modSp mod">
+        <pc:chgData name="kousuke yamamoto" userId="516c4d66ab16f868" providerId="LiveId" clId="{6DE8346A-485C-46ED-AFC0-899DF69DB0FD}" dt="2026-10-08T14:54:29.886" v="1669" actId="14100"/>
+        <pc:sldMkLst>
+          <pc:docMk/>
+          <pc:sldMk cId="2174802983" sldId="276"/>
+        </pc:sldMkLst>
+        <pc:spChg chg="mod">
+          <ac:chgData name="kousuke yamamoto" userId="516c4d66ab16f868" providerId="LiveId" clId="{6DE8346A-485C-46ED-AFC0-899DF69DB0FD}" dt="2026-10-08T14:54:29.886" v="1669" actId="14100"/>
+          <ac:spMkLst>
+            <pc:docMk/>
+            <pc:sldMk cId="2174802983" sldId="276"/>
+            <ac:spMk id="4" creationId="{A84147B3-AEFB-4ABF-A40D-9EB6200E68C3}"/>
+          </ac:spMkLst>
+        </pc:spChg>
+        <pc:picChg chg="mod">
+          <ac:chgData name="kousuke yamamoto" userId="516c4d66ab16f868" providerId="LiveId" clId="{6DE8346A-485C-46ED-AFC0-899DF69DB0FD}" dt="2026-10-08T05:46:31.167" v="161" actId="1076"/>
+          <ac:picMkLst>
+            <pc:docMk/>
+            <pc:sldMk cId="2174802983" sldId="276"/>
+            <ac:picMk id="3" creationId="{042B6202-40C1-4F10-B7F8-05F0C96734AB}"/>
+          </ac:picMkLst>
+        </pc:picChg>
+      </pc:sldChg>
+      <pc:sldChg chg="del">
+        <pc:chgData name="kousuke yamamoto" userId="516c4d66ab16f868" providerId="LiveId" clId="{6DE8346A-485C-46ED-AFC0-899DF69DB0FD}" dt="2026-10-08T05:46:11.621" v="159" actId="2696"/>
+        <pc:sldMkLst>
+          <pc:docMk/>
+          <pc:sldMk cId="3007763323" sldId="277"/>
+        </pc:sldMkLst>
+      </pc:sldChg>
+      <pc:sldChg chg="del">
+        <pc:chgData name="kousuke yamamoto" userId="516c4d66ab16f868" providerId="LiveId" clId="{6DE8346A-485C-46ED-AFC0-899DF69DB0FD}" dt="2026-10-08T05:46:08.684" v="158" actId="2696"/>
+        <pc:sldMkLst>
+          <pc:docMk/>
+          <pc:sldMk cId="1752989940" sldId="278"/>
+        </pc:sldMkLst>
+      </pc:sldChg>
+      <pc:sldChg chg="addSp modSp new del mod">
+        <pc:chgData name="kousuke yamamoto" userId="516c4d66ab16f868" providerId="LiveId" clId="{6DE8346A-485C-46ED-AFC0-899DF69DB0FD}" dt="2026-10-08T12:36:31.237" v="348" actId="47"/>
+        <pc:sldMkLst>
+          <pc:docMk/>
+          <pc:sldMk cId="1962656290" sldId="279"/>
+        </pc:sldMkLst>
+        <pc:picChg chg="add mod">
+          <ac:chgData name="kousuke yamamoto" userId="516c4d66ab16f868" providerId="LiveId" clId="{6DE8346A-485C-46ED-AFC0-899DF69DB0FD}" dt="2026-10-08T05:42:17.799" v="30" actId="14100"/>
+          <ac:picMkLst>
+            <pc:docMk/>
+            <pc:sldMk cId="1962656290" sldId="279"/>
+            <ac:picMk id="3" creationId="{9B8D7499-89A9-4865-84E7-6AE73E2E1E83}"/>
+          </ac:picMkLst>
+        </pc:picChg>
+      </pc:sldChg>
+    </pc:docChg>
+  </pc:docChgLst>
 </pc:chgInfo>
 </file>
 
@@ -275,7 +852,7 @@
           <a:p>
             <a:fld id="{EA23BABC-04D1-40FF-A826-E108E600BEAD}" type="datetimeFigureOut">
               <a:rPr kumimoji="1" lang="ja-JP" altLang="en-US" smtClean="0"/>
-              <a:t>2026/10/6</a:t>
+              <a:t>2026/10/9</a:t>
             </a:fld>
             <a:endParaRPr kumimoji="1" lang="ja-JP" altLang="en-US"/>
           </a:p>
@@ -723,7 +1300,7 @@
           <a:p>
             <a:fld id="{ABD18AC2-2250-4479-91AF-2B392C52A59D}" type="slidenum">
               <a:rPr kumimoji="1" lang="ja-JP" altLang="en-US" smtClean="0"/>
-              <a:t>5</a:t>
+              <a:t>8</a:t>
             </a:fld>
             <a:endParaRPr kumimoji="1" lang="ja-JP" altLang="en-US"/>
           </a:p>
@@ -889,7 +1466,7 @@
           <a:p>
             <a:fld id="{5BCAD085-E8A6-8845-BD4E-CB4CCA059FC4}" type="datetimeFigureOut">
               <a:rPr lang="en-US" smtClean="0"/>
-              <a:t>10/6/2026</a:t>
+              <a:t>10/9/2026</a:t>
             </a:fld>
             <a:endParaRPr lang="en-US"/>
           </a:p>
@@ -1119,7 +1696,7 @@
           <a:p>
             <a:fld id="{5BCAD085-E8A6-8845-BD4E-CB4CCA059FC4}" type="datetimeFigureOut">
               <a:rPr lang="en-US" smtClean="0"/>
-              <a:t>10/6/2026</a:t>
+              <a:t>10/9/2026</a:t>
             </a:fld>
             <a:endParaRPr lang="en-US"/>
           </a:p>
@@ -1359,7 +1936,7 @@
           <a:p>
             <a:fld id="{5BCAD085-E8A6-8845-BD4E-CB4CCA059FC4}" type="datetimeFigureOut">
               <a:rPr lang="en-US" smtClean="0"/>
-              <a:t>10/6/2026</a:t>
+              <a:t>10/9/2026</a:t>
             </a:fld>
             <a:endParaRPr lang="en-US"/>
           </a:p>
@@ -1589,7 +2166,7 @@
           <a:p>
             <a:fld id="{5BCAD085-E8A6-8845-BD4E-CB4CCA059FC4}" type="datetimeFigureOut">
               <a:rPr lang="en-US" smtClean="0"/>
-              <a:t>10/6/2026</a:t>
+              <a:t>10/9/2026</a:t>
             </a:fld>
             <a:endParaRPr lang="en-US"/>
           </a:p>
@@ -1864,7 +2441,7 @@
           <a:p>
             <a:fld id="{5BCAD085-E8A6-8845-BD4E-CB4CCA059FC4}" type="datetimeFigureOut">
               <a:rPr lang="en-US" smtClean="0"/>
-              <a:t>10/6/2026</a:t>
+              <a:t>10/9/2026</a:t>
             </a:fld>
             <a:endParaRPr lang="en-US"/>
           </a:p>
@@ -2193,7 +2770,7 @@
           <a:p>
             <a:fld id="{5BCAD085-E8A6-8845-BD4E-CB4CCA059FC4}" type="datetimeFigureOut">
               <a:rPr lang="en-US" smtClean="0"/>
-              <a:t>10/6/2026</a:t>
+              <a:t>10/9/2026</a:t>
             </a:fld>
             <a:endParaRPr lang="en-US"/>
           </a:p>
@@ -2669,7 +3246,7 @@
           <a:p>
             <a:fld id="{5BCAD085-E8A6-8845-BD4E-CB4CCA059FC4}" type="datetimeFigureOut">
               <a:rPr lang="en-US" smtClean="0"/>
-              <a:t>10/6/2026</a:t>
+              <a:t>10/9/2026</a:t>
             </a:fld>
             <a:endParaRPr lang="en-US"/>
           </a:p>
@@ -2810,7 +3387,7 @@
           <a:p>
             <a:fld id="{5BCAD085-E8A6-8845-BD4E-CB4CCA059FC4}" type="datetimeFigureOut">
               <a:rPr lang="en-US" smtClean="0"/>
-              <a:t>10/6/2026</a:t>
+              <a:t>10/9/2026</a:t>
             </a:fld>
             <a:endParaRPr lang="en-US"/>
           </a:p>
@@ -2923,7 +3500,7 @@
           <a:p>
             <a:fld id="{5BCAD085-E8A6-8845-BD4E-CB4CCA059FC4}" type="datetimeFigureOut">
               <a:rPr lang="en-US" smtClean="0"/>
-              <a:t>10/6/2026</a:t>
+              <a:t>10/9/2026</a:t>
             </a:fld>
             <a:endParaRPr lang="en-US"/>
           </a:p>
@@ -3266,7 +3843,7 @@
           <a:p>
             <a:fld id="{5BCAD085-E8A6-8845-BD4E-CB4CCA059FC4}" type="datetimeFigureOut">
               <a:rPr lang="en-US" smtClean="0"/>
-              <a:t>10/6/2026</a:t>
+              <a:t>10/9/2026</a:t>
             </a:fld>
             <a:endParaRPr lang="en-US"/>
           </a:p>
@@ -3554,7 +4131,7 @@
           <a:p>
             <a:fld id="{5BCAD085-E8A6-8845-BD4E-CB4CCA059FC4}" type="datetimeFigureOut">
               <a:rPr lang="en-US" smtClean="0"/>
-              <a:t>10/6/2026</a:t>
+              <a:t>10/9/2026</a:t>
             </a:fld>
             <a:endParaRPr lang="en-US"/>
           </a:p>
@@ -3830,7 +4407,7 @@
           <a:p>
             <a:fld id="{5BCAD085-E8A6-8845-BD4E-CB4CCA059FC4}" type="datetimeFigureOut">
               <a:rPr lang="en-US" smtClean="0"/>
-              <a:t>10/6/2026</a:t>
+              <a:t>10/9/2026</a:t>
             </a:fld>
             <a:endParaRPr lang="en-US"/>
           </a:p>
@@ -4295,7 +4872,7 @@
                 <a:latin typeface="メイリオ" panose="020B0604030504040204" pitchFamily="50" charset="-128"/>
                 <a:ea typeface="メイリオ" panose="020B0604030504040204" pitchFamily="50" charset="-128"/>
               </a:rPr>
-              <a:t>雨粒を繋げ</a:t>
+              <a:t>雨粒をつなげ</a:t>
             </a:r>
             <a:endParaRPr kumimoji="1" lang="ja-JP" altLang="en-US" sz="9600" dirty="0">
               <a:latin typeface="メイリオ" panose="020B0604030504040204" pitchFamily="50" charset="-128"/>
@@ -4354,7 +4931,7 @@
                 <a:latin typeface="メイリオ" panose="020B0604030504040204" pitchFamily="50" charset="-128"/>
                 <a:ea typeface="メイリオ" panose="020B0604030504040204" pitchFamily="50" charset="-128"/>
               </a:rPr>
-              <a:t>ジャンル　お絵描き</a:t>
+              <a:t>ジャンル　お絵描き　パズル</a:t>
             </a:r>
           </a:p>
         </p:txBody>
@@ -4389,10 +4966,99 @@
           <a:chExt cx="0" cy="0"/>
         </a:xfrm>
       </p:grpSpPr>
+      <p:pic>
+        <p:nvPicPr>
+          <p:cNvPr id="3" name="図 2">
+            <a:extLst>
+              <a:ext uri="{FF2B5EF4-FFF2-40B4-BE49-F238E27FC236}">
+                <a16:creationId xmlns:a16="http://schemas.microsoft.com/office/drawing/2014/main" id="{042B6202-40C1-4F10-B7F8-05F0C96734AB}"/>
+              </a:ext>
+            </a:extLst>
+          </p:cNvPr>
+          <p:cNvPicPr>
+            <a:picLocks noChangeAspect="1"/>
+          </p:cNvPicPr>
+          <p:nvPr/>
+        </p:nvPicPr>
+        <p:blipFill>
+          <a:blip r:embed="rId2"/>
+          <a:stretch>
+            <a:fillRect/>
+          </a:stretch>
+        </p:blipFill>
+        <p:spPr>
+          <a:xfrm>
+            <a:off x="3657600" y="3154680"/>
+            <a:ext cx="4876800" cy="2743200"/>
+          </a:xfrm>
+          <a:prstGeom prst="rect">
+            <a:avLst/>
+          </a:prstGeom>
+        </p:spPr>
+      </p:pic>
+      <p:sp>
+        <p:nvSpPr>
+          <p:cNvPr id="4" name="正方形/長方形 3">
+            <a:extLst>
+              <a:ext uri="{FF2B5EF4-FFF2-40B4-BE49-F238E27FC236}">
+                <a16:creationId xmlns:a16="http://schemas.microsoft.com/office/drawing/2014/main" id="{A84147B3-AEFB-4ABF-A40D-9EB6200E68C3}"/>
+              </a:ext>
+            </a:extLst>
+          </p:cNvPr>
+          <p:cNvSpPr/>
+          <p:nvPr/>
+        </p:nvSpPr>
+        <p:spPr>
+          <a:xfrm>
+            <a:off x="2770632" y="1170432"/>
+            <a:ext cx="6181344" cy="1627632"/>
+          </a:xfrm>
+          <a:prstGeom prst="rect">
+            <a:avLst/>
+          </a:prstGeom>
+          <a:ln>
+            <a:solidFill>
+              <a:schemeClr val="tx1"/>
+            </a:solidFill>
+          </a:ln>
+        </p:spPr>
+        <p:style>
+          <a:lnRef idx="2">
+            <a:schemeClr val="accent6"/>
+          </a:lnRef>
+          <a:fillRef idx="1">
+            <a:schemeClr val="lt1"/>
+          </a:fillRef>
+          <a:effectRef idx="0">
+            <a:schemeClr val="accent6"/>
+          </a:effectRef>
+          <a:fontRef idx="minor">
+            <a:schemeClr val="dk1"/>
+          </a:fontRef>
+        </p:style>
+        <p:txBody>
+          <a:bodyPr rtlCol="0" anchor="ctr"/>
+          <a:lstStyle/>
+          <a:p>
+            <a:pPr algn="ctr"/>
+            <a:r>
+              <a:rPr lang="ja-JP" altLang="en-US" sz="3200" dirty="0">
+                <a:latin typeface="メイリオ" panose="020B0604030504040204" pitchFamily="50" charset="-128"/>
+                <a:ea typeface="メイリオ" panose="020B0604030504040204" pitchFamily="50" charset="-128"/>
+              </a:rPr>
+              <a:t>自由に描くではなく　自分で書けるように盤面を整えるパズル要素もある</a:t>
+            </a:r>
+            <a:endParaRPr kumimoji="1" lang="ja-JP" altLang="en-US" sz="3200" dirty="0">
+              <a:latin typeface="メイリオ" panose="020B0604030504040204" pitchFamily="50" charset="-128"/>
+              <a:ea typeface="メイリオ" panose="020B0604030504040204" pitchFamily="50" charset="-128"/>
+            </a:endParaRPr>
+          </a:p>
+        </p:txBody>
+      </p:sp>
     </p:spTree>
     <p:extLst>
       <p:ext uri="{BB962C8B-B14F-4D97-AF65-F5344CB8AC3E}">
-        <p14:creationId xmlns:p14="http://schemas.microsoft.com/office/powerpoint/2010/main" val="3007763323"/>
+        <p14:creationId xmlns:p14="http://schemas.microsoft.com/office/powerpoint/2010/main" val="2174802983"/>
       </p:ext>
     </p:extLst>
   </p:cSld>
@@ -4421,10 +5087,10 @@
       </p:grpSpPr>
       <p:sp>
         <p:nvSpPr>
-          <p:cNvPr id="4" name="正方形/長方形 3">
-            <a:extLst>
-              <a:ext uri="{FF2B5EF4-FFF2-40B4-BE49-F238E27FC236}">
-                <a16:creationId xmlns:a16="http://schemas.microsoft.com/office/drawing/2014/main" id="{6840A768-F67B-4920-B60C-4E4E518CFD24}"/>
+          <p:cNvPr id="2" name="正方形/長方形 1">
+            <a:extLst>
+              <a:ext uri="{FF2B5EF4-FFF2-40B4-BE49-F238E27FC236}">
+                <a16:creationId xmlns:a16="http://schemas.microsoft.com/office/drawing/2014/main" id="{94BBD830-09D9-4A07-A52B-EC8B6E69593B}"/>
               </a:ext>
             </a:extLst>
           </p:cNvPr>
@@ -4433,168 +5099,73 @@
         </p:nvSpPr>
         <p:spPr>
           <a:xfrm>
-            <a:off x="184014" y="188174"/>
-            <a:ext cx="5911986" cy="2854054"/>
-          </a:xfrm>
-          <a:prstGeom prst="rect">
-            <a:avLst/>
-          </a:prstGeom>
-          <a:ln>
-            <a:noFill/>
-          </a:ln>
-        </p:spPr>
-        <p:style>
-          <a:lnRef idx="2">
-            <a:schemeClr val="accent6"/>
-          </a:lnRef>
-          <a:fillRef idx="1">
-            <a:schemeClr val="lt1"/>
-          </a:fillRef>
-          <a:effectRef idx="0">
-            <a:schemeClr val="accent6"/>
-          </a:effectRef>
-          <a:fontRef idx="minor">
-            <a:schemeClr val="dk1"/>
-          </a:fontRef>
-        </p:style>
-        <p:txBody>
-          <a:bodyPr rtlCol="0" anchor="ctr"/>
-          <a:lstStyle/>
-          <a:p>
-            <a:pPr algn="ctr"/>
-            <a:r>
-              <a:rPr lang="ja-JP" altLang="en-US" sz="4800" dirty="0">
-                <a:latin typeface="メイリオ" panose="020B0604030504040204" pitchFamily="50" charset="-128"/>
-                <a:ea typeface="メイリオ" panose="020B0604030504040204" pitchFamily="50" charset="-128"/>
-              </a:rPr>
-              <a:t>既存のゲームとの</a:t>
-            </a:r>
-            <a:endParaRPr lang="en-US" altLang="ja-JP" sz="4800" dirty="0">
-              <a:latin typeface="メイリオ" panose="020B0604030504040204" pitchFamily="50" charset="-128"/>
-              <a:ea typeface="メイリオ" panose="020B0604030504040204" pitchFamily="50" charset="-128"/>
-            </a:endParaRPr>
-          </a:p>
-          <a:p>
-            <a:pPr algn="ctr"/>
-            <a:r>
-              <a:rPr lang="ja-JP" altLang="en-US" sz="4800" dirty="0">
-                <a:latin typeface="メイリオ" panose="020B0604030504040204" pitchFamily="50" charset="-128"/>
-                <a:ea typeface="メイリオ" panose="020B0604030504040204" pitchFamily="50" charset="-128"/>
-              </a:rPr>
-              <a:t>差別点</a:t>
-            </a:r>
-            <a:endParaRPr lang="en-US" altLang="ja-JP" sz="4800" dirty="0">
-              <a:latin typeface="メイリオ" panose="020B0604030504040204" pitchFamily="50" charset="-128"/>
-              <a:ea typeface="メイリオ" panose="020B0604030504040204" pitchFamily="50" charset="-128"/>
-            </a:endParaRPr>
-          </a:p>
-          <a:p>
-            <a:pPr algn="ctr"/>
-            <a:endParaRPr kumimoji="1" lang="ja-JP" altLang="en-US" sz="4800" dirty="0">
-              <a:latin typeface="メイリオ" panose="020B0604030504040204" pitchFamily="50" charset="-128"/>
-              <a:ea typeface="メイリオ" panose="020B0604030504040204" pitchFamily="50" charset="-128"/>
-            </a:endParaRPr>
-          </a:p>
-        </p:txBody>
-      </p:sp>
-      <p:pic>
-        <p:nvPicPr>
-          <p:cNvPr id="5" name="図 4">
-            <a:extLst>
-              <a:ext uri="{FF2B5EF4-FFF2-40B4-BE49-F238E27FC236}">
-                <a16:creationId xmlns:a16="http://schemas.microsoft.com/office/drawing/2014/main" id="{3258D720-4F32-47AB-A04F-C0226CFDB304}"/>
-              </a:ext>
-            </a:extLst>
-          </p:cNvPr>
-          <p:cNvPicPr>
-            <a:picLocks noChangeAspect="1"/>
-          </p:cNvPicPr>
-          <p:nvPr/>
-        </p:nvPicPr>
-        <p:blipFill>
-          <a:blip r:embed="rId2"/>
-          <a:stretch>
-            <a:fillRect/>
-          </a:stretch>
-        </p:blipFill>
-        <p:spPr>
-          <a:xfrm>
-            <a:off x="5911986" y="2348834"/>
-            <a:ext cx="6280014" cy="3981450"/>
+            <a:off x="0" y="0"/>
+            <a:ext cx="12192000" cy="6858000"/>
           </a:xfrm>
           <a:prstGeom prst="rect">
             <a:avLst/>
           </a:prstGeom>
         </p:spPr>
-      </p:pic>
-      <p:pic>
-        <p:nvPicPr>
-          <p:cNvPr id="8" name="図 7">
-            <a:extLst>
-              <a:ext uri="{FF2B5EF4-FFF2-40B4-BE49-F238E27FC236}">
-                <a16:creationId xmlns:a16="http://schemas.microsoft.com/office/drawing/2014/main" id="{E15A6B13-698C-466F-8857-1D17DD41414E}"/>
-              </a:ext>
-            </a:extLst>
-          </p:cNvPr>
-          <p:cNvPicPr>
-            <a:picLocks noChangeAspect="1"/>
-          </p:cNvPicPr>
+        <p:style>
+          <a:lnRef idx="2">
+            <a:schemeClr val="dk1">
+              <a:shade val="50000"/>
+            </a:schemeClr>
+          </a:lnRef>
+          <a:fillRef idx="1">
+            <a:schemeClr val="dk1"/>
+          </a:fillRef>
+          <a:effectRef idx="0">
+            <a:schemeClr val="dk1"/>
+          </a:effectRef>
+          <a:fontRef idx="minor">
+            <a:schemeClr val="lt1"/>
+          </a:fontRef>
+        </p:style>
+        <p:txBody>
+          <a:bodyPr rtlCol="0" anchor="ctr"/>
+          <a:lstStyle/>
+          <a:p>
+            <a:pPr algn="ctr"/>
+            <a:endParaRPr kumimoji="1" lang="ja-JP" altLang="en-US"/>
+          </a:p>
+        </p:txBody>
+      </p:sp>
+      <p:sp>
+        <p:nvSpPr>
+          <p:cNvPr id="3" name="正方形/長方形 2">
+            <a:extLst>
+              <a:ext uri="{FF2B5EF4-FFF2-40B4-BE49-F238E27FC236}">
+                <a16:creationId xmlns:a16="http://schemas.microsoft.com/office/drawing/2014/main" id="{FB5A4323-F76A-4BC8-AF9B-DBF0CF5F1BDB}"/>
+              </a:ext>
+            </a:extLst>
+          </p:cNvPr>
+          <p:cNvSpPr/>
           <p:nvPr/>
-        </p:nvPicPr>
-        <p:blipFill>
-          <a:blip r:embed="rId3"/>
-          <a:stretch>
-            <a:fillRect/>
-          </a:stretch>
-        </p:blipFill>
+        </p:nvSpPr>
         <p:spPr>
           <a:xfrm>
-            <a:off x="0" y="2244059"/>
-            <a:ext cx="5911986" cy="4086225"/>
+            <a:off x="3724275" y="2162175"/>
+            <a:ext cx="6076950" cy="2657475"/>
           </a:xfrm>
           <a:prstGeom prst="rect">
             <a:avLst/>
           </a:prstGeom>
         </p:spPr>
-      </p:pic>
-      <p:sp>
-        <p:nvSpPr>
-          <p:cNvPr id="9" name="正方形/長方形 8">
-            <a:extLst>
-              <a:ext uri="{FF2B5EF4-FFF2-40B4-BE49-F238E27FC236}">
-                <a16:creationId xmlns:a16="http://schemas.microsoft.com/office/drawing/2014/main" id="{AE2D33BF-6DBF-49C0-BADC-46794B569439}"/>
-              </a:ext>
-            </a:extLst>
-          </p:cNvPr>
-          <p:cNvSpPr/>
-          <p:nvPr/>
-        </p:nvSpPr>
-        <p:spPr>
-          <a:xfrm>
-            <a:off x="5911986" y="804085"/>
-            <a:ext cx="4994531" cy="777828"/>
-          </a:xfrm>
-          <a:prstGeom prst="rect">
-            <a:avLst/>
-          </a:prstGeom>
-          <a:ln>
-            <a:solidFill>
-              <a:schemeClr val="bg1"/>
-            </a:solidFill>
-          </a:ln>
-        </p:spPr>
         <p:style>
           <a:lnRef idx="2">
-            <a:schemeClr val="dk1"/>
+            <a:schemeClr val="dk1">
+              <a:shade val="50000"/>
+            </a:schemeClr>
           </a:lnRef>
           <a:fillRef idx="1">
-            <a:schemeClr val="lt1"/>
+            <a:schemeClr val="dk1"/>
           </a:fillRef>
           <a:effectRef idx="0">
             <a:schemeClr val="dk1"/>
           </a:effectRef>
           <a:fontRef idx="minor">
-            <a:schemeClr val="dk1"/>
+            <a:schemeClr val="lt1"/>
           </a:fontRef>
         </p:style>
         <p:txBody>
@@ -4603,49 +5174,19 @@
           <a:p>
             <a:pPr algn="ctr"/>
             <a:r>
-              <a:rPr kumimoji="1" lang="ja-JP" altLang="en-US" sz="3600" dirty="0">
-                <a:solidFill>
-                  <a:srgbClr val="FF0000"/>
-                </a:solidFill>
+              <a:rPr kumimoji="1" lang="ja-JP" altLang="en-US" sz="9600" dirty="0">
                 <a:latin typeface="メイリオ" panose="020B0604030504040204" pitchFamily="50" charset="-128"/>
                 <a:ea typeface="メイリオ" panose="020B0604030504040204" pitchFamily="50" charset="-128"/>
               </a:rPr>
-              <a:t>このゲームは</a:t>
-            </a:r>
-            <a:endParaRPr kumimoji="1" lang="en-US" altLang="ja-JP" sz="3600" dirty="0">
-              <a:solidFill>
-                <a:srgbClr val="FF0000"/>
-              </a:solidFill>
-              <a:latin typeface="メイリオ" panose="020B0604030504040204" pitchFamily="50" charset="-128"/>
-              <a:ea typeface="メイリオ" panose="020B0604030504040204" pitchFamily="50" charset="-128"/>
-            </a:endParaRPr>
-          </a:p>
-          <a:p>
-            <a:pPr algn="ctr"/>
-            <a:r>
-              <a:rPr lang="ja-JP" altLang="en-US" sz="3600" dirty="0">
-                <a:solidFill>
-                  <a:srgbClr val="FF0000"/>
-                </a:solidFill>
-                <a:latin typeface="メイリオ" panose="020B0604030504040204" pitchFamily="50" charset="-128"/>
-                <a:ea typeface="メイリオ" panose="020B0604030504040204" pitchFamily="50" charset="-128"/>
-              </a:rPr>
-              <a:t>マウスとキーボードを同時に使う</a:t>
-            </a:r>
-            <a:endParaRPr kumimoji="1" lang="ja-JP" altLang="en-US" sz="3600" dirty="0">
-              <a:solidFill>
-                <a:srgbClr val="FF0000"/>
-              </a:solidFill>
-              <a:latin typeface="メイリオ" panose="020B0604030504040204" pitchFamily="50" charset="-128"/>
-              <a:ea typeface="メイリオ" panose="020B0604030504040204" pitchFamily="50" charset="-128"/>
-            </a:endParaRPr>
+              <a:t>終わり</a:t>
+            </a:r>
           </a:p>
         </p:txBody>
       </p:sp>
     </p:spTree>
     <p:extLst>
       <p:ext uri="{BB962C8B-B14F-4D97-AF65-F5344CB8AC3E}">
-        <p14:creationId xmlns:p14="http://schemas.microsoft.com/office/powerpoint/2010/main" val="1417576500"/>
+        <p14:creationId xmlns:p14="http://schemas.microsoft.com/office/powerpoint/2010/main" val="4151086904"/>
       </p:ext>
     </p:extLst>
   </p:cSld>
@@ -4672,253 +5213,6 @@
           <a:chExt cx="0" cy="0"/>
         </a:xfrm>
       </p:grpSpPr>
-      <p:pic>
-        <p:nvPicPr>
-          <p:cNvPr id="3" name="図 2">
-            <a:extLst>
-              <a:ext uri="{FF2B5EF4-FFF2-40B4-BE49-F238E27FC236}">
-                <a16:creationId xmlns:a16="http://schemas.microsoft.com/office/drawing/2014/main" id="{042B6202-40C1-4F10-B7F8-05F0C96734AB}"/>
-              </a:ext>
-            </a:extLst>
-          </p:cNvPr>
-          <p:cNvPicPr>
-            <a:picLocks noChangeAspect="1"/>
-          </p:cNvPicPr>
-          <p:nvPr/>
-        </p:nvPicPr>
-        <p:blipFill>
-          <a:blip r:embed="rId2"/>
-          <a:stretch>
-            <a:fillRect/>
-          </a:stretch>
-        </p:blipFill>
-        <p:spPr>
-          <a:xfrm>
-            <a:off x="265176" y="3291840"/>
-            <a:ext cx="4876800" cy="2743200"/>
-          </a:xfrm>
-          <a:prstGeom prst="rect">
-            <a:avLst/>
-          </a:prstGeom>
-        </p:spPr>
-      </p:pic>
-      <p:sp>
-        <p:nvSpPr>
-          <p:cNvPr id="4" name="正方形/長方形 3">
-            <a:extLst>
-              <a:ext uri="{FF2B5EF4-FFF2-40B4-BE49-F238E27FC236}">
-                <a16:creationId xmlns:a16="http://schemas.microsoft.com/office/drawing/2014/main" id="{A84147B3-AEFB-4ABF-A40D-9EB6200E68C3}"/>
-              </a:ext>
-            </a:extLst>
-          </p:cNvPr>
-          <p:cNvSpPr/>
-          <p:nvPr/>
-        </p:nvSpPr>
-        <p:spPr>
-          <a:xfrm>
-            <a:off x="2770632" y="1453896"/>
-            <a:ext cx="6181344" cy="1344168"/>
-          </a:xfrm>
-          <a:prstGeom prst="rect">
-            <a:avLst/>
-          </a:prstGeom>
-          <a:ln>
-            <a:solidFill>
-              <a:schemeClr val="tx1"/>
-            </a:solidFill>
-          </a:ln>
-        </p:spPr>
-        <p:style>
-          <a:lnRef idx="2">
-            <a:schemeClr val="accent6"/>
-          </a:lnRef>
-          <a:fillRef idx="1">
-            <a:schemeClr val="lt1"/>
-          </a:fillRef>
-          <a:effectRef idx="0">
-            <a:schemeClr val="accent6"/>
-          </a:effectRef>
-          <a:fontRef idx="minor">
-            <a:schemeClr val="dk1"/>
-          </a:fontRef>
-        </p:style>
-        <p:txBody>
-          <a:bodyPr rtlCol="0" anchor="ctr"/>
-          <a:lstStyle/>
-          <a:p>
-            <a:pPr algn="ctr"/>
-            <a:r>
-              <a:rPr lang="ja-JP" altLang="en-US" sz="2400" dirty="0">
-                <a:latin typeface="メイリオ" panose="020B0604030504040204" pitchFamily="50" charset="-128"/>
-                <a:ea typeface="メイリオ" panose="020B0604030504040204" pitchFamily="50" charset="-128"/>
-              </a:rPr>
-              <a:t>自由に描くではなく　自分で書けるように盤面を整えるパズル要素もある</a:t>
-            </a:r>
-            <a:endParaRPr kumimoji="1" lang="ja-JP" altLang="en-US" sz="2400" dirty="0">
-              <a:latin typeface="メイリオ" panose="020B0604030504040204" pitchFamily="50" charset="-128"/>
-              <a:ea typeface="メイリオ" panose="020B0604030504040204" pitchFamily="50" charset="-128"/>
-            </a:endParaRPr>
-          </a:p>
-        </p:txBody>
-      </p:sp>
-    </p:spTree>
-    <p:extLst>
-      <p:ext uri="{BB962C8B-B14F-4D97-AF65-F5344CB8AC3E}">
-        <p14:creationId xmlns:p14="http://schemas.microsoft.com/office/powerpoint/2010/main" val="2174802983"/>
-      </p:ext>
-    </p:extLst>
-  </p:cSld>
-  <p:clrMapOvr>
-    <a:masterClrMapping/>
-  </p:clrMapOvr>
-</p:sld>
-</file>
-
-<file path=ppt/slides/slide13.xml><?xml version="1.0" encoding="utf-8"?>
-<p:sld xmlns:a="http://schemas.openxmlformats.org/drawingml/2006/main" xmlns:r="http://schemas.openxmlformats.org/officeDocument/2006/relationships" xmlns:p="http://schemas.openxmlformats.org/presentationml/2006/main">
-  <p:cSld>
-    <p:spTree>
-      <p:nvGrpSpPr>
-        <p:cNvPr id="1" name=""/>
-        <p:cNvGrpSpPr/>
-        <p:nvPr/>
-      </p:nvGrpSpPr>
-      <p:grpSpPr>
-        <a:xfrm>
-          <a:off x="0" y="0"/>
-          <a:ext cx="0" cy="0"/>
-          <a:chOff x="0" y="0"/>
-          <a:chExt cx="0" cy="0"/>
-        </a:xfrm>
-      </p:grpSpPr>
-      <p:sp>
-        <p:nvSpPr>
-          <p:cNvPr id="2" name="正方形/長方形 1">
-            <a:extLst>
-              <a:ext uri="{FF2B5EF4-FFF2-40B4-BE49-F238E27FC236}">
-                <a16:creationId xmlns:a16="http://schemas.microsoft.com/office/drawing/2014/main" id="{94BBD830-09D9-4A07-A52B-EC8B6E69593B}"/>
-              </a:ext>
-            </a:extLst>
-          </p:cNvPr>
-          <p:cNvSpPr/>
-          <p:nvPr/>
-        </p:nvSpPr>
-        <p:spPr>
-          <a:xfrm>
-            <a:off x="0" y="0"/>
-            <a:ext cx="12192000" cy="6858000"/>
-          </a:xfrm>
-          <a:prstGeom prst="rect">
-            <a:avLst/>
-          </a:prstGeom>
-        </p:spPr>
-        <p:style>
-          <a:lnRef idx="2">
-            <a:schemeClr val="dk1">
-              <a:shade val="50000"/>
-            </a:schemeClr>
-          </a:lnRef>
-          <a:fillRef idx="1">
-            <a:schemeClr val="dk1"/>
-          </a:fillRef>
-          <a:effectRef idx="0">
-            <a:schemeClr val="dk1"/>
-          </a:effectRef>
-          <a:fontRef idx="minor">
-            <a:schemeClr val="lt1"/>
-          </a:fontRef>
-        </p:style>
-        <p:txBody>
-          <a:bodyPr rtlCol="0" anchor="ctr"/>
-          <a:lstStyle/>
-          <a:p>
-            <a:pPr algn="ctr"/>
-            <a:endParaRPr kumimoji="1" lang="ja-JP" altLang="en-US"/>
-          </a:p>
-        </p:txBody>
-      </p:sp>
-      <p:sp>
-        <p:nvSpPr>
-          <p:cNvPr id="3" name="正方形/長方形 2">
-            <a:extLst>
-              <a:ext uri="{FF2B5EF4-FFF2-40B4-BE49-F238E27FC236}">
-                <a16:creationId xmlns:a16="http://schemas.microsoft.com/office/drawing/2014/main" id="{FB5A4323-F76A-4BC8-AF9B-DBF0CF5F1BDB}"/>
-              </a:ext>
-            </a:extLst>
-          </p:cNvPr>
-          <p:cNvSpPr/>
-          <p:nvPr/>
-        </p:nvSpPr>
-        <p:spPr>
-          <a:xfrm>
-            <a:off x="3724275" y="2162175"/>
-            <a:ext cx="6076950" cy="2657475"/>
-          </a:xfrm>
-          <a:prstGeom prst="rect">
-            <a:avLst/>
-          </a:prstGeom>
-        </p:spPr>
-        <p:style>
-          <a:lnRef idx="2">
-            <a:schemeClr val="dk1">
-              <a:shade val="50000"/>
-            </a:schemeClr>
-          </a:lnRef>
-          <a:fillRef idx="1">
-            <a:schemeClr val="dk1"/>
-          </a:fillRef>
-          <a:effectRef idx="0">
-            <a:schemeClr val="dk1"/>
-          </a:effectRef>
-          <a:fontRef idx="minor">
-            <a:schemeClr val="lt1"/>
-          </a:fontRef>
-        </p:style>
-        <p:txBody>
-          <a:bodyPr rtlCol="0" anchor="ctr"/>
-          <a:lstStyle/>
-          <a:p>
-            <a:pPr algn="ctr"/>
-            <a:r>
-              <a:rPr kumimoji="1" lang="ja-JP" altLang="en-US" sz="9600" dirty="0">
-                <a:latin typeface="メイリオ" panose="020B0604030504040204" pitchFamily="50" charset="-128"/>
-                <a:ea typeface="メイリオ" panose="020B0604030504040204" pitchFamily="50" charset="-128"/>
-              </a:rPr>
-              <a:t>終わり</a:t>
-            </a:r>
-          </a:p>
-        </p:txBody>
-      </p:sp>
-    </p:spTree>
-    <p:extLst>
-      <p:ext uri="{BB962C8B-B14F-4D97-AF65-F5344CB8AC3E}">
-        <p14:creationId xmlns:p14="http://schemas.microsoft.com/office/powerpoint/2010/main" val="4151086904"/>
-      </p:ext>
-    </p:extLst>
-  </p:cSld>
-  <p:clrMapOvr>
-    <a:masterClrMapping/>
-  </p:clrMapOvr>
-</p:sld>
-</file>
-
-<file path=ppt/slides/slide14.xml><?xml version="1.0" encoding="utf-8"?>
-<p:sld xmlns:a="http://schemas.openxmlformats.org/drawingml/2006/main" xmlns:r="http://schemas.openxmlformats.org/officeDocument/2006/relationships" xmlns:p="http://schemas.openxmlformats.org/presentationml/2006/main">
-  <p:cSld>
-    <p:spTree>
-      <p:nvGrpSpPr>
-        <p:cNvPr id="1" name=""/>
-        <p:cNvGrpSpPr/>
-        <p:nvPr/>
-      </p:nvGrpSpPr>
-      <p:grpSpPr>
-        <a:xfrm>
-          <a:off x="0" y="0"/>
-          <a:ext cx="0" cy="0"/>
-          <a:chOff x="0" y="0"/>
-          <a:chExt cx="0" cy="0"/>
-        </a:xfrm>
-      </p:grpSpPr>
       <p:sp>
         <p:nvSpPr>
           <p:cNvPr id="2" name="正方形/長方形 1">
@@ -5090,21 +5384,7 @@
                 <a:latin typeface="メイリオ" panose="020B0604030504040204" pitchFamily="50" charset="-128"/>
                 <a:ea typeface="メイリオ" panose="020B0604030504040204" pitchFamily="50" charset="-128"/>
               </a:rPr>
-              <a:t>自分の書いた文字に</a:t>
-            </a:r>
-            <a:endParaRPr kumimoji="1" lang="en-US" altLang="ja-JP" dirty="0">
-              <a:latin typeface="メイリオ" panose="020B0604030504040204" pitchFamily="50" charset="-128"/>
-              <a:ea typeface="メイリオ" panose="020B0604030504040204" pitchFamily="50" charset="-128"/>
-            </a:endParaRPr>
-          </a:p>
-          <a:p>
-            <a:pPr algn="ctr"/>
-            <a:r>
-              <a:rPr kumimoji="1" lang="ja-JP" altLang="en-US" dirty="0">
-                <a:latin typeface="メイリオ" panose="020B0604030504040204" pitchFamily="50" charset="-128"/>
-                <a:ea typeface="メイリオ" panose="020B0604030504040204" pitchFamily="50" charset="-128"/>
-              </a:rPr>
-              <a:t>満足できるとき</a:t>
+              <a:t>解き方をひらめいたとき</a:t>
             </a:r>
           </a:p>
         </p:txBody>
@@ -5124,7 +5404,7 @@
         <p:spPr>
           <a:xfrm>
             <a:off x="8444013" y="4149085"/>
-            <a:ext cx="2947481" cy="914400"/>
+            <a:ext cx="3077427" cy="1283652"/>
           </a:xfrm>
           <a:prstGeom prst="rect">
             <a:avLst/>
@@ -5154,7 +5434,21 @@
                 <a:latin typeface="メイリオ" panose="020B0604030504040204" pitchFamily="50" charset="-128"/>
                 <a:ea typeface="メイリオ" panose="020B0604030504040204" pitchFamily="50" charset="-128"/>
               </a:rPr>
-              <a:t>達成感・満足感・誇らしさ</a:t>
+              <a:t>達成感・満足感・</a:t>
+            </a:r>
+            <a:endParaRPr lang="en-US" altLang="ja-JP" dirty="0">
+              <a:latin typeface="メイリオ" panose="020B0604030504040204" pitchFamily="50" charset="-128"/>
+              <a:ea typeface="メイリオ" panose="020B0604030504040204" pitchFamily="50" charset="-128"/>
+            </a:endParaRPr>
+          </a:p>
+          <a:p>
+            <a:pPr algn="ctr"/>
+            <a:r>
+              <a:rPr lang="ja-JP" altLang="en-US" dirty="0">
+                <a:latin typeface="メイリオ" panose="020B0604030504040204" pitchFamily="50" charset="-128"/>
+                <a:ea typeface="メイリオ" panose="020B0604030504040204" pitchFamily="50" charset="-128"/>
+              </a:rPr>
+              <a:t>もう一度やりたい</a:t>
             </a:r>
             <a:endParaRPr kumimoji="1" lang="en-US" altLang="ja-JP" dirty="0">
               <a:latin typeface="メイリオ" panose="020B0604030504040204" pitchFamily="50" charset="-128"/>
@@ -5459,8 +5753,8 @@
         </p:nvSpPr>
         <p:spPr>
           <a:xfrm>
-            <a:off x="3133725" y="6121416"/>
-            <a:ext cx="695325" cy="571500"/>
+            <a:off x="1773626" y="6121415"/>
+            <a:ext cx="3378025" cy="622285"/>
           </a:xfrm>
           <a:prstGeom prst="rect">
             <a:avLst/>
@@ -5486,12 +5780,16 @@
           <a:p>
             <a:pPr algn="ctr"/>
             <a:r>
-              <a:rPr kumimoji="1" lang="ja-JP" altLang="en-US" dirty="0">
+              <a:rPr lang="ja-JP" altLang="en-US" dirty="0">
                 <a:latin typeface="メイリオ" panose="020B0604030504040204" pitchFamily="50" charset="-128"/>
                 <a:ea typeface="メイリオ" panose="020B0604030504040204" pitchFamily="50" charset="-128"/>
               </a:rPr>
-              <a:t>書道</a:t>
-            </a:r>
+              <a:t>新しい体験</a:t>
+            </a:r>
+            <a:endParaRPr kumimoji="1" lang="ja-JP" altLang="en-US" dirty="0">
+              <a:latin typeface="メイリオ" panose="020B0604030504040204" pitchFamily="50" charset="-128"/>
+              <a:ea typeface="メイリオ" panose="020B0604030504040204" pitchFamily="50" charset="-128"/>
+            </a:endParaRPr>
           </a:p>
         </p:txBody>
       </p:sp>
@@ -5557,7 +5855,7 @@
 </p:sld>
 </file>
 
-<file path=ppt/slides/slide15.xml><?xml version="1.0" encoding="utf-8"?>
+<file path=ppt/slides/slide13.xml><?xml version="1.0" encoding="utf-8"?>
 <p:sld xmlns:a="http://schemas.openxmlformats.org/drawingml/2006/main" xmlns:r="http://schemas.openxmlformats.org/officeDocument/2006/relationships" xmlns:p="http://schemas.openxmlformats.org/presentationml/2006/main">
   <p:cSld>
     <p:spTree>
@@ -5704,7 +6002,7 @@
 </p:sld>
 </file>
 
-<file path=ppt/slides/slide16.xml><?xml version="1.0" encoding="utf-8"?>
+<file path=ppt/slides/slide14.xml><?xml version="1.0" encoding="utf-8"?>
 <p:sld xmlns:a="http://schemas.openxmlformats.org/drawingml/2006/main" xmlns:r="http://schemas.openxmlformats.org/officeDocument/2006/relationships" xmlns:p="http://schemas.openxmlformats.org/presentationml/2006/main">
   <p:cSld>
     <p:spTree>
@@ -5914,15 +6212,18 @@
         </p:nvSpPr>
         <p:spPr>
           <a:xfrm>
-            <a:off x="957072" y="2121408"/>
-            <a:ext cx="10421112" cy="1307592"/>
+            <a:off x="0" y="475488"/>
+            <a:ext cx="4352544" cy="585216"/>
           </a:xfrm>
           <a:prstGeom prst="rect">
             <a:avLst/>
           </a:prstGeom>
+          <a:solidFill>
+            <a:schemeClr val="bg1"/>
+          </a:solidFill>
           <a:ln>
             <a:solidFill>
-              <a:schemeClr val="tx1"/>
+              <a:schemeClr val="bg1"/>
             </a:solidFill>
           </a:ln>
         </p:spPr>
@@ -5946,63 +6247,171 @@
           <a:bodyPr rtlCol="0" anchor="ctr"/>
           <a:lstStyle/>
           <a:p>
-            <a:r>
-              <a:rPr lang="ja-JP" altLang="en-US" sz="2400" b="1" dirty="0">
+            <a:pPr algn="ctr"/>
+            <a:r>
+              <a:rPr kumimoji="1" lang="ja-JP" altLang="en-US" sz="4800" dirty="0">
+                <a:solidFill>
+                  <a:srgbClr val="263238"/>
+                </a:solidFill>
                 <a:latin typeface="メイリオ" panose="020B0604030504040204" pitchFamily="50" charset="-128"/>
                 <a:ea typeface="メイリオ" panose="020B0604030504040204" pitchFamily="50" charset="-128"/>
               </a:rPr>
               <a:t>ターゲット</a:t>
             </a:r>
           </a:p>
-          <a:p>
-            <a:r>
-              <a:rPr lang="ja-JP" altLang="en-US" sz="2400" b="1" dirty="0">
-                <a:latin typeface="メイリオ" panose="020B0604030504040204" pitchFamily="50" charset="-128"/>
-                <a:ea typeface="メイリオ" panose="020B0604030504040204" pitchFamily="50" charset="-128"/>
-              </a:rPr>
-              <a:t>昔の体験をもう一度</a:t>
-            </a:r>
-            <a:endParaRPr lang="ja-JP" altLang="en-US" sz="2400" dirty="0">
-              <a:latin typeface="メイリオ" panose="020B0604030504040204" pitchFamily="50" charset="-128"/>
-              <a:ea typeface="メイリオ" panose="020B0604030504040204" pitchFamily="50" charset="-128"/>
-            </a:endParaRPr>
-          </a:p>
-          <a:p>
-            <a:pPr algn="ctr"/>
-            <a:endParaRPr kumimoji="1" lang="ja-JP" altLang="en-US" sz="2400" dirty="0"/>
-          </a:p>
-        </p:txBody>
-      </p:sp>
-      <p:pic>
-        <p:nvPicPr>
-          <p:cNvPr id="6" name="図 5">
-            <a:extLst>
-              <a:ext uri="{FF2B5EF4-FFF2-40B4-BE49-F238E27FC236}">
-                <a16:creationId xmlns:a16="http://schemas.microsoft.com/office/drawing/2014/main" id="{66BC014B-14C2-4592-BF96-484CACF5DD74}"/>
-              </a:ext>
-            </a:extLst>
-          </p:cNvPr>
-          <p:cNvPicPr>
-            <a:picLocks noChangeAspect="1"/>
-          </p:cNvPicPr>
+        </p:txBody>
+      </p:sp>
+      <p:sp>
+        <p:nvSpPr>
+          <p:cNvPr id="3" name="正方形/長方形 2">
+            <a:extLst>
+              <a:ext uri="{FF2B5EF4-FFF2-40B4-BE49-F238E27FC236}">
+                <a16:creationId xmlns:a16="http://schemas.microsoft.com/office/drawing/2014/main" id="{C5F7D07E-6853-4ABA-B72B-D02643933F6E}"/>
+              </a:ext>
+            </a:extLst>
+          </p:cNvPr>
+          <p:cNvSpPr/>
           <p:nvPr/>
-        </p:nvPicPr>
-        <p:blipFill>
-          <a:blip r:embed="rId2"/>
-          <a:stretch>
-            <a:fillRect/>
-          </a:stretch>
-        </p:blipFill>
+        </p:nvSpPr>
         <p:spPr>
           <a:xfrm>
-            <a:off x="4315586" y="1"/>
-            <a:ext cx="7876413" cy="6858000"/>
+            <a:off x="3547872" y="2299716"/>
+            <a:ext cx="7095744" cy="2258568"/>
           </a:xfrm>
           <a:prstGeom prst="rect">
             <a:avLst/>
           </a:prstGeom>
+          <a:solidFill>
+            <a:schemeClr val="bg1"/>
+          </a:solidFill>
         </p:spPr>
-      </p:pic>
+        <p:style>
+          <a:lnRef idx="2">
+            <a:schemeClr val="accent1">
+              <a:shade val="50000"/>
+            </a:schemeClr>
+          </a:lnRef>
+          <a:fillRef idx="1">
+            <a:schemeClr val="accent1"/>
+          </a:fillRef>
+          <a:effectRef idx="0">
+            <a:schemeClr val="accent1"/>
+          </a:effectRef>
+          <a:fontRef idx="minor">
+            <a:schemeClr val="lt1"/>
+          </a:fontRef>
+        </p:style>
+        <p:txBody>
+          <a:bodyPr rtlCol="0" anchor="ctr"/>
+          <a:lstStyle/>
+          <a:p>
+            <a:r>
+              <a:rPr lang="ja-JP" altLang="en-US" sz="3200" dirty="0">
+                <a:solidFill>
+                  <a:srgbClr val="263238"/>
+                </a:solidFill>
+                <a:latin typeface="メイリオ" panose="020B0604030504040204" pitchFamily="50" charset="-128"/>
+                <a:ea typeface="メイリオ" panose="020B0604030504040204" pitchFamily="50" charset="-128"/>
+              </a:rPr>
+              <a:t>パズルゲームが好き</a:t>
+            </a:r>
+            <a:endParaRPr lang="en-US" altLang="ja-JP" sz="3200" dirty="0">
+              <a:solidFill>
+                <a:srgbClr val="263238"/>
+              </a:solidFill>
+              <a:latin typeface="メイリオ" panose="020B0604030504040204" pitchFamily="50" charset="-128"/>
+              <a:ea typeface="メイリオ" panose="020B0604030504040204" pitchFamily="50" charset="-128"/>
+            </a:endParaRPr>
+          </a:p>
+          <a:p>
+            <a:r>
+              <a:rPr lang="ja-JP" altLang="en-US" sz="3200" dirty="0">
+                <a:solidFill>
+                  <a:srgbClr val="263238"/>
+                </a:solidFill>
+                <a:latin typeface="メイリオ" panose="020B0604030504040204" pitchFamily="50" charset="-128"/>
+                <a:ea typeface="メイリオ" panose="020B0604030504040204" pitchFamily="50" charset="-128"/>
+              </a:rPr>
+              <a:t>新しいゲーム体験を求める</a:t>
+            </a:r>
+            <a:endParaRPr lang="en-US" altLang="ja-JP" sz="3200" dirty="0">
+              <a:solidFill>
+                <a:srgbClr val="263238"/>
+              </a:solidFill>
+              <a:latin typeface="メイリオ" panose="020B0604030504040204" pitchFamily="50" charset="-128"/>
+              <a:ea typeface="メイリオ" panose="020B0604030504040204" pitchFamily="50" charset="-128"/>
+            </a:endParaRPr>
+          </a:p>
+          <a:p>
+            <a:endParaRPr lang="en-US" altLang="ja-JP" sz="3200" dirty="0">
+              <a:solidFill>
+                <a:srgbClr val="263238"/>
+              </a:solidFill>
+              <a:latin typeface="メイリオ" panose="020B0604030504040204" pitchFamily="50" charset="-128"/>
+              <a:ea typeface="メイリオ" panose="020B0604030504040204" pitchFamily="50" charset="-128"/>
+            </a:endParaRPr>
+          </a:p>
+          <a:p>
+            <a:r>
+              <a:rPr lang="zh-CN" altLang="en-US" sz="3200" dirty="0">
+                <a:solidFill>
+                  <a:srgbClr val="263238"/>
+                </a:solidFill>
+                <a:latin typeface="メイリオ" panose="020B0604030504040204" pitchFamily="50" charset="-128"/>
+                <a:ea typeface="メイリオ" panose="020B0604030504040204" pitchFamily="50" charset="-128"/>
+              </a:rPr>
+              <a:t>高校生</a:t>
+            </a:r>
+            <a:r>
+              <a:rPr lang="en-US" altLang="zh-CN" sz="3200" dirty="0">
+                <a:solidFill>
+                  <a:srgbClr val="263238"/>
+                </a:solidFill>
+                <a:latin typeface="メイリオ" panose="020B0604030504040204" pitchFamily="50" charset="-128"/>
+                <a:ea typeface="メイリオ" panose="020B0604030504040204" pitchFamily="50" charset="-128"/>
+              </a:rPr>
+              <a:t>〜</a:t>
+            </a:r>
+            <a:r>
+              <a:rPr lang="zh-CN" altLang="en-US" sz="3200" dirty="0">
+                <a:solidFill>
+                  <a:srgbClr val="263238"/>
+                </a:solidFill>
+                <a:latin typeface="メイリオ" panose="020B0604030504040204" pitchFamily="50" charset="-128"/>
+                <a:ea typeface="メイリオ" panose="020B0604030504040204" pitchFamily="50" charset="-128"/>
+              </a:rPr>
+              <a:t>大学生（</a:t>
+            </a:r>
+            <a:r>
+              <a:rPr lang="en-US" altLang="zh-CN" sz="3200" dirty="0">
+                <a:solidFill>
+                  <a:srgbClr val="263238"/>
+                </a:solidFill>
+                <a:latin typeface="メイリオ" panose="020B0604030504040204" pitchFamily="50" charset="-128"/>
+                <a:ea typeface="メイリオ" panose="020B0604030504040204" pitchFamily="50" charset="-128"/>
+              </a:rPr>
+              <a:t>15〜22</a:t>
+            </a:r>
+            <a:r>
+              <a:rPr lang="zh-CN" altLang="en-US" sz="3200" dirty="0">
+                <a:solidFill>
+                  <a:srgbClr val="263238"/>
+                </a:solidFill>
+                <a:latin typeface="メイリオ" panose="020B0604030504040204" pitchFamily="50" charset="-128"/>
+                <a:ea typeface="メイリオ" panose="020B0604030504040204" pitchFamily="50" charset="-128"/>
+              </a:rPr>
+              <a:t>歳）</a:t>
+            </a:r>
+            <a:endParaRPr kumimoji="1" lang="ja-JP" altLang="en-US" sz="3200" dirty="0">
+              <a:solidFill>
+                <a:srgbClr val="263238"/>
+              </a:solidFill>
+              <a:latin typeface="メイリオ" panose="020B0604030504040204" pitchFamily="50" charset="-128"/>
+              <a:ea typeface="メイリオ" panose="020B0604030504040204" pitchFamily="50" charset="-128"/>
+            </a:endParaRPr>
+          </a:p>
+        </p:txBody>
+      </p:sp>
     </p:spTree>
     <p:extLst>
       <p:ext uri="{BB962C8B-B14F-4D97-AF65-F5344CB8AC3E}">
@@ -6104,8 +6513,8 @@
         </p:nvSpPr>
         <p:spPr>
           <a:xfrm>
-            <a:off x="2409825" y="1514475"/>
-            <a:ext cx="7162800" cy="3143250"/>
+            <a:off x="3044757" y="2099691"/>
+            <a:ext cx="7162800" cy="2362581"/>
           </a:xfrm>
           <a:prstGeom prst="rect">
             <a:avLst/>
@@ -6130,26 +6539,45 @@
           <a:lstStyle/>
           <a:p>
             <a:r>
-              <a:rPr kumimoji="1" lang="ja-JP" altLang="en-US" sz="4800" dirty="0">
+              <a:rPr kumimoji="1" lang="ja-JP" altLang="en-US" sz="3200" dirty="0">
                 <a:latin typeface="メイリオ" panose="020B0604030504040204" pitchFamily="50" charset="-128"/>
                 <a:ea typeface="メイリオ" panose="020B0604030504040204" pitchFamily="50" charset="-128"/>
               </a:rPr>
-              <a:t>マウスで指を操作し　キーボドで雨粒を操作</a:t>
-            </a:r>
-            <a:endParaRPr kumimoji="1" lang="en-US" altLang="ja-JP" sz="4800" dirty="0">
+              <a:t>マウスで指を操作し　</a:t>
+            </a:r>
+            <a:endParaRPr kumimoji="1" lang="en-US" altLang="ja-JP" sz="3200" dirty="0">
               <a:latin typeface="メイリオ" panose="020B0604030504040204" pitchFamily="50" charset="-128"/>
               <a:ea typeface="メイリオ" panose="020B0604030504040204" pitchFamily="50" charset="-128"/>
             </a:endParaRPr>
           </a:p>
           <a:p>
             <a:r>
-              <a:rPr lang="ja-JP" altLang="en-US" sz="4800" dirty="0">
+              <a:rPr kumimoji="1" lang="ja-JP" altLang="en-US" sz="3200" dirty="0">
                 <a:latin typeface="メイリオ" panose="020B0604030504040204" pitchFamily="50" charset="-128"/>
                 <a:ea typeface="メイリオ" panose="020B0604030504040204" pitchFamily="50" charset="-128"/>
               </a:rPr>
-              <a:t>雨で描け</a:t>
-            </a:r>
-            <a:endParaRPr kumimoji="1" lang="ja-JP" altLang="en-US" sz="4800" dirty="0">
+              <a:t>キーボードで雨粒を操作</a:t>
+            </a:r>
+            <a:endParaRPr kumimoji="1" lang="en-US" altLang="ja-JP" sz="3200" dirty="0">
+              <a:latin typeface="メイリオ" panose="020B0604030504040204" pitchFamily="50" charset="-128"/>
+              <a:ea typeface="メイリオ" panose="020B0604030504040204" pitchFamily="50" charset="-128"/>
+            </a:endParaRPr>
+          </a:p>
+          <a:p>
+            <a:endParaRPr kumimoji="1" lang="en-US" altLang="ja-JP" sz="3200" dirty="0">
+              <a:latin typeface="メイリオ" panose="020B0604030504040204" pitchFamily="50" charset="-128"/>
+              <a:ea typeface="メイリオ" panose="020B0604030504040204" pitchFamily="50" charset="-128"/>
+            </a:endParaRPr>
+          </a:p>
+          <a:p>
+            <a:r>
+              <a:rPr lang="ja-JP" altLang="en-US" sz="3200" dirty="0">
+                <a:latin typeface="メイリオ" panose="020B0604030504040204" pitchFamily="50" charset="-128"/>
+                <a:ea typeface="メイリオ" panose="020B0604030504040204" pitchFamily="50" charset="-128"/>
+              </a:rPr>
+              <a:t>雨粒をつなぎお題を描け</a:t>
+            </a:r>
+            <a:endParaRPr kumimoji="1" lang="ja-JP" altLang="en-US" sz="3200" dirty="0">
               <a:latin typeface="メイリオ" panose="020B0604030504040204" pitchFamily="50" charset="-128"/>
               <a:ea typeface="メイリオ" panose="020B0604030504040204" pitchFamily="50" charset="-128"/>
             </a:endParaRPr>
@@ -6195,7 +6623,7 @@
         </p:nvSpPr>
         <p:spPr>
           <a:xfrm>
-            <a:off x="3097523" y="4006702"/>
+            <a:off x="3371843" y="4001294"/>
             <a:ext cx="9094477" cy="2194338"/>
           </a:xfrm>
           <a:prstGeom prst="rect">
@@ -6231,13 +6659,13 @@
               </a:lnSpc>
             </a:pPr>
             <a:r>
-              <a:rPr lang="ja-JP" altLang="en-US" sz="4000" dirty="0">
+              <a:rPr lang="ja-JP" altLang="en-US" sz="3600" dirty="0">
                 <a:latin typeface="メイリオ" panose="020B0604030504040204" pitchFamily="50" charset="-128"/>
                 <a:ea typeface="メイリオ" panose="020B0604030504040204" pitchFamily="50" charset="-128"/>
               </a:rPr>
-              <a:t>指と雨粒を同時に操って、文字を描く</a:t>
-            </a:r>
-            <a:endParaRPr lang="ja-JP" altLang="en-US" sz="4000" b="1" dirty="0">
+              <a:t>盤面を整えて、文字を描くパズルゲーム</a:t>
+            </a:r>
+            <a:endParaRPr lang="ja-JP" altLang="en-US" sz="3600" b="1" dirty="0">
               <a:latin typeface="メイリオ" panose="020B0604030504040204" pitchFamily="50" charset="-128"/>
               <a:ea typeface="メイリオ" panose="020B0604030504040204" pitchFamily="50" charset="-128"/>
             </a:endParaRPr>
@@ -6309,10 +6737,10 @@
       </p:sp>
       <p:sp>
         <p:nvSpPr>
-          <p:cNvPr id="2" name="正方形/長方形 1">
-            <a:extLst>
-              <a:ext uri="{FF2B5EF4-FFF2-40B4-BE49-F238E27FC236}">
-                <a16:creationId xmlns:a16="http://schemas.microsoft.com/office/drawing/2014/main" id="{376B169F-2FD1-4F7E-BD85-FF8DA51CEE45}"/>
+          <p:cNvPr id="3" name="正方形/長方形 2">
+            <a:extLst>
+              <a:ext uri="{FF2B5EF4-FFF2-40B4-BE49-F238E27FC236}">
+                <a16:creationId xmlns:a16="http://schemas.microsoft.com/office/drawing/2014/main" id="{FB759AF9-7281-48AC-8DBF-B36CB5CCE18B}"/>
               </a:ext>
             </a:extLst>
           </p:cNvPr>
@@ -6321,12 +6749,70 @@
         </p:nvSpPr>
         <p:spPr>
           <a:xfrm>
-            <a:off x="2461260" y="1918720"/>
-            <a:ext cx="7269479" cy="1674871"/>
+            <a:off x="125527" y="356616"/>
+            <a:ext cx="2121408" cy="914400"/>
           </a:xfrm>
           <a:prstGeom prst="rect">
             <a:avLst/>
           </a:prstGeom>
+          <a:ln>
+            <a:solidFill>
+              <a:schemeClr val="bg1"/>
+            </a:solidFill>
+          </a:ln>
+        </p:spPr>
+        <p:style>
+          <a:lnRef idx="2">
+            <a:schemeClr val="accent6"/>
+          </a:lnRef>
+          <a:fillRef idx="1">
+            <a:schemeClr val="lt1"/>
+          </a:fillRef>
+          <a:effectRef idx="0">
+            <a:schemeClr val="accent6"/>
+          </a:effectRef>
+          <a:fontRef idx="minor">
+            <a:schemeClr val="dk1"/>
+          </a:fontRef>
+        </p:style>
+        <p:txBody>
+          <a:bodyPr rtlCol="0" anchor="ctr"/>
+          <a:lstStyle/>
+          <a:p>
+            <a:pPr algn="ctr"/>
+            <a:r>
+              <a:rPr kumimoji="1" lang="ja-JP" altLang="en-US" sz="4800" dirty="0">
+                <a:latin typeface="メイリオ" panose="020B0604030504040204" pitchFamily="50" charset="-128"/>
+                <a:ea typeface="メイリオ" panose="020B0604030504040204" pitchFamily="50" charset="-128"/>
+              </a:rPr>
+              <a:t>特徴</a:t>
+            </a:r>
+          </a:p>
+        </p:txBody>
+      </p:sp>
+      <p:sp>
+        <p:nvSpPr>
+          <p:cNvPr id="4" name="正方形/長方形 3">
+            <a:extLst>
+              <a:ext uri="{FF2B5EF4-FFF2-40B4-BE49-F238E27FC236}">
+                <a16:creationId xmlns:a16="http://schemas.microsoft.com/office/drawing/2014/main" id="{D063401D-D46E-42DF-90E2-DF297FF1B942}"/>
+              </a:ext>
+            </a:extLst>
+          </p:cNvPr>
+          <p:cNvSpPr/>
+          <p:nvPr/>
+        </p:nvSpPr>
+        <p:spPr>
+          <a:xfrm>
+            <a:off x="3566160" y="667512"/>
+            <a:ext cx="7598664" cy="914400"/>
+          </a:xfrm>
+          <a:prstGeom prst="rect">
+            <a:avLst/>
+          </a:prstGeom>
+          <a:solidFill>
+            <a:schemeClr val="bg1"/>
+          </a:solidFill>
         </p:spPr>
         <p:style>
           <a:lnRef idx="2">
@@ -6350,20 +6836,84 @@
           <a:p>
             <a:pPr algn="ctr"/>
             <a:r>
-              <a:rPr kumimoji="1" lang="ja-JP" altLang="en-US" sz="3200" dirty="0">
+              <a:rPr lang="ja-JP" altLang="en-US" sz="3200" dirty="0">
+                <a:solidFill>
+                  <a:schemeClr val="tx1"/>
+                </a:solidFill>
                 <a:latin typeface="メイリオ" panose="020B0604030504040204" pitchFamily="50" charset="-128"/>
                 <a:ea typeface="メイリオ" panose="020B0604030504040204" pitchFamily="50" charset="-128"/>
               </a:rPr>
-              <a:t>テトリスと</a:t>
-            </a:r>
-            <a:r>
-              <a:rPr lang="ja-JP" altLang="en-US" sz="3200" dirty="0">
+              <a:t>今までにない操作のゲームを遊びたい</a:t>
+            </a:r>
+            <a:endParaRPr kumimoji="1" lang="ja-JP" altLang="en-US" sz="3200" dirty="0">
+              <a:solidFill>
+                <a:schemeClr val="tx1"/>
+              </a:solidFill>
+              <a:latin typeface="メイリオ" panose="020B0604030504040204" pitchFamily="50" charset="-128"/>
+              <a:ea typeface="メイリオ" panose="020B0604030504040204" pitchFamily="50" charset="-128"/>
+            </a:endParaRPr>
+          </a:p>
+        </p:txBody>
+      </p:sp>
+      <p:sp>
+        <p:nvSpPr>
+          <p:cNvPr id="5" name="正方形/長方形 4">
+            <a:extLst>
+              <a:ext uri="{FF2B5EF4-FFF2-40B4-BE49-F238E27FC236}">
+                <a16:creationId xmlns:a16="http://schemas.microsoft.com/office/drawing/2014/main" id="{7EE809D5-24E5-4881-8988-806117AED71C}"/>
+              </a:ext>
+            </a:extLst>
+          </p:cNvPr>
+          <p:cNvSpPr/>
+          <p:nvPr/>
+        </p:nvSpPr>
+        <p:spPr>
+          <a:xfrm>
+            <a:off x="3982212" y="1891459"/>
+            <a:ext cx="6766560" cy="1047136"/>
+          </a:xfrm>
+          <a:prstGeom prst="rect">
+            <a:avLst/>
+          </a:prstGeom>
+          <a:solidFill>
+            <a:schemeClr val="bg1"/>
+          </a:solidFill>
+        </p:spPr>
+        <p:style>
+          <a:lnRef idx="2">
+            <a:schemeClr val="accent1">
+              <a:shade val="50000"/>
+            </a:schemeClr>
+          </a:lnRef>
+          <a:fillRef idx="1">
+            <a:schemeClr val="accent1"/>
+          </a:fillRef>
+          <a:effectRef idx="0">
+            <a:schemeClr val="accent1"/>
+          </a:effectRef>
+          <a:fontRef idx="minor">
+            <a:schemeClr val="lt1"/>
+          </a:fontRef>
+        </p:style>
+        <p:txBody>
+          <a:bodyPr rtlCol="0" anchor="ctr"/>
+          <a:lstStyle/>
+          <a:p>
+            <a:pPr algn="ctr"/>
+            <a:r>
+              <a:rPr kumimoji="1" lang="ja-JP" altLang="en-US" sz="3200" dirty="0">
+                <a:solidFill>
+                  <a:schemeClr val="tx1"/>
+                </a:solidFill>
                 <a:latin typeface="メイリオ" panose="020B0604030504040204" pitchFamily="50" charset="-128"/>
                 <a:ea typeface="メイリオ" panose="020B0604030504040204" pitchFamily="50" charset="-128"/>
               </a:rPr>
-              <a:t>お絵描きを混ぜた</a:t>
+              <a:t>マウスとキーボードを同時に使い</a:t>
             </a:r>
             <a:endParaRPr kumimoji="1" lang="en-US" altLang="ja-JP" sz="3200" dirty="0">
+              <a:solidFill>
+                <a:schemeClr val="tx1"/>
+              </a:solidFill>
               <a:latin typeface="メイリオ" panose="020B0604030504040204" pitchFamily="50" charset="-128"/>
               <a:ea typeface="メイリオ" panose="020B0604030504040204" pitchFamily="50" charset="-128"/>
             </a:endParaRPr>
@@ -6372,10 +6922,142 @@
             <a:pPr algn="ctr"/>
             <a:r>
               <a:rPr kumimoji="1" lang="ja-JP" altLang="en-US" sz="3200" dirty="0">
+                <a:solidFill>
+                  <a:schemeClr val="tx1"/>
+                </a:solidFill>
                 <a:latin typeface="メイリオ" panose="020B0604030504040204" pitchFamily="50" charset="-128"/>
                 <a:ea typeface="メイリオ" panose="020B0604030504040204" pitchFamily="50" charset="-128"/>
               </a:rPr>
-              <a:t>ゲーム</a:t>
+              <a:t>指と雨粒を別々に操作する</a:t>
+            </a:r>
+          </a:p>
+        </p:txBody>
+      </p:sp>
+      <p:graphicFrame>
+        <p:nvGraphicFramePr>
+          <p:cNvPr id="10" name="表 9">
+            <a:extLst>
+              <a:ext uri="{FF2B5EF4-FFF2-40B4-BE49-F238E27FC236}">
+                <a16:creationId xmlns:a16="http://schemas.microsoft.com/office/drawing/2014/main" id="{0324B8CD-ACFE-498B-81C7-CA26BE4FCA6C}"/>
+              </a:ext>
+            </a:extLst>
+          </p:cNvPr>
+          <p:cNvGraphicFramePr>
+            <a:graphicFrameLocks noGrp="1"/>
+          </p:cNvGraphicFramePr>
+          <p:nvPr>
+            <p:extLst>
+              <p:ext uri="{D42A27DB-BD31-4B8C-83A1-F6EECF244321}">
+                <p14:modId xmlns:p14="http://schemas.microsoft.com/office/powerpoint/2010/main" val="4007566941"/>
+              </p:ext>
+            </p:extLst>
+          </p:nvPr>
+        </p:nvGraphicFramePr>
+        <p:xfrm>
+          <a:off x="685800" y="4692825"/>
+          <a:ext cx="10515600" cy="365760"/>
+        </p:xfrm>
+        <a:graphic>
+          <a:graphicData uri="http://schemas.openxmlformats.org/drawingml/2006/table">
+            <a:tbl>
+              <a:tblPr/>
+              <a:tblGrid>
+                <a:gridCol w="10515600">
+                  <a:extLst>
+                    <a:ext uri="{9D8B030D-6E8A-4147-A177-3AD203B41FA5}">
+                      <a16:colId xmlns:a16="http://schemas.microsoft.com/office/drawing/2014/main" val="3660675589"/>
+                    </a:ext>
+                  </a:extLst>
+                </a:gridCol>
+              </a:tblGrid>
+              <a:tr h="0">
+                <a:tc>
+                  <a:txBody>
+                    <a:bodyPr/>
+                    <a:lstStyle/>
+                    <a:p>
+                      <a:endParaRPr lang="ja-JP" altLang="en-US" dirty="0"/>
+                    </a:p>
+                  </a:txBody>
+                  <a:tcPr anchor="ctr">
+                    <a:lnL>
+                      <a:noFill/>
+                    </a:lnL>
+                    <a:lnR>
+                      <a:noFill/>
+                    </a:lnR>
+                    <a:lnT>
+                      <a:noFill/>
+                    </a:lnT>
+                    <a:lnB>
+                      <a:noFill/>
+                    </a:lnB>
+                  </a:tcPr>
+                </a:tc>
+                <a:extLst>
+                  <a:ext uri="{0D108BD9-81ED-4DB2-BD59-A6C34878D82A}">
+                    <a16:rowId xmlns:a16="http://schemas.microsoft.com/office/drawing/2014/main" val="3071811541"/>
+                  </a:ext>
+                </a:extLst>
+              </a:tr>
+            </a:tbl>
+          </a:graphicData>
+        </a:graphic>
+      </p:graphicFrame>
+      <p:sp>
+        <p:nvSpPr>
+          <p:cNvPr id="13" name="正方形/長方形 12">
+            <a:extLst>
+              <a:ext uri="{FF2B5EF4-FFF2-40B4-BE49-F238E27FC236}">
+                <a16:creationId xmlns:a16="http://schemas.microsoft.com/office/drawing/2014/main" id="{18E44EB3-9135-4711-BFF9-4EE0C51469A4}"/>
+              </a:ext>
+            </a:extLst>
+          </p:cNvPr>
+          <p:cNvSpPr/>
+          <p:nvPr/>
+        </p:nvSpPr>
+        <p:spPr>
+          <a:xfrm>
+            <a:off x="3982212" y="3248142"/>
+            <a:ext cx="6766560" cy="1047136"/>
+          </a:xfrm>
+          <a:prstGeom prst="rect">
+            <a:avLst/>
+          </a:prstGeom>
+          <a:solidFill>
+            <a:schemeClr val="bg1"/>
+          </a:solidFill>
+        </p:spPr>
+        <p:style>
+          <a:lnRef idx="2">
+            <a:schemeClr val="accent1">
+              <a:shade val="50000"/>
+            </a:schemeClr>
+          </a:lnRef>
+          <a:fillRef idx="1">
+            <a:schemeClr val="accent1"/>
+          </a:fillRef>
+          <a:effectRef idx="0">
+            <a:schemeClr val="accent1"/>
+          </a:effectRef>
+          <a:fontRef idx="minor">
+            <a:schemeClr val="lt1"/>
+          </a:fontRef>
+        </p:style>
+        <p:txBody>
+          <a:bodyPr rtlCol="0" anchor="ctr"/>
+          <a:lstStyle/>
+          <a:p>
+            <a:pPr algn="ctr"/>
+            <a:r>
+              <a:rPr kumimoji="1" lang="ja-JP" altLang="en-US" sz="3200" dirty="0">
+                <a:solidFill>
+                  <a:schemeClr val="tx1"/>
+                </a:solidFill>
+                <a:latin typeface="メイリオ" panose="020B0604030504040204" pitchFamily="50" charset="-128"/>
+                <a:ea typeface="メイリオ" panose="020B0604030504040204" pitchFamily="50" charset="-128"/>
+              </a:rPr>
+              <a:t>雨粒を動かして文字を描けるように盤面を整えるパズル要素</a:t>
             </a:r>
           </a:p>
         </p:txBody>
@@ -6550,7 +7232,7 @@
           <p:cNvPr id="3" name="正方形/長方形 2">
             <a:extLst>
               <a:ext uri="{FF2B5EF4-FFF2-40B4-BE49-F238E27FC236}">
-                <a16:creationId xmlns:a16="http://schemas.microsoft.com/office/drawing/2014/main" id="{8EE8F76E-6904-409A-AC76-C9CCF9F1E885}"/>
+                <a16:creationId xmlns:a16="http://schemas.microsoft.com/office/drawing/2014/main" id="{7ED09CAE-1C4B-43BB-9B32-E9317E478F10}"/>
               </a:ext>
             </a:extLst>
           </p:cNvPr>
@@ -6593,7 +7275,7 @@
                 <a:latin typeface="メイリオ" panose="020B0604030504040204" pitchFamily="50" charset="-128"/>
                 <a:ea typeface="メイリオ" panose="020B0604030504040204" pitchFamily="50" charset="-128"/>
               </a:rPr>
-              <a:t>操作方法</a:t>
+              <a:t>ルール</a:t>
             </a:r>
           </a:p>
         </p:txBody>
@@ -6603,7 +7285,7 @@
           <p:cNvPr id="2" name="正方形/長方形 1">
             <a:extLst>
               <a:ext uri="{FF2B5EF4-FFF2-40B4-BE49-F238E27FC236}">
-                <a16:creationId xmlns:a16="http://schemas.microsoft.com/office/drawing/2014/main" id="{528E3EEC-ED19-44E5-A90C-4BE60A2D4ABD}"/>
+                <a16:creationId xmlns:a16="http://schemas.microsoft.com/office/drawing/2014/main" id="{D9033127-4D4D-4EC3-A27C-804E62C27528}"/>
               </a:ext>
             </a:extLst>
           </p:cNvPr>
@@ -6612,8 +7294,8 @@
         </p:nvSpPr>
         <p:spPr>
           <a:xfrm>
-            <a:off x="9926132" y="1340318"/>
-            <a:ext cx="1333499" cy="914400"/>
+            <a:off x="4133851" y="667512"/>
+            <a:ext cx="7096125" cy="4462271"/>
           </a:xfrm>
           <a:prstGeom prst="rect">
             <a:avLst/>
@@ -6637,275 +7319,97 @@
           <a:bodyPr rtlCol="0" anchor="ctr"/>
           <a:lstStyle/>
           <a:p>
-            <a:pPr algn="ctr"/>
-            <a:r>
-              <a:rPr kumimoji="1" lang="ja-JP" altLang="en-US" dirty="0">
+            <a:r>
+              <a:rPr lang="ja-JP" altLang="en-US" sz="3200" dirty="0">
                 <a:latin typeface="メイリオ" panose="020B0604030504040204" pitchFamily="50" charset="-128"/>
                 <a:ea typeface="メイリオ" panose="020B0604030504040204" pitchFamily="50" charset="-128"/>
               </a:rPr>
-              <a:t>マウス操作</a:t>
-            </a:r>
-            <a:endParaRPr kumimoji="1" lang="en-US" altLang="ja-JP" dirty="0">
+              <a:t>１　雨粒と指を操作し、</a:t>
+            </a:r>
+            <a:endParaRPr lang="en-US" altLang="ja-JP" sz="3200" dirty="0">
               <a:latin typeface="メイリオ" panose="020B0604030504040204" pitchFamily="50" charset="-128"/>
               <a:ea typeface="メイリオ" panose="020B0604030504040204" pitchFamily="50" charset="-128"/>
             </a:endParaRPr>
           </a:p>
           <a:p>
-            <a:pPr algn="ctr"/>
-            <a:r>
-              <a:rPr lang="ja-JP" altLang="en-US" dirty="0">
+            <a:r>
+              <a:rPr lang="ja-JP" altLang="en-US" sz="3200" dirty="0">
                 <a:latin typeface="メイリオ" panose="020B0604030504040204" pitchFamily="50" charset="-128"/>
                 <a:ea typeface="メイリオ" panose="020B0604030504040204" pitchFamily="50" charset="-128"/>
               </a:rPr>
-              <a:t>で指（筆）</a:t>
-            </a:r>
-            <a:endParaRPr kumimoji="1" lang="ja-JP" altLang="en-US" dirty="0">
+              <a:t>　　雨粒を指で繋ぎお手本を描く</a:t>
+            </a:r>
+            <a:endParaRPr lang="en-US" altLang="ja-JP" sz="3200" dirty="0">
               <a:latin typeface="メイリオ" panose="020B0604030504040204" pitchFamily="50" charset="-128"/>
               <a:ea typeface="メイリオ" panose="020B0604030504040204" pitchFamily="50" charset="-128"/>
             </a:endParaRPr>
           </a:p>
-        </p:txBody>
-      </p:sp>
-      <p:pic>
-        <p:nvPicPr>
-          <p:cNvPr id="8" name="図 7">
-            <a:extLst>
-              <a:ext uri="{FF2B5EF4-FFF2-40B4-BE49-F238E27FC236}">
-                <a16:creationId xmlns:a16="http://schemas.microsoft.com/office/drawing/2014/main" id="{C60C3470-23D4-43F0-BC82-8A64EEC90281}"/>
-              </a:ext>
-            </a:extLst>
-          </p:cNvPr>
-          <p:cNvPicPr>
-            <a:picLocks noChangeAspect="1"/>
-          </p:cNvPicPr>
-          <p:nvPr/>
-        </p:nvPicPr>
-        <p:blipFill>
-          <a:blip r:embed="rId3"/>
-          <a:stretch>
-            <a:fillRect/>
-          </a:stretch>
-        </p:blipFill>
-        <p:spPr>
-          <a:xfrm>
-            <a:off x="7544110" y="1891007"/>
-            <a:ext cx="4462403" cy="6858000"/>
-          </a:xfrm>
-          <a:prstGeom prst="rect">
-            <a:avLst/>
-          </a:prstGeom>
-        </p:spPr>
-      </p:pic>
-      <p:sp>
-        <p:nvSpPr>
-          <p:cNvPr id="7" name="正方形/長方形 6">
-            <a:extLst>
-              <a:ext uri="{FF2B5EF4-FFF2-40B4-BE49-F238E27FC236}">
-                <a16:creationId xmlns:a16="http://schemas.microsoft.com/office/drawing/2014/main" id="{29C8E7E2-CABB-411F-8549-701A17FEE2C5}"/>
-              </a:ext>
-            </a:extLst>
-          </p:cNvPr>
-          <p:cNvSpPr/>
-          <p:nvPr/>
-        </p:nvSpPr>
-        <p:spPr>
-          <a:xfrm>
-            <a:off x="2238241" y="1340318"/>
-            <a:ext cx="1333499" cy="914400"/>
-          </a:xfrm>
-          <a:prstGeom prst="rect">
-            <a:avLst/>
-          </a:prstGeom>
-        </p:spPr>
-        <p:style>
-          <a:lnRef idx="2">
-            <a:schemeClr val="dk1"/>
-          </a:lnRef>
-          <a:fillRef idx="1">
-            <a:schemeClr val="lt1"/>
-          </a:fillRef>
-          <a:effectRef idx="0">
-            <a:schemeClr val="dk1"/>
-          </a:effectRef>
-          <a:fontRef idx="minor">
-            <a:schemeClr val="dk1"/>
-          </a:fontRef>
-        </p:style>
-        <p:txBody>
-          <a:bodyPr rtlCol="0" anchor="ctr"/>
-          <a:lstStyle/>
-          <a:p>
-            <a:pPr algn="ctr"/>
-            <a:r>
-              <a:rPr lang="ja-JP" altLang="en-US" dirty="0">
+          <a:p>
+            <a:endParaRPr lang="en-US" altLang="ja-JP" sz="3200" dirty="0">
+              <a:latin typeface="メイリオ" panose="020B0604030504040204" pitchFamily="50" charset="-128"/>
+              <a:ea typeface="メイリオ" panose="020B0604030504040204" pitchFamily="50" charset="-128"/>
+            </a:endParaRPr>
+          </a:p>
+          <a:p>
+            <a:r>
+              <a:rPr kumimoji="1" lang="ja-JP" altLang="en-US" sz="3200" dirty="0">
                 <a:latin typeface="メイリオ" panose="020B0604030504040204" pitchFamily="50" charset="-128"/>
                 <a:ea typeface="メイリオ" panose="020B0604030504040204" pitchFamily="50" charset="-128"/>
               </a:rPr>
-              <a:t>キーボード</a:t>
-            </a:r>
-            <a:endParaRPr lang="en-US" altLang="ja-JP" dirty="0">
+              <a:t>２　制限時間以内にお題を完成させる</a:t>
+            </a:r>
+            <a:endParaRPr kumimoji="1" lang="en-US" altLang="ja-JP" sz="3200" dirty="0">
               <a:latin typeface="メイリオ" panose="020B0604030504040204" pitchFamily="50" charset="-128"/>
               <a:ea typeface="メイリオ" panose="020B0604030504040204" pitchFamily="50" charset="-128"/>
             </a:endParaRPr>
           </a:p>
           <a:p>
-            <a:pPr algn="ctr"/>
-            <a:r>
-              <a:rPr kumimoji="1" lang="ja-JP" altLang="en-US" dirty="0">
+            <a:endParaRPr kumimoji="1" lang="en-US" altLang="ja-JP" sz="3200" dirty="0">
+              <a:latin typeface="メイリオ" panose="020B0604030504040204" pitchFamily="50" charset="-128"/>
+              <a:ea typeface="メイリオ" panose="020B0604030504040204" pitchFamily="50" charset="-128"/>
+            </a:endParaRPr>
+          </a:p>
+          <a:p>
+            <a:r>
+              <a:rPr lang="ja-JP" altLang="en-US" sz="3200" dirty="0">
                 <a:latin typeface="メイリオ" panose="020B0604030504040204" pitchFamily="50" charset="-128"/>
                 <a:ea typeface="メイリオ" panose="020B0604030504040204" pitchFamily="50" charset="-128"/>
               </a:rPr>
-              <a:t>雨粒を操作</a:t>
-            </a:r>
-          </a:p>
-        </p:txBody>
-      </p:sp>
-      <p:sp>
-        <p:nvSpPr>
-          <p:cNvPr id="5" name="正方形/長方形 4">
-            <a:extLst>
-              <a:ext uri="{FF2B5EF4-FFF2-40B4-BE49-F238E27FC236}">
-                <a16:creationId xmlns:a16="http://schemas.microsoft.com/office/drawing/2014/main" id="{5F738E8E-6FD1-4FFF-9E24-5B37EDA81C3D}"/>
-              </a:ext>
-            </a:extLst>
-          </p:cNvPr>
-          <p:cNvSpPr/>
-          <p:nvPr/>
-        </p:nvSpPr>
-        <p:spPr>
-          <a:xfrm>
-            <a:off x="586986" y="2615184"/>
-            <a:ext cx="4636008" cy="2084832"/>
-          </a:xfrm>
-          <a:prstGeom prst="rect">
-            <a:avLst/>
-          </a:prstGeom>
-        </p:spPr>
-        <p:style>
-          <a:lnRef idx="2">
-            <a:schemeClr val="accent1">
-              <a:shade val="50000"/>
-            </a:schemeClr>
-          </a:lnRef>
-          <a:fillRef idx="1">
-            <a:schemeClr val="accent1"/>
-          </a:fillRef>
-          <a:effectRef idx="0">
-            <a:schemeClr val="accent1"/>
-          </a:effectRef>
-          <a:fontRef idx="minor">
-            <a:schemeClr val="lt1"/>
-          </a:fontRef>
-        </p:style>
-        <p:txBody>
-          <a:bodyPr rtlCol="0" anchor="ctr"/>
-          <a:lstStyle/>
-          <a:p>
-            <a:pPr algn="ctr"/>
-            <a:r>
-              <a:rPr kumimoji="1" lang="en-US" altLang="ja-JP" dirty="0"/>
-              <a:t>W</a:t>
-            </a:r>
-            <a:r>
-              <a:rPr lang="ja-JP" altLang="en-US" dirty="0"/>
-              <a:t>　</a:t>
-            </a:r>
-            <a:r>
-              <a:rPr lang="en-US" altLang="ja-JP" dirty="0"/>
-              <a:t>A</a:t>
-            </a:r>
-            <a:r>
-              <a:rPr lang="ja-JP" altLang="en-US" dirty="0"/>
-              <a:t>　</a:t>
-            </a:r>
-            <a:r>
-              <a:rPr lang="en-US" altLang="ja-JP" dirty="0"/>
-              <a:t>S</a:t>
-            </a:r>
-            <a:r>
-              <a:rPr lang="ja-JP" altLang="en-US" dirty="0"/>
-              <a:t>　</a:t>
-            </a:r>
-            <a:r>
-              <a:rPr lang="en-US" altLang="ja-JP" dirty="0"/>
-              <a:t>D</a:t>
-            </a:r>
-            <a:r>
-              <a:rPr lang="ja-JP" altLang="en-US" dirty="0"/>
-              <a:t>か</a:t>
-            </a:r>
-            <a:endParaRPr lang="en-US" altLang="ja-JP" dirty="0"/>
-          </a:p>
-          <a:p>
-            <a:pPr algn="ctr"/>
-            <a:r>
-              <a:rPr lang="ja-JP" altLang="en-US" dirty="0"/>
-              <a:t>↑　↓　←　→</a:t>
-            </a:r>
-            <a:endParaRPr kumimoji="1" lang="en-US" altLang="ja-JP" dirty="0"/>
-          </a:p>
-        </p:txBody>
-      </p:sp>
-      <p:pic>
-        <p:nvPicPr>
-          <p:cNvPr id="9" name="図 8">
-            <a:extLst>
-              <a:ext uri="{FF2B5EF4-FFF2-40B4-BE49-F238E27FC236}">
-                <a16:creationId xmlns:a16="http://schemas.microsoft.com/office/drawing/2014/main" id="{05B52EF4-83E1-45B0-AA9E-EBBCD65FBCE7}"/>
-              </a:ext>
-            </a:extLst>
-          </p:cNvPr>
-          <p:cNvPicPr>
-            <a:picLocks noChangeAspect="1"/>
-          </p:cNvPicPr>
-          <p:nvPr/>
-        </p:nvPicPr>
-        <p:blipFill>
-          <a:blip r:embed="rId4"/>
-          <a:stretch>
-            <a:fillRect/>
-          </a:stretch>
-        </p:blipFill>
-        <p:spPr>
-          <a:xfrm>
-            <a:off x="2904990" y="4958679"/>
-            <a:ext cx="1102568" cy="1648357"/>
-          </a:xfrm>
-          <a:prstGeom prst="rect">
-            <a:avLst/>
-          </a:prstGeom>
-        </p:spPr>
-      </p:pic>
-      <p:pic>
-        <p:nvPicPr>
-          <p:cNvPr id="12" name="図 11">
-            <a:extLst>
-              <a:ext uri="{FF2B5EF4-FFF2-40B4-BE49-F238E27FC236}">
-                <a16:creationId xmlns:a16="http://schemas.microsoft.com/office/drawing/2014/main" id="{77A588C8-9C41-42FC-AC42-0CA488F60093}"/>
-              </a:ext>
-            </a:extLst>
-          </p:cNvPr>
-          <p:cNvPicPr>
-            <a:picLocks noChangeAspect="1"/>
-          </p:cNvPicPr>
-          <p:nvPr/>
-        </p:nvPicPr>
-        <p:blipFill>
-          <a:blip r:embed="rId5"/>
-          <a:stretch>
-            <a:fillRect/>
-          </a:stretch>
-        </p:blipFill>
-        <p:spPr>
-          <a:xfrm>
-            <a:off x="5374775" y="213083"/>
-            <a:ext cx="4460481" cy="3355848"/>
-          </a:xfrm>
-          <a:prstGeom prst="rect">
-            <a:avLst/>
-          </a:prstGeom>
-        </p:spPr>
-      </p:pic>
+              <a:t>３　制限時間以内にお題を</a:t>
+            </a:r>
+            <a:endParaRPr lang="en-US" altLang="ja-JP" sz="3200" dirty="0">
+              <a:latin typeface="メイリオ" panose="020B0604030504040204" pitchFamily="50" charset="-128"/>
+              <a:ea typeface="メイリオ" panose="020B0604030504040204" pitchFamily="50" charset="-128"/>
+            </a:endParaRPr>
+          </a:p>
+          <a:p>
+            <a:r>
+              <a:rPr lang="ja-JP" altLang="en-US" sz="3200" dirty="0">
+                <a:latin typeface="メイリオ" panose="020B0604030504040204" pitchFamily="50" charset="-128"/>
+                <a:ea typeface="メイリオ" panose="020B0604030504040204" pitchFamily="50" charset="-128"/>
+              </a:rPr>
+              <a:t>　　完成できなかった場合</a:t>
+            </a:r>
+            <a:endParaRPr lang="en-US" altLang="ja-JP" sz="3200" dirty="0">
+              <a:latin typeface="メイリオ" panose="020B0604030504040204" pitchFamily="50" charset="-128"/>
+              <a:ea typeface="メイリオ" panose="020B0604030504040204" pitchFamily="50" charset="-128"/>
+            </a:endParaRPr>
+          </a:p>
+          <a:p>
+            <a:r>
+              <a:rPr lang="ja-JP" altLang="en-US" sz="3200" dirty="0">
+                <a:latin typeface="メイリオ" panose="020B0604030504040204" pitchFamily="50" charset="-128"/>
+                <a:ea typeface="メイリオ" panose="020B0604030504040204" pitchFamily="50" charset="-128"/>
+              </a:rPr>
+              <a:t>　　ゲームオーバー</a:t>
+            </a:r>
+            <a:endParaRPr lang="en-US" altLang="ja-JP" sz="3200" dirty="0">
+              <a:latin typeface="メイリオ" panose="020B0604030504040204" pitchFamily="50" charset="-128"/>
+              <a:ea typeface="メイリオ" panose="020B0604030504040204" pitchFamily="50" charset="-128"/>
+            </a:endParaRPr>
+          </a:p>
+        </p:txBody>
+      </p:sp>
     </p:spTree>
   </p:cSld>
   <p:clrMapOvr>
@@ -6936,7 +7440,7 @@
           <p:cNvPr id="3" name="正方形/長方形 2">
             <a:extLst>
               <a:ext uri="{FF2B5EF4-FFF2-40B4-BE49-F238E27FC236}">
-                <a16:creationId xmlns:a16="http://schemas.microsoft.com/office/drawing/2014/main" id="{7ED09CAE-1C4B-43BB-9B32-E9317E478F10}"/>
+                <a16:creationId xmlns:a16="http://schemas.microsoft.com/office/drawing/2014/main" id="{70EAE7B8-2E7A-4AF5-9F80-324BE3D322C8}"/>
               </a:ext>
             </a:extLst>
           </p:cNvPr>
@@ -6945,8 +7449,8 @@
         </p:nvSpPr>
         <p:spPr>
           <a:xfrm>
-            <a:off x="184014" y="453350"/>
-            <a:ext cx="2860743" cy="914400"/>
+            <a:off x="0" y="544464"/>
+            <a:ext cx="4992624" cy="914400"/>
           </a:xfrm>
           <a:prstGeom prst="rect">
             <a:avLst/>
@@ -6979,17 +7483,17 @@
                 <a:latin typeface="メイリオ" panose="020B0604030504040204" pitchFamily="50" charset="-128"/>
                 <a:ea typeface="メイリオ" panose="020B0604030504040204" pitchFamily="50" charset="-128"/>
               </a:rPr>
-              <a:t>ルール</a:t>
-            </a:r>
-          </a:p>
-        </p:txBody>
-      </p:sp>
-      <p:sp>
-        <p:nvSpPr>
-          <p:cNvPr id="2" name="正方形/長方形 1">
-            <a:extLst>
-              <a:ext uri="{FF2B5EF4-FFF2-40B4-BE49-F238E27FC236}">
-                <a16:creationId xmlns:a16="http://schemas.microsoft.com/office/drawing/2014/main" id="{D9033127-4D4D-4EC3-A27C-804E62C27528}"/>
+              <a:t>ゲームの流れ</a:t>
+            </a:r>
+          </a:p>
+        </p:txBody>
+      </p:sp>
+      <p:sp>
+        <p:nvSpPr>
+          <p:cNvPr id="4" name="正方形/長方形 3">
+            <a:extLst>
+              <a:ext uri="{FF2B5EF4-FFF2-40B4-BE49-F238E27FC236}">
+                <a16:creationId xmlns:a16="http://schemas.microsoft.com/office/drawing/2014/main" id="{2A6CE379-9DB5-4E43-AE4A-565D343B3DEF}"/>
               </a:ext>
             </a:extLst>
           </p:cNvPr>
@@ -6998,461 +7502,7 @@
         </p:nvSpPr>
         <p:spPr>
           <a:xfrm>
-            <a:off x="4133851" y="996283"/>
-            <a:ext cx="7096125" cy="1215437"/>
-          </a:xfrm>
-          <a:prstGeom prst="rect">
-            <a:avLst/>
-          </a:prstGeom>
-        </p:spPr>
-        <p:style>
-          <a:lnRef idx="2">
-            <a:schemeClr val="dk1"/>
-          </a:lnRef>
-          <a:fillRef idx="1">
-            <a:schemeClr val="lt1"/>
-          </a:fillRef>
-          <a:effectRef idx="0">
-            <a:schemeClr val="dk1"/>
-          </a:effectRef>
-          <a:fontRef idx="minor">
-            <a:schemeClr val="dk1"/>
-          </a:fontRef>
-        </p:style>
-        <p:txBody>
-          <a:bodyPr rtlCol="0" anchor="ctr"/>
-          <a:lstStyle/>
-          <a:p>
-            <a:r>
-              <a:rPr lang="ja-JP" altLang="en-US" dirty="0">
-                <a:latin typeface="メイリオ" panose="020B0604030504040204" pitchFamily="50" charset="-128"/>
-                <a:ea typeface="メイリオ" panose="020B0604030504040204" pitchFamily="50" charset="-128"/>
-              </a:rPr>
-              <a:t>１　雨粒と指（筆）を操作し、雨粒を指で繋ぎお手本を描く</a:t>
-            </a:r>
-            <a:endParaRPr lang="en-US" altLang="ja-JP" dirty="0">
-              <a:latin typeface="メイリオ" panose="020B0604030504040204" pitchFamily="50" charset="-128"/>
-              <a:ea typeface="メイリオ" panose="020B0604030504040204" pitchFamily="50" charset="-128"/>
-            </a:endParaRPr>
-          </a:p>
-          <a:p>
-            <a:r>
-              <a:rPr kumimoji="1" lang="ja-JP" altLang="en-US" dirty="0">
-                <a:latin typeface="メイリオ" panose="020B0604030504040204" pitchFamily="50" charset="-128"/>
-                <a:ea typeface="メイリオ" panose="020B0604030504040204" pitchFamily="50" charset="-128"/>
-              </a:rPr>
-              <a:t>２　制限時間以内にスコアを稼ぐ</a:t>
-            </a:r>
-            <a:endParaRPr kumimoji="1" lang="en-US" altLang="ja-JP" dirty="0">
-              <a:latin typeface="メイリオ" panose="020B0604030504040204" pitchFamily="50" charset="-128"/>
-              <a:ea typeface="メイリオ" panose="020B0604030504040204" pitchFamily="50" charset="-128"/>
-            </a:endParaRPr>
-          </a:p>
-          <a:p>
-            <a:r>
-              <a:rPr lang="ja-JP" altLang="en-US" dirty="0">
-                <a:latin typeface="メイリオ" panose="020B0604030504040204" pitchFamily="50" charset="-128"/>
-                <a:ea typeface="メイリオ" panose="020B0604030504040204" pitchFamily="50" charset="-128"/>
-              </a:rPr>
-              <a:t>３　スコアが基準に満たない場合　ゲームオーバー</a:t>
-            </a:r>
-            <a:endParaRPr lang="en-US" altLang="ja-JP" dirty="0">
-              <a:latin typeface="メイリオ" panose="020B0604030504040204" pitchFamily="50" charset="-128"/>
-              <a:ea typeface="メイリオ" panose="020B0604030504040204" pitchFamily="50" charset="-128"/>
-            </a:endParaRPr>
-          </a:p>
-          <a:p>
-            <a:endParaRPr kumimoji="1" lang="ja-JP" altLang="en-US" dirty="0"/>
-          </a:p>
-        </p:txBody>
-      </p:sp>
-      <p:sp>
-        <p:nvSpPr>
-          <p:cNvPr id="6" name="正方形/長方形 5">
-            <a:extLst>
-              <a:ext uri="{FF2B5EF4-FFF2-40B4-BE49-F238E27FC236}">
-                <a16:creationId xmlns:a16="http://schemas.microsoft.com/office/drawing/2014/main" id="{A30C44BD-C3CF-4D21-8AC1-84E72A8C316D}"/>
-              </a:ext>
-            </a:extLst>
-          </p:cNvPr>
-          <p:cNvSpPr/>
-          <p:nvPr/>
-        </p:nvSpPr>
-        <p:spPr>
-          <a:xfrm>
-            <a:off x="4133845" y="453350"/>
-            <a:ext cx="7096126" cy="542933"/>
-          </a:xfrm>
-          <a:prstGeom prst="rect">
-            <a:avLst/>
-          </a:prstGeom>
-          <a:ln>
-            <a:solidFill>
-              <a:schemeClr val="tx1"/>
-            </a:solidFill>
-          </a:ln>
-        </p:spPr>
-        <p:style>
-          <a:lnRef idx="2">
-            <a:schemeClr val="accent6"/>
-          </a:lnRef>
-          <a:fillRef idx="1">
-            <a:schemeClr val="lt1"/>
-          </a:fillRef>
-          <a:effectRef idx="0">
-            <a:schemeClr val="accent6"/>
-          </a:effectRef>
-          <a:fontRef idx="minor">
-            <a:schemeClr val="dk1"/>
-          </a:fontRef>
-        </p:style>
-        <p:txBody>
-          <a:bodyPr rtlCol="0" anchor="ctr"/>
-          <a:lstStyle/>
-          <a:p>
-            <a:pPr algn="ctr"/>
-            <a:r>
-              <a:rPr kumimoji="1" lang="ja-JP" altLang="en-US" sz="3600" dirty="0">
-                <a:solidFill>
-                  <a:srgbClr val="FF0000"/>
-                </a:solidFill>
-                <a:latin typeface="メイリオ" panose="020B0604030504040204" pitchFamily="50" charset="-128"/>
-                <a:ea typeface="メイリオ" panose="020B0604030504040204" pitchFamily="50" charset="-128"/>
-              </a:rPr>
-              <a:t>チャレンジモード</a:t>
-            </a:r>
-          </a:p>
-        </p:txBody>
-      </p:sp>
-      <p:sp>
-        <p:nvSpPr>
-          <p:cNvPr id="7" name="正方形/長方形 6">
-            <a:extLst>
-              <a:ext uri="{FF2B5EF4-FFF2-40B4-BE49-F238E27FC236}">
-                <a16:creationId xmlns:a16="http://schemas.microsoft.com/office/drawing/2014/main" id="{6A95D87C-FEF3-467E-B1FF-6608DFB43B23}"/>
-              </a:ext>
-            </a:extLst>
-          </p:cNvPr>
-          <p:cNvSpPr/>
-          <p:nvPr/>
-        </p:nvSpPr>
-        <p:spPr>
-          <a:xfrm>
-            <a:off x="4133850" y="2755553"/>
-            <a:ext cx="7096126" cy="542934"/>
-          </a:xfrm>
-          <a:prstGeom prst="rect">
-            <a:avLst/>
-          </a:prstGeom>
-          <a:ln>
-            <a:solidFill>
-              <a:schemeClr val="tx1"/>
-            </a:solidFill>
-          </a:ln>
-        </p:spPr>
-        <p:style>
-          <a:lnRef idx="2">
-            <a:schemeClr val="accent6"/>
-          </a:lnRef>
-          <a:fillRef idx="1">
-            <a:schemeClr val="lt1"/>
-          </a:fillRef>
-          <a:effectRef idx="0">
-            <a:schemeClr val="accent6"/>
-          </a:effectRef>
-          <a:fontRef idx="minor">
-            <a:schemeClr val="dk1"/>
-          </a:fontRef>
-        </p:style>
-        <p:txBody>
-          <a:bodyPr rtlCol="0" anchor="ctr"/>
-          <a:lstStyle/>
-          <a:p>
-            <a:pPr algn="ctr"/>
-            <a:r>
-              <a:rPr lang="ja-JP" altLang="en-US" sz="3600" dirty="0">
-                <a:solidFill>
-                  <a:srgbClr val="FF0000"/>
-                </a:solidFill>
-                <a:latin typeface="メイリオ" panose="020B0604030504040204" pitchFamily="50" charset="-128"/>
-                <a:ea typeface="メイリオ" panose="020B0604030504040204" pitchFamily="50" charset="-128"/>
-              </a:rPr>
-              <a:t>自由</a:t>
-            </a:r>
-            <a:r>
-              <a:rPr kumimoji="1" lang="ja-JP" altLang="en-US" sz="3600" dirty="0">
-                <a:solidFill>
-                  <a:srgbClr val="FF0000"/>
-                </a:solidFill>
-                <a:latin typeface="メイリオ" panose="020B0604030504040204" pitchFamily="50" charset="-128"/>
-                <a:ea typeface="メイリオ" panose="020B0604030504040204" pitchFamily="50" charset="-128"/>
-              </a:rPr>
-              <a:t>モード</a:t>
-            </a:r>
-          </a:p>
-        </p:txBody>
-      </p:sp>
-      <p:sp>
-        <p:nvSpPr>
-          <p:cNvPr id="9" name="正方形/長方形 8">
-            <a:extLst>
-              <a:ext uri="{FF2B5EF4-FFF2-40B4-BE49-F238E27FC236}">
-                <a16:creationId xmlns:a16="http://schemas.microsoft.com/office/drawing/2014/main" id="{00039B03-7452-4948-AB40-CEC2825954EC}"/>
-              </a:ext>
-            </a:extLst>
-          </p:cNvPr>
-          <p:cNvSpPr/>
-          <p:nvPr/>
-        </p:nvSpPr>
-        <p:spPr>
-          <a:xfrm>
-            <a:off x="4133850" y="4699570"/>
-            <a:ext cx="7096126" cy="542933"/>
-          </a:xfrm>
-          <a:prstGeom prst="rect">
-            <a:avLst/>
-          </a:prstGeom>
-          <a:ln>
-            <a:solidFill>
-              <a:schemeClr val="tx1"/>
-            </a:solidFill>
-          </a:ln>
-        </p:spPr>
-        <p:style>
-          <a:lnRef idx="2">
-            <a:schemeClr val="accent6"/>
-          </a:lnRef>
-          <a:fillRef idx="1">
-            <a:schemeClr val="lt1"/>
-          </a:fillRef>
-          <a:effectRef idx="0">
-            <a:schemeClr val="accent6"/>
-          </a:effectRef>
-          <a:fontRef idx="minor">
-            <a:schemeClr val="dk1"/>
-          </a:fontRef>
-        </p:style>
-        <p:txBody>
-          <a:bodyPr rtlCol="0" anchor="ctr"/>
-          <a:lstStyle/>
-          <a:p>
-            <a:pPr algn="ctr"/>
-            <a:r>
-              <a:rPr lang="ja-JP" altLang="en-US" sz="3600" dirty="0">
-                <a:solidFill>
-                  <a:srgbClr val="FF0000"/>
-                </a:solidFill>
-                <a:latin typeface="メイリオ" panose="020B0604030504040204" pitchFamily="50" charset="-128"/>
-                <a:ea typeface="メイリオ" panose="020B0604030504040204" pitchFamily="50" charset="-128"/>
-              </a:rPr>
-              <a:t>お題</a:t>
-            </a:r>
-            <a:r>
-              <a:rPr kumimoji="1" lang="ja-JP" altLang="en-US" sz="3600" dirty="0">
-                <a:solidFill>
-                  <a:srgbClr val="FF0000"/>
-                </a:solidFill>
-                <a:latin typeface="メイリオ" panose="020B0604030504040204" pitchFamily="50" charset="-128"/>
-                <a:ea typeface="メイリオ" panose="020B0604030504040204" pitchFamily="50" charset="-128"/>
-              </a:rPr>
-              <a:t>モード</a:t>
-            </a:r>
-          </a:p>
-        </p:txBody>
-      </p:sp>
-      <p:sp>
-        <p:nvSpPr>
-          <p:cNvPr id="11" name="正方形/長方形 10">
-            <a:extLst>
-              <a:ext uri="{FF2B5EF4-FFF2-40B4-BE49-F238E27FC236}">
-                <a16:creationId xmlns:a16="http://schemas.microsoft.com/office/drawing/2014/main" id="{13BABEA7-2FB4-4D0E-9CE5-C9EE47AFD26F}"/>
-              </a:ext>
-            </a:extLst>
-          </p:cNvPr>
-          <p:cNvSpPr/>
-          <p:nvPr/>
-        </p:nvSpPr>
-        <p:spPr>
-          <a:xfrm>
-            <a:off x="4133851" y="5242503"/>
-            <a:ext cx="7096125" cy="914400"/>
-          </a:xfrm>
-          <a:prstGeom prst="rect">
-            <a:avLst/>
-          </a:prstGeom>
-        </p:spPr>
-        <p:style>
-          <a:lnRef idx="2">
-            <a:schemeClr val="dk1"/>
-          </a:lnRef>
-          <a:fillRef idx="1">
-            <a:schemeClr val="lt1"/>
-          </a:fillRef>
-          <a:effectRef idx="0">
-            <a:schemeClr val="dk1"/>
-          </a:effectRef>
-          <a:fontRef idx="minor">
-            <a:schemeClr val="dk1"/>
-          </a:fontRef>
-        </p:style>
-        <p:txBody>
-          <a:bodyPr rtlCol="0" anchor="ctr"/>
-          <a:lstStyle/>
-          <a:p>
-            <a:r>
-              <a:rPr lang="ja-JP" altLang="en-US" dirty="0">
-                <a:latin typeface="メイリオ" panose="020B0604030504040204" pitchFamily="50" charset="-128"/>
-                <a:ea typeface="メイリオ" panose="020B0604030504040204" pitchFamily="50" charset="-128"/>
-              </a:rPr>
-              <a:t>１　出されたお題に沿った絵を、自由な描き方で完成させる</a:t>
-            </a:r>
-            <a:endParaRPr kumimoji="1" lang="ja-JP" altLang="en-US" dirty="0"/>
-          </a:p>
-        </p:txBody>
-      </p:sp>
-      <p:sp>
-        <p:nvSpPr>
-          <p:cNvPr id="12" name="正方形/長方形 11">
-            <a:extLst>
-              <a:ext uri="{FF2B5EF4-FFF2-40B4-BE49-F238E27FC236}">
-                <a16:creationId xmlns:a16="http://schemas.microsoft.com/office/drawing/2014/main" id="{C0E15D93-A5A7-4816-B984-006258B007B4}"/>
-              </a:ext>
-            </a:extLst>
-          </p:cNvPr>
-          <p:cNvSpPr/>
-          <p:nvPr/>
-        </p:nvSpPr>
-        <p:spPr>
-          <a:xfrm>
-            <a:off x="4133844" y="3241337"/>
-            <a:ext cx="7096125" cy="914400"/>
-          </a:xfrm>
-          <a:prstGeom prst="rect">
-            <a:avLst/>
-          </a:prstGeom>
-        </p:spPr>
-        <p:style>
-          <a:lnRef idx="2">
-            <a:schemeClr val="dk1"/>
-          </a:lnRef>
-          <a:fillRef idx="1">
-            <a:schemeClr val="lt1"/>
-          </a:fillRef>
-          <a:effectRef idx="0">
-            <a:schemeClr val="dk1"/>
-          </a:effectRef>
-          <a:fontRef idx="minor">
-            <a:schemeClr val="dk1"/>
-          </a:fontRef>
-        </p:style>
-        <p:txBody>
-          <a:bodyPr rtlCol="0" anchor="ctr"/>
-          <a:lstStyle/>
-          <a:p>
-            <a:r>
-              <a:rPr lang="ja-JP" altLang="en-US" dirty="0">
-                <a:latin typeface="メイリオ" panose="020B0604030504040204" pitchFamily="50" charset="-128"/>
-                <a:ea typeface="メイリオ" panose="020B0604030504040204" pitchFamily="50" charset="-128"/>
-              </a:rPr>
-              <a:t>１　自由に時間を気にせずに描ける</a:t>
-            </a:r>
-            <a:endParaRPr kumimoji="1" lang="ja-JP" altLang="en-US" dirty="0"/>
-          </a:p>
-        </p:txBody>
-      </p:sp>
-    </p:spTree>
-  </p:cSld>
-  <p:clrMapOvr>
-    <a:masterClrMapping/>
-  </p:clrMapOvr>
-</p:sld>
-</file>
-
-<file path=ppt/slides/slide7.xml><?xml version="1.0" encoding="utf-8"?>
-<p:sld xmlns:a="http://schemas.openxmlformats.org/drawingml/2006/main" xmlns:r="http://schemas.openxmlformats.org/officeDocument/2006/relationships" xmlns:p="http://schemas.openxmlformats.org/presentationml/2006/main">
-  <p:cSld>
-    <p:spTree>
-      <p:nvGrpSpPr>
-        <p:cNvPr id="1" name=""/>
-        <p:cNvGrpSpPr/>
-        <p:nvPr/>
-      </p:nvGrpSpPr>
-      <p:grpSpPr>
-        <a:xfrm>
-          <a:off x="0" y="0"/>
-          <a:ext cx="0" cy="0"/>
-          <a:chOff x="0" y="0"/>
-          <a:chExt cx="0" cy="0"/>
-        </a:xfrm>
-      </p:grpSpPr>
-      <p:sp>
-        <p:nvSpPr>
-          <p:cNvPr id="3" name="正方形/長方形 2">
-            <a:extLst>
-              <a:ext uri="{FF2B5EF4-FFF2-40B4-BE49-F238E27FC236}">
-                <a16:creationId xmlns:a16="http://schemas.microsoft.com/office/drawing/2014/main" id="{70EAE7B8-2E7A-4AF5-9F80-324BE3D322C8}"/>
-              </a:ext>
-            </a:extLst>
-          </p:cNvPr>
-          <p:cNvSpPr/>
-          <p:nvPr/>
-        </p:nvSpPr>
-        <p:spPr>
-          <a:xfrm>
-            <a:off x="184014" y="453350"/>
-            <a:ext cx="9060570" cy="914400"/>
-          </a:xfrm>
-          <a:prstGeom prst="rect">
-            <a:avLst/>
-          </a:prstGeom>
-          <a:ln>
-            <a:noFill/>
-          </a:ln>
-        </p:spPr>
-        <p:style>
-          <a:lnRef idx="2">
-            <a:schemeClr val="accent6"/>
-          </a:lnRef>
-          <a:fillRef idx="1">
-            <a:schemeClr val="lt1"/>
-          </a:fillRef>
-          <a:effectRef idx="0">
-            <a:schemeClr val="accent6"/>
-          </a:effectRef>
-          <a:fontRef idx="minor">
-            <a:schemeClr val="dk1"/>
-          </a:fontRef>
-        </p:style>
-        <p:txBody>
-          <a:bodyPr rtlCol="0" anchor="ctr"/>
-          <a:lstStyle/>
-          <a:p>
-            <a:pPr algn="ctr"/>
-            <a:r>
-              <a:rPr kumimoji="1" lang="ja-JP" altLang="en-US" sz="4800" dirty="0">
-                <a:latin typeface="メイリオ" panose="020B0604030504040204" pitchFamily="50" charset="-128"/>
-                <a:ea typeface="メイリオ" panose="020B0604030504040204" pitchFamily="50" charset="-128"/>
-              </a:rPr>
-              <a:t>ゲームの流れ）</a:t>
-            </a:r>
-          </a:p>
-        </p:txBody>
-      </p:sp>
-      <p:sp>
-        <p:nvSpPr>
-          <p:cNvPr id="4" name="正方形/長方形 3">
-            <a:extLst>
-              <a:ext uri="{FF2B5EF4-FFF2-40B4-BE49-F238E27FC236}">
-                <a16:creationId xmlns:a16="http://schemas.microsoft.com/office/drawing/2014/main" id="{2A6CE379-9DB5-4E43-AE4A-565D343B3DEF}"/>
-              </a:ext>
-            </a:extLst>
-          </p:cNvPr>
-          <p:cNvSpPr/>
-          <p:nvPr/>
-        </p:nvSpPr>
-        <p:spPr>
-          <a:xfrm>
-            <a:off x="363240" y="3429000"/>
+            <a:off x="32149" y="2523668"/>
             <a:ext cx="1461985" cy="1428750"/>
           </a:xfrm>
           <a:prstGeom prst="rect">
@@ -7507,8 +7557,8 @@
         </p:nvSpPr>
         <p:spPr>
           <a:xfrm>
-            <a:off x="2857626" y="3541390"/>
-            <a:ext cx="1707937" cy="1428750"/>
+            <a:off x="1992281" y="2528707"/>
+            <a:ext cx="2659183" cy="1428750"/>
           </a:xfrm>
           <a:prstGeom prst="rect">
             <a:avLst/>
@@ -7539,13 +7589,13 @@
           <a:p>
             <a:pPr algn="ctr"/>
             <a:r>
-              <a:rPr lang="ja-JP" altLang="en-US" sz="2400" dirty="0">
+              <a:rPr lang="ja-JP" altLang="en-US" sz="3200" dirty="0">
                 <a:latin typeface="メイリオ" panose="020B0604030504040204" pitchFamily="50" charset="-128"/>
                 <a:ea typeface="メイリオ" panose="020B0604030504040204" pitchFamily="50" charset="-128"/>
               </a:rPr>
-              <a:t>雨粒が降って来る</a:t>
-            </a:r>
-            <a:endParaRPr kumimoji="1" lang="ja-JP" altLang="en-US" sz="2400" dirty="0">
+              <a:t>雨粒が盤面に配置される</a:t>
+            </a:r>
+            <a:endParaRPr kumimoji="1" lang="ja-JP" altLang="en-US" sz="3200" dirty="0">
               <a:latin typeface="メイリオ" panose="020B0604030504040204" pitchFamily="50" charset="-128"/>
               <a:ea typeface="メイリオ" panose="020B0604030504040204" pitchFamily="50" charset="-128"/>
             </a:endParaRPr>
@@ -7566,8 +7616,8 @@
         </p:nvSpPr>
         <p:spPr>
           <a:xfrm>
-            <a:off x="5597964" y="3541390"/>
-            <a:ext cx="2115935" cy="1428750"/>
+            <a:off x="5105905" y="2528708"/>
+            <a:ext cx="2659183" cy="1422934"/>
           </a:xfrm>
           <a:prstGeom prst="rect">
             <a:avLst/>
@@ -7596,19 +7646,31 @@
           <a:bodyPr rtlCol="0" anchor="ctr"/>
           <a:lstStyle/>
           <a:p>
-            <a:pPr algn="ctr"/>
-            <a:r>
-              <a:rPr kumimoji="1" lang="ja-JP" altLang="en-US" dirty="0">
+            <a:r>
+              <a:rPr kumimoji="1" lang="ja-JP" altLang="en-US" sz="3200" dirty="0">
                 <a:latin typeface="メイリオ" panose="020B0604030504040204" pitchFamily="50" charset="-128"/>
                 <a:ea typeface="メイリオ" panose="020B0604030504040204" pitchFamily="50" charset="-128"/>
               </a:rPr>
-              <a:t>マウスとキーボドの同時操作</a:t>
-            </a:r>
-            <a:endParaRPr kumimoji="1" lang="en-US" altLang="ja-JP" dirty="0">
+              <a:t>雨粒を動かし</a:t>
+            </a:r>
+            <a:endParaRPr kumimoji="1" lang="en-US" altLang="ja-JP" sz="3200" dirty="0">
               <a:latin typeface="メイリオ" panose="020B0604030504040204" pitchFamily="50" charset="-128"/>
               <a:ea typeface="メイリオ" panose="020B0604030504040204" pitchFamily="50" charset="-128"/>
             </a:endParaRPr>
           </a:p>
+          <a:p>
+            <a:r>
+              <a:rPr kumimoji="1" lang="ja-JP" altLang="en-US" sz="3200" dirty="0">
+                <a:latin typeface="メイリオ" panose="020B0604030504040204" pitchFamily="50" charset="-128"/>
+                <a:ea typeface="メイリオ" panose="020B0604030504040204" pitchFamily="50" charset="-128"/>
+              </a:rPr>
+              <a:t>盤面を整理</a:t>
+            </a:r>
+            <a:endParaRPr kumimoji="1" lang="en-US" altLang="ja-JP" sz="3200" dirty="0">
+              <a:latin typeface="メイリオ" panose="020B0604030504040204" pitchFamily="50" charset="-128"/>
+              <a:ea typeface="メイリオ" panose="020B0604030504040204" pitchFamily="50" charset="-128"/>
+            </a:endParaRPr>
+          </a:p>
         </p:txBody>
       </p:sp>
       <p:sp>
@@ -7625,8 +7687,8 @@
         </p:nvSpPr>
         <p:spPr>
           <a:xfrm>
-            <a:off x="1982758" y="3906774"/>
-            <a:ext cx="717335" cy="484632"/>
+            <a:off x="1494134" y="3030275"/>
+            <a:ext cx="498147" cy="484632"/>
           </a:xfrm>
           <a:prstGeom prst="rightArrow">
             <a:avLst/>
@@ -7673,8 +7735,8 @@
           <p:nvPr/>
         </p:nvSpPr>
         <p:spPr>
-          <a:xfrm>
-            <a:off x="7946365" y="4059174"/>
+          <a:xfrm rot="5400000">
+            <a:off x="8571804" y="4073810"/>
             <a:ext cx="717335" cy="484632"/>
           </a:xfrm>
           <a:prstGeom prst="rightArrow">
@@ -7711,10 +7773,10 @@
       </p:sp>
       <p:sp>
         <p:nvSpPr>
-          <p:cNvPr id="14" name="正方形/長方形 13">
-            <a:extLst>
-              <a:ext uri="{FF2B5EF4-FFF2-40B4-BE49-F238E27FC236}">
-                <a16:creationId xmlns:a16="http://schemas.microsoft.com/office/drawing/2014/main" id="{BA078506-7E4C-4F5D-B9A4-35A7E62517A2}"/>
+          <p:cNvPr id="16" name="正方形/長方形 15">
+            <a:extLst>
+              <a:ext uri="{FF2B5EF4-FFF2-40B4-BE49-F238E27FC236}">
+                <a16:creationId xmlns:a16="http://schemas.microsoft.com/office/drawing/2014/main" id="{CFB47AD2-AE9E-45A7-968A-6F4AF3BE494A}"/>
               </a:ext>
             </a:extLst>
           </p:cNvPr>
@@ -7723,8 +7785,8 @@
         </p:nvSpPr>
         <p:spPr>
           <a:xfrm>
-            <a:off x="8818377" y="3517869"/>
-            <a:ext cx="2731425" cy="1567241"/>
+            <a:off x="8199480" y="2528708"/>
+            <a:ext cx="1461985" cy="1428749"/>
           </a:xfrm>
           <a:prstGeom prst="rect">
             <a:avLst/>
@@ -7755,21 +7817,21 @@
           <a:p>
             <a:pPr algn="ctr"/>
             <a:r>
-              <a:rPr kumimoji="1" lang="ja-JP" altLang="en-US" sz="2400" dirty="0">
+              <a:rPr kumimoji="1" lang="ja-JP" altLang="en-US" sz="3200" dirty="0">
                 <a:latin typeface="メイリオ" panose="020B0604030504040204" pitchFamily="50" charset="-128"/>
                 <a:ea typeface="メイリオ" panose="020B0604030504040204" pitchFamily="50" charset="-128"/>
               </a:rPr>
-              <a:t>お題を何回かけるかでスコアを出す</a:t>
-            </a:r>
-          </a:p>
-        </p:txBody>
-      </p:sp>
-      <p:sp>
-        <p:nvSpPr>
-          <p:cNvPr id="16" name="正方形/長方形 15">
-            <a:extLst>
-              <a:ext uri="{FF2B5EF4-FFF2-40B4-BE49-F238E27FC236}">
-                <a16:creationId xmlns:a16="http://schemas.microsoft.com/office/drawing/2014/main" id="{CFB47AD2-AE9E-45A7-968A-6F4AF3BE494A}"/>
+              <a:t>つなぐ</a:t>
+            </a:r>
+          </a:p>
+        </p:txBody>
+      </p:sp>
+      <p:sp>
+        <p:nvSpPr>
+          <p:cNvPr id="19" name="矢印: 右 18">
+            <a:extLst>
+              <a:ext uri="{FF2B5EF4-FFF2-40B4-BE49-F238E27FC236}">
+                <a16:creationId xmlns:a16="http://schemas.microsoft.com/office/drawing/2014/main" id="{25A60F97-B616-4CEB-A0D8-7362FB3B7E19}"/>
               </a:ext>
             </a:extLst>
           </p:cNvPr>
@@ -7778,81 +7840,8 @@
         </p:nvSpPr>
         <p:spPr>
           <a:xfrm>
-            <a:off x="9097334" y="1070020"/>
-            <a:ext cx="2173513" cy="1567241"/>
-          </a:xfrm>
-          <a:prstGeom prst="rect">
-            <a:avLst/>
-          </a:prstGeom>
-          <a:ln>
-            <a:solidFill>
-              <a:schemeClr val="tx1"/>
-            </a:solidFill>
-          </a:ln>
-        </p:spPr>
-        <p:style>
-          <a:lnRef idx="2">
-            <a:schemeClr val="accent6"/>
-          </a:lnRef>
-          <a:fillRef idx="1">
-            <a:schemeClr val="lt1"/>
-          </a:fillRef>
-          <a:effectRef idx="0">
-            <a:schemeClr val="accent6"/>
-          </a:effectRef>
-          <a:fontRef idx="minor">
-            <a:schemeClr val="dk1"/>
-          </a:fontRef>
-        </p:style>
-        <p:txBody>
-          <a:bodyPr rtlCol="0" anchor="ctr"/>
-          <a:lstStyle/>
-          <a:p>
-            <a:pPr algn="ctr"/>
-            <a:r>
-              <a:rPr kumimoji="1" lang="ja-JP" altLang="en-US" sz="2400" dirty="0">
-                <a:latin typeface="メイリオ" panose="020B0604030504040204" pitchFamily="50" charset="-128"/>
-                <a:ea typeface="メイリオ" panose="020B0604030504040204" pitchFamily="50" charset="-128"/>
-              </a:rPr>
-              <a:t>合格点の場合</a:t>
-            </a:r>
-            <a:endParaRPr kumimoji="1" lang="en-US" altLang="ja-JP" sz="2400" dirty="0">
-              <a:latin typeface="メイリオ" panose="020B0604030504040204" pitchFamily="50" charset="-128"/>
-              <a:ea typeface="メイリオ" panose="020B0604030504040204" pitchFamily="50" charset="-128"/>
-            </a:endParaRPr>
-          </a:p>
-          <a:p>
-            <a:pPr algn="ctr"/>
-            <a:r>
-              <a:rPr lang="ja-JP" altLang="en-US" sz="2400" dirty="0">
-                <a:latin typeface="メイリオ" panose="020B0604030504040204" pitchFamily="50" charset="-128"/>
-                <a:ea typeface="メイリオ" panose="020B0604030504040204" pitchFamily="50" charset="-128"/>
-              </a:rPr>
-              <a:t>次のステージ</a:t>
-            </a:r>
-            <a:endParaRPr kumimoji="1" lang="ja-JP" altLang="en-US" sz="2400" dirty="0">
-              <a:latin typeface="メイリオ" panose="020B0604030504040204" pitchFamily="50" charset="-128"/>
-              <a:ea typeface="メイリオ" panose="020B0604030504040204" pitchFamily="50" charset="-128"/>
-            </a:endParaRPr>
-          </a:p>
-        </p:txBody>
-      </p:sp>
-      <p:sp>
-        <p:nvSpPr>
-          <p:cNvPr id="19" name="矢印: 右 18">
-            <a:extLst>
-              <a:ext uri="{FF2B5EF4-FFF2-40B4-BE49-F238E27FC236}">
-                <a16:creationId xmlns:a16="http://schemas.microsoft.com/office/drawing/2014/main" id="{25A60F97-B616-4CEB-A0D8-7362FB3B7E19}"/>
-              </a:ext>
-            </a:extLst>
-          </p:cNvPr>
-          <p:cNvSpPr/>
-          <p:nvPr/>
-        </p:nvSpPr>
-        <p:spPr>
-          <a:xfrm>
-            <a:off x="4875496" y="4059174"/>
-            <a:ext cx="717335" cy="484632"/>
+            <a:off x="4651464" y="3073994"/>
+            <a:ext cx="441201" cy="484632"/>
           </a:xfrm>
           <a:prstGeom prst="rightArrow">
             <a:avLst/>
@@ -7899,8 +7888,8 @@
           <p:nvPr/>
         </p:nvSpPr>
         <p:spPr>
-          <a:xfrm rot="16200000">
-            <a:off x="9973513" y="2868189"/>
+          <a:xfrm>
+            <a:off x="7778328" y="3073994"/>
             <a:ext cx="421152" cy="484632"/>
           </a:xfrm>
           <a:prstGeom prst="rightArrow">
@@ -7948,8 +7937,8 @@
           <p:nvPr/>
         </p:nvSpPr>
         <p:spPr>
-          <a:xfrm rot="5400000">
-            <a:off x="9966614" y="5250158"/>
+          <a:xfrm>
+            <a:off x="9674705" y="2995727"/>
             <a:ext cx="421152" cy="484632"/>
           </a:xfrm>
           <a:prstGeom prst="rightArrow">
@@ -7986,10 +7975,10 @@
       </p:sp>
       <p:sp>
         <p:nvSpPr>
-          <p:cNvPr id="22" name="矢印: 右 21">
-            <a:extLst>
-              <a:ext uri="{FF2B5EF4-FFF2-40B4-BE49-F238E27FC236}">
-                <a16:creationId xmlns:a16="http://schemas.microsoft.com/office/drawing/2014/main" id="{7806784A-4868-4A8F-BB54-800602572138}"/>
+          <p:cNvPr id="24" name="正方形/長方形 23">
+            <a:extLst>
+              <a:ext uri="{FF2B5EF4-FFF2-40B4-BE49-F238E27FC236}">
+                <a16:creationId xmlns:a16="http://schemas.microsoft.com/office/drawing/2014/main" id="{B92945C9-D043-4A1F-BC8A-7A0428356C38}"/>
               </a:ext>
             </a:extLst>
           </p:cNvPr>
@@ -7997,9 +7986,78 @@
           <p:nvPr/>
         </p:nvSpPr>
         <p:spPr>
+          <a:xfrm>
+            <a:off x="6846288" y="4674793"/>
+            <a:ext cx="3952776" cy="1237316"/>
+          </a:xfrm>
+          <a:prstGeom prst="rect">
+            <a:avLst/>
+          </a:prstGeom>
+          <a:ln>
+            <a:solidFill>
+              <a:schemeClr val="tx1"/>
+            </a:solidFill>
+          </a:ln>
+        </p:spPr>
+        <p:style>
+          <a:lnRef idx="2">
+            <a:schemeClr val="accent6"/>
+          </a:lnRef>
+          <a:fillRef idx="1">
+            <a:schemeClr val="lt1"/>
+          </a:fillRef>
+          <a:effectRef idx="0">
+            <a:schemeClr val="accent6"/>
+          </a:effectRef>
+          <a:fontRef idx="minor">
+            <a:schemeClr val="dk1"/>
+          </a:fontRef>
+        </p:style>
+        <p:txBody>
+          <a:bodyPr rtlCol="0" anchor="ctr"/>
+          <a:lstStyle/>
+          <a:p>
+            <a:pPr algn="ctr"/>
+            <a:r>
+              <a:rPr lang="ja-JP" altLang="en-US" sz="3200" dirty="0">
+                <a:latin typeface="メイリオ" panose="020B0604030504040204" pitchFamily="50" charset="-128"/>
+                <a:ea typeface="メイリオ" panose="020B0604030504040204" pitchFamily="50" charset="-128"/>
+              </a:rPr>
+              <a:t>完成しなかった場合</a:t>
+            </a:r>
+            <a:endParaRPr lang="en-US" altLang="ja-JP" sz="3200" dirty="0">
+              <a:latin typeface="メイリオ" panose="020B0604030504040204" pitchFamily="50" charset="-128"/>
+              <a:ea typeface="メイリオ" panose="020B0604030504040204" pitchFamily="50" charset="-128"/>
+            </a:endParaRPr>
+          </a:p>
+          <a:p>
+            <a:pPr algn="ctr"/>
+            <a:r>
+              <a:rPr kumimoji="1" lang="ja-JP" altLang="en-US" sz="3200" dirty="0">
+                <a:latin typeface="メイリオ" panose="020B0604030504040204" pitchFamily="50" charset="-128"/>
+                <a:ea typeface="メイリオ" panose="020B0604030504040204" pitchFamily="50" charset="-128"/>
+              </a:rPr>
+              <a:t>ゲームオーバー</a:t>
+            </a:r>
+          </a:p>
+        </p:txBody>
+      </p:sp>
+      <p:sp>
+        <p:nvSpPr>
+          <p:cNvPr id="18" name="矢印: 右 17">
+            <a:extLst>
+              <a:ext uri="{FF2B5EF4-FFF2-40B4-BE49-F238E27FC236}">
+                <a16:creationId xmlns:a16="http://schemas.microsoft.com/office/drawing/2014/main" id="{AF97EBDD-B6B0-4209-97C2-591BEBCBF71B}"/>
+              </a:ext>
+            </a:extLst>
+          </p:cNvPr>
+          <p:cNvSpPr/>
+          <p:nvPr/>
+        </p:nvSpPr>
+        <p:spPr>
           <a:xfrm rot="10800000">
-            <a:off x="1152143" y="5770189"/>
-            <a:ext cx="9230931" cy="484632"/>
+            <a:off x="704088" y="5051135"/>
+            <a:ext cx="6142200" cy="484632"/>
           </a:xfrm>
           <a:prstGeom prst="rightArrow">
             <a:avLst/>
@@ -8035,10 +8093,10 @@
       </p:sp>
       <p:sp>
         <p:nvSpPr>
-          <p:cNvPr id="23" name="矢印: 右 22">
-            <a:extLst>
-              <a:ext uri="{FF2B5EF4-FFF2-40B4-BE49-F238E27FC236}">
-                <a16:creationId xmlns:a16="http://schemas.microsoft.com/office/drawing/2014/main" id="{E2D9D0D3-D19E-47EF-9969-C3597AD4EDB4}"/>
+          <p:cNvPr id="25" name="正方形/長方形 24">
+            <a:extLst>
+              <a:ext uri="{FF2B5EF4-FFF2-40B4-BE49-F238E27FC236}">
+                <a16:creationId xmlns:a16="http://schemas.microsoft.com/office/drawing/2014/main" id="{BE15DC54-AE7A-4F8E-918F-363DE7902632}"/>
               </a:ext>
             </a:extLst>
           </p:cNvPr>
@@ -8046,58 +8104,9 @@
           <p:nvPr/>
         </p:nvSpPr>
         <p:spPr>
-          <a:xfrm rot="16200000">
-            <a:off x="714259" y="5310275"/>
-            <a:ext cx="898959" cy="484632"/>
-          </a:xfrm>
-          <a:prstGeom prst="rightArrow">
-            <a:avLst/>
-          </a:prstGeom>
-          <a:solidFill>
-            <a:srgbClr val="FF0000"/>
-          </a:solidFill>
-        </p:spPr>
-        <p:style>
-          <a:lnRef idx="2">
-            <a:schemeClr val="accent1">
-              <a:shade val="50000"/>
-            </a:schemeClr>
-          </a:lnRef>
-          <a:fillRef idx="1">
-            <a:schemeClr val="accent1"/>
-          </a:fillRef>
-          <a:effectRef idx="0">
-            <a:schemeClr val="accent1"/>
-          </a:effectRef>
-          <a:fontRef idx="minor">
-            <a:schemeClr val="lt1"/>
-          </a:fontRef>
-        </p:style>
-        <p:txBody>
-          <a:bodyPr rtlCol="0" anchor="ctr"/>
-          <a:lstStyle/>
-          <a:p>
-            <a:pPr algn="ctr"/>
-            <a:endParaRPr kumimoji="1" lang="ja-JP" altLang="en-US"/>
-          </a:p>
-        </p:txBody>
-      </p:sp>
-      <p:sp>
-        <p:nvSpPr>
-          <p:cNvPr id="24" name="正方形/長方形 23">
-            <a:extLst>
-              <a:ext uri="{FF2B5EF4-FFF2-40B4-BE49-F238E27FC236}">
-                <a16:creationId xmlns:a16="http://schemas.microsoft.com/office/drawing/2014/main" id="{B92945C9-D043-4A1F-BC8A-7A0428356C38}"/>
-              </a:ext>
-            </a:extLst>
-          </p:cNvPr>
-          <p:cNvSpPr/>
-          <p:nvPr/>
-        </p:nvSpPr>
-        <p:spPr>
           <a:xfrm>
-            <a:off x="2857627" y="5392085"/>
-            <a:ext cx="6239708" cy="1237316"/>
+            <a:off x="10109097" y="2528708"/>
+            <a:ext cx="1896975" cy="1428749"/>
           </a:xfrm>
           <a:prstGeom prst="rect">
             <a:avLst/>
@@ -8128,13 +8137,13 @@
           <a:p>
             <a:pPr algn="ctr"/>
             <a:r>
-              <a:rPr kumimoji="1" lang="ja-JP" altLang="en-US" sz="2400" dirty="0">
+              <a:rPr lang="ja-JP" altLang="en-US" sz="3200" dirty="0">
                 <a:latin typeface="メイリオ" panose="020B0604030504040204" pitchFamily="50" charset="-128"/>
                 <a:ea typeface="メイリオ" panose="020B0604030504040204" pitchFamily="50" charset="-128"/>
               </a:rPr>
-              <a:t>スコアが足りない場合</a:t>
-            </a:r>
-            <a:endParaRPr kumimoji="1" lang="en-US" altLang="ja-JP" sz="2400" dirty="0">
+              <a:t>完成で</a:t>
+            </a:r>
+            <a:endParaRPr lang="en-US" altLang="ja-JP" sz="3200" dirty="0">
               <a:latin typeface="メイリオ" panose="020B0604030504040204" pitchFamily="50" charset="-128"/>
               <a:ea typeface="メイリオ" panose="020B0604030504040204" pitchFamily="50" charset="-128"/>
             </a:endParaRPr>
@@ -8142,13 +8151,184 @@
           <a:p>
             <a:pPr algn="ctr"/>
             <a:r>
-              <a:rPr lang="ja-JP" altLang="en-US" sz="2400" dirty="0">
+              <a:rPr lang="ja-JP" altLang="en-US" sz="3200" dirty="0">
                 <a:latin typeface="メイリオ" panose="020B0604030504040204" pitchFamily="50" charset="-128"/>
                 <a:ea typeface="メイリオ" panose="020B0604030504040204" pitchFamily="50" charset="-128"/>
               </a:rPr>
-              <a:t>最初から</a:t>
-            </a:r>
-            <a:endParaRPr kumimoji="1" lang="ja-JP" altLang="en-US" sz="2400" dirty="0">
+              <a:t>クリア</a:t>
+            </a:r>
+            <a:endParaRPr lang="en-US" altLang="ja-JP" sz="3200" dirty="0">
+              <a:latin typeface="メイリオ" panose="020B0604030504040204" pitchFamily="50" charset="-128"/>
+              <a:ea typeface="メイリオ" panose="020B0604030504040204" pitchFamily="50" charset="-128"/>
+            </a:endParaRPr>
+          </a:p>
+        </p:txBody>
+      </p:sp>
+      <p:sp>
+        <p:nvSpPr>
+          <p:cNvPr id="26" name="矢印: 右 25">
+            <a:extLst>
+              <a:ext uri="{FF2B5EF4-FFF2-40B4-BE49-F238E27FC236}">
+                <a16:creationId xmlns:a16="http://schemas.microsoft.com/office/drawing/2014/main" id="{EC408C00-334B-48E6-BDB7-C0B273946351}"/>
+              </a:ext>
+            </a:extLst>
+          </p:cNvPr>
+          <p:cNvSpPr/>
+          <p:nvPr/>
+        </p:nvSpPr>
+        <p:spPr>
+          <a:xfrm rot="16200000">
+            <a:off x="71822" y="4406461"/>
+            <a:ext cx="1382638" cy="484632"/>
+          </a:xfrm>
+          <a:prstGeom prst="rightArrow">
+            <a:avLst/>
+          </a:prstGeom>
+          <a:solidFill>
+            <a:srgbClr val="FF0000"/>
+          </a:solidFill>
+        </p:spPr>
+        <p:style>
+          <a:lnRef idx="2">
+            <a:schemeClr val="dk1">
+              <a:shade val="50000"/>
+            </a:schemeClr>
+          </a:lnRef>
+          <a:fillRef idx="1">
+            <a:schemeClr val="dk1"/>
+          </a:fillRef>
+          <a:effectRef idx="0">
+            <a:schemeClr val="dk1"/>
+          </a:effectRef>
+          <a:fontRef idx="minor">
+            <a:schemeClr val="lt1"/>
+          </a:fontRef>
+        </p:style>
+        <p:txBody>
+          <a:bodyPr rtlCol="0" anchor="ctr"/>
+          <a:lstStyle/>
+          <a:p>
+            <a:pPr algn="ctr"/>
+            <a:endParaRPr kumimoji="1" lang="ja-JP" altLang="en-US" dirty="0"/>
+          </a:p>
+        </p:txBody>
+      </p:sp>
+      <p:sp>
+        <p:nvSpPr>
+          <p:cNvPr id="27" name="矢印: 右 26">
+            <a:extLst>
+              <a:ext uri="{FF2B5EF4-FFF2-40B4-BE49-F238E27FC236}">
+                <a16:creationId xmlns:a16="http://schemas.microsoft.com/office/drawing/2014/main" id="{94ABE33A-3EDD-4FFD-98E0-1A17C9858C07}"/>
+              </a:ext>
+            </a:extLst>
+          </p:cNvPr>
+          <p:cNvSpPr/>
+          <p:nvPr/>
+        </p:nvSpPr>
+        <p:spPr>
+          <a:xfrm rot="16200000">
+            <a:off x="10821715" y="2032278"/>
+            <a:ext cx="498147" cy="484632"/>
+          </a:xfrm>
+          <a:prstGeom prst="rightArrow">
+            <a:avLst/>
+          </a:prstGeom>
+          <a:solidFill>
+            <a:srgbClr val="FF0000"/>
+          </a:solidFill>
+        </p:spPr>
+        <p:style>
+          <a:lnRef idx="2">
+            <a:schemeClr val="dk1">
+              <a:shade val="50000"/>
+            </a:schemeClr>
+          </a:lnRef>
+          <a:fillRef idx="1">
+            <a:schemeClr val="dk1"/>
+          </a:fillRef>
+          <a:effectRef idx="0">
+            <a:schemeClr val="dk1"/>
+          </a:effectRef>
+          <a:fontRef idx="minor">
+            <a:schemeClr val="lt1"/>
+          </a:fontRef>
+        </p:style>
+        <p:txBody>
+          <a:bodyPr rtlCol="0" anchor="ctr"/>
+          <a:lstStyle/>
+          <a:p>
+            <a:pPr algn="ctr"/>
+            <a:endParaRPr kumimoji="1" lang="ja-JP" altLang="en-US" dirty="0"/>
+          </a:p>
+        </p:txBody>
+      </p:sp>
+      <p:sp>
+        <p:nvSpPr>
+          <p:cNvPr id="28" name="正方形/長方形 27">
+            <a:extLst>
+              <a:ext uri="{FF2B5EF4-FFF2-40B4-BE49-F238E27FC236}">
+                <a16:creationId xmlns:a16="http://schemas.microsoft.com/office/drawing/2014/main" id="{A4379FB6-A154-4892-8EFC-85261F9DFC79}"/>
+              </a:ext>
+            </a:extLst>
+          </p:cNvPr>
+          <p:cNvSpPr/>
+          <p:nvPr/>
+        </p:nvSpPr>
+        <p:spPr>
+          <a:xfrm>
+            <a:off x="9756649" y="591731"/>
+            <a:ext cx="2236184" cy="1428749"/>
+          </a:xfrm>
+          <a:prstGeom prst="rect">
+            <a:avLst/>
+          </a:prstGeom>
+          <a:ln>
+            <a:solidFill>
+              <a:schemeClr val="tx1"/>
+            </a:solidFill>
+          </a:ln>
+        </p:spPr>
+        <p:style>
+          <a:lnRef idx="2">
+            <a:schemeClr val="accent6"/>
+          </a:lnRef>
+          <a:fillRef idx="1">
+            <a:schemeClr val="lt1"/>
+          </a:fillRef>
+          <a:effectRef idx="0">
+            <a:schemeClr val="accent6"/>
+          </a:effectRef>
+          <a:fontRef idx="minor">
+            <a:schemeClr val="dk1"/>
+          </a:fontRef>
+        </p:style>
+        <p:txBody>
+          <a:bodyPr rtlCol="0" anchor="ctr"/>
+          <a:lstStyle/>
+          <a:p>
+            <a:pPr algn="ctr"/>
+            <a:r>
+              <a:rPr lang="ja-JP" altLang="en-US" sz="3200" dirty="0">
+                <a:latin typeface="メイリオ" panose="020B0604030504040204" pitchFamily="50" charset="-128"/>
+                <a:ea typeface="メイリオ" panose="020B0604030504040204" pitchFamily="50" charset="-128"/>
+              </a:rPr>
+              <a:t>次の</a:t>
+            </a:r>
+            <a:endParaRPr lang="en-US" altLang="ja-JP" sz="3200" dirty="0">
+              <a:latin typeface="メイリオ" panose="020B0604030504040204" pitchFamily="50" charset="-128"/>
+              <a:ea typeface="メイリオ" panose="020B0604030504040204" pitchFamily="50" charset="-128"/>
+            </a:endParaRPr>
+          </a:p>
+          <a:p>
+            <a:pPr algn="ctr"/>
+            <a:r>
+              <a:rPr lang="ja-JP" altLang="en-US" sz="3200" dirty="0">
+                <a:latin typeface="メイリオ" panose="020B0604030504040204" pitchFamily="50" charset="-128"/>
+                <a:ea typeface="メイリオ" panose="020B0604030504040204" pitchFamily="50" charset="-128"/>
+              </a:rPr>
+              <a:t>ステージに</a:t>
+            </a:r>
+            <a:endParaRPr lang="en-US" altLang="ja-JP" sz="3200" dirty="0">
               <a:latin typeface="メイリオ" panose="020B0604030504040204" pitchFamily="50" charset="-128"/>
               <a:ea typeface="メイリオ" panose="020B0604030504040204" pitchFamily="50" charset="-128"/>
             </a:endParaRPr>
@@ -8163,7 +8343,7 @@
 </p:sld>
 </file>
 
-<file path=ppt/slides/slide8.xml><?xml version="1.0" encoding="utf-8"?>
+<file path=ppt/slides/slide7.xml><?xml version="1.0" encoding="utf-8"?>
 <p:sld xmlns:a="http://schemas.openxmlformats.org/drawingml/2006/main" xmlns:r="http://schemas.openxmlformats.org/officeDocument/2006/relationships" xmlns:p="http://schemas.openxmlformats.org/presentationml/2006/main">
   <p:cSld>
     <p:spTree>
@@ -8331,6 +8511,479 @@
 </p:sld>
 </file>
 
+<file path=ppt/slides/slide8.xml><?xml version="1.0" encoding="utf-8"?>
+<p:sld xmlns:a="http://schemas.openxmlformats.org/drawingml/2006/main" xmlns:r="http://schemas.openxmlformats.org/officeDocument/2006/relationships" xmlns:p="http://schemas.openxmlformats.org/presentationml/2006/main">
+  <p:cSld>
+    <p:spTree>
+      <p:nvGrpSpPr>
+        <p:cNvPr id="1" name=""/>
+        <p:cNvGrpSpPr/>
+        <p:nvPr/>
+      </p:nvGrpSpPr>
+      <p:grpSpPr>
+        <a:xfrm>
+          <a:off x="0" y="0"/>
+          <a:ext cx="0" cy="0"/>
+          <a:chOff x="0" y="0"/>
+          <a:chExt cx="0" cy="0"/>
+        </a:xfrm>
+      </p:grpSpPr>
+      <p:sp>
+        <p:nvSpPr>
+          <p:cNvPr id="3" name="正方形/長方形 2">
+            <a:extLst>
+              <a:ext uri="{FF2B5EF4-FFF2-40B4-BE49-F238E27FC236}">
+                <a16:creationId xmlns:a16="http://schemas.microsoft.com/office/drawing/2014/main" id="{8EE8F76E-6904-409A-AC76-C9CCF9F1E885}"/>
+              </a:ext>
+            </a:extLst>
+          </p:cNvPr>
+          <p:cNvSpPr/>
+          <p:nvPr/>
+        </p:nvSpPr>
+        <p:spPr>
+          <a:xfrm>
+            <a:off x="184014" y="453350"/>
+            <a:ext cx="2860743" cy="914400"/>
+          </a:xfrm>
+          <a:prstGeom prst="rect">
+            <a:avLst/>
+          </a:prstGeom>
+          <a:ln>
+            <a:noFill/>
+          </a:ln>
+        </p:spPr>
+        <p:style>
+          <a:lnRef idx="2">
+            <a:schemeClr val="accent6"/>
+          </a:lnRef>
+          <a:fillRef idx="1">
+            <a:schemeClr val="lt1"/>
+          </a:fillRef>
+          <a:effectRef idx="0">
+            <a:schemeClr val="accent6"/>
+          </a:effectRef>
+          <a:fontRef idx="minor">
+            <a:schemeClr val="dk1"/>
+          </a:fontRef>
+        </p:style>
+        <p:txBody>
+          <a:bodyPr rtlCol="0" anchor="ctr"/>
+          <a:lstStyle/>
+          <a:p>
+            <a:pPr algn="ctr"/>
+            <a:r>
+              <a:rPr kumimoji="1" lang="ja-JP" altLang="en-US" sz="4800" dirty="0">
+                <a:latin typeface="メイリオ" panose="020B0604030504040204" pitchFamily="50" charset="-128"/>
+                <a:ea typeface="メイリオ" panose="020B0604030504040204" pitchFamily="50" charset="-128"/>
+              </a:rPr>
+              <a:t>操作方法</a:t>
+            </a:r>
+          </a:p>
+        </p:txBody>
+      </p:sp>
+      <p:sp>
+        <p:nvSpPr>
+          <p:cNvPr id="2" name="正方形/長方形 1">
+            <a:extLst>
+              <a:ext uri="{FF2B5EF4-FFF2-40B4-BE49-F238E27FC236}">
+                <a16:creationId xmlns:a16="http://schemas.microsoft.com/office/drawing/2014/main" id="{528E3EEC-ED19-44E5-A90C-4BE60A2D4ABD}"/>
+              </a:ext>
+            </a:extLst>
+          </p:cNvPr>
+          <p:cNvSpPr/>
+          <p:nvPr/>
+        </p:nvSpPr>
+        <p:spPr>
+          <a:xfrm>
+            <a:off x="6096000" y="1721718"/>
+            <a:ext cx="2860743" cy="1017631"/>
+          </a:xfrm>
+          <a:prstGeom prst="rect">
+            <a:avLst/>
+          </a:prstGeom>
+        </p:spPr>
+        <p:style>
+          <a:lnRef idx="2">
+            <a:schemeClr val="dk1"/>
+          </a:lnRef>
+          <a:fillRef idx="1">
+            <a:schemeClr val="lt1"/>
+          </a:fillRef>
+          <a:effectRef idx="0">
+            <a:schemeClr val="dk1"/>
+          </a:effectRef>
+          <a:fontRef idx="minor">
+            <a:schemeClr val="dk1"/>
+          </a:fontRef>
+        </p:style>
+        <p:txBody>
+          <a:bodyPr rtlCol="0" anchor="ctr"/>
+          <a:lstStyle/>
+          <a:p>
+            <a:pPr algn="ctr"/>
+            <a:r>
+              <a:rPr kumimoji="1" lang="ja-JP" altLang="en-US" sz="3200" dirty="0">
+                <a:latin typeface="メイリオ" panose="020B0604030504040204" pitchFamily="50" charset="-128"/>
+                <a:ea typeface="メイリオ" panose="020B0604030504040204" pitchFamily="50" charset="-128"/>
+              </a:rPr>
+              <a:t>マウス</a:t>
+            </a:r>
+            <a:endParaRPr kumimoji="1" lang="en-US" altLang="ja-JP" sz="3200" dirty="0">
+              <a:latin typeface="メイリオ" panose="020B0604030504040204" pitchFamily="50" charset="-128"/>
+              <a:ea typeface="メイリオ" panose="020B0604030504040204" pitchFamily="50" charset="-128"/>
+            </a:endParaRPr>
+          </a:p>
+          <a:p>
+            <a:pPr algn="ctr"/>
+            <a:r>
+              <a:rPr lang="ja-JP" altLang="en-US" sz="3200" dirty="0">
+                <a:latin typeface="メイリオ" panose="020B0604030504040204" pitchFamily="50" charset="-128"/>
+                <a:ea typeface="メイリオ" panose="020B0604030504040204" pitchFamily="50" charset="-128"/>
+              </a:rPr>
+              <a:t>指を操作</a:t>
+            </a:r>
+            <a:endParaRPr kumimoji="1" lang="ja-JP" altLang="en-US" sz="3200" dirty="0">
+              <a:latin typeface="メイリオ" panose="020B0604030504040204" pitchFamily="50" charset="-128"/>
+              <a:ea typeface="メイリオ" panose="020B0604030504040204" pitchFamily="50" charset="-128"/>
+            </a:endParaRPr>
+          </a:p>
+        </p:txBody>
+      </p:sp>
+      <p:sp>
+        <p:nvSpPr>
+          <p:cNvPr id="7" name="正方形/長方形 6">
+            <a:extLst>
+              <a:ext uri="{FF2B5EF4-FFF2-40B4-BE49-F238E27FC236}">
+                <a16:creationId xmlns:a16="http://schemas.microsoft.com/office/drawing/2014/main" id="{29C8E7E2-CABB-411F-8549-701A17FEE2C5}"/>
+              </a:ext>
+            </a:extLst>
+          </p:cNvPr>
+          <p:cNvSpPr/>
+          <p:nvPr/>
+        </p:nvSpPr>
+        <p:spPr>
+          <a:xfrm>
+            <a:off x="464305" y="1721719"/>
+            <a:ext cx="2952555" cy="1120862"/>
+          </a:xfrm>
+          <a:prstGeom prst="rect">
+            <a:avLst/>
+          </a:prstGeom>
+        </p:spPr>
+        <p:style>
+          <a:lnRef idx="2">
+            <a:schemeClr val="dk1"/>
+          </a:lnRef>
+          <a:fillRef idx="1">
+            <a:schemeClr val="lt1"/>
+          </a:fillRef>
+          <a:effectRef idx="0">
+            <a:schemeClr val="dk1"/>
+          </a:effectRef>
+          <a:fontRef idx="minor">
+            <a:schemeClr val="dk1"/>
+          </a:fontRef>
+        </p:style>
+        <p:txBody>
+          <a:bodyPr rtlCol="0" anchor="ctr"/>
+          <a:lstStyle/>
+          <a:p>
+            <a:pPr algn="ctr"/>
+            <a:r>
+              <a:rPr lang="ja-JP" altLang="en-US" sz="3200" dirty="0">
+                <a:latin typeface="メイリオ" panose="020B0604030504040204" pitchFamily="50" charset="-128"/>
+                <a:ea typeface="メイリオ" panose="020B0604030504040204" pitchFamily="50" charset="-128"/>
+              </a:rPr>
+              <a:t>キーボード</a:t>
+            </a:r>
+            <a:endParaRPr lang="en-US" altLang="ja-JP" sz="3200" dirty="0">
+              <a:latin typeface="メイリオ" panose="020B0604030504040204" pitchFamily="50" charset="-128"/>
+              <a:ea typeface="メイリオ" panose="020B0604030504040204" pitchFamily="50" charset="-128"/>
+            </a:endParaRPr>
+          </a:p>
+          <a:p>
+            <a:pPr algn="ctr"/>
+            <a:r>
+              <a:rPr kumimoji="1" lang="ja-JP" altLang="en-US" sz="3200" dirty="0">
+                <a:latin typeface="メイリオ" panose="020B0604030504040204" pitchFamily="50" charset="-128"/>
+                <a:ea typeface="メイリオ" panose="020B0604030504040204" pitchFamily="50" charset="-128"/>
+              </a:rPr>
+              <a:t>雨粒を操作</a:t>
+            </a:r>
+          </a:p>
+        </p:txBody>
+      </p:sp>
+      <p:sp>
+        <p:nvSpPr>
+          <p:cNvPr id="5" name="正方形/長方形 4">
+            <a:extLst>
+              <a:ext uri="{FF2B5EF4-FFF2-40B4-BE49-F238E27FC236}">
+                <a16:creationId xmlns:a16="http://schemas.microsoft.com/office/drawing/2014/main" id="{5F738E8E-6FD1-4FFF-9E24-5B37EDA81C3D}"/>
+              </a:ext>
+            </a:extLst>
+          </p:cNvPr>
+          <p:cNvSpPr/>
+          <p:nvPr/>
+        </p:nvSpPr>
+        <p:spPr>
+          <a:xfrm>
+            <a:off x="400297" y="4015420"/>
+            <a:ext cx="4636008" cy="1239734"/>
+          </a:xfrm>
+          <a:prstGeom prst="rect">
+            <a:avLst/>
+          </a:prstGeom>
+          <a:solidFill>
+            <a:schemeClr val="bg1"/>
+          </a:solidFill>
+        </p:spPr>
+        <p:style>
+          <a:lnRef idx="2">
+            <a:schemeClr val="accent1">
+              <a:shade val="50000"/>
+            </a:schemeClr>
+          </a:lnRef>
+          <a:fillRef idx="1">
+            <a:schemeClr val="accent1"/>
+          </a:fillRef>
+          <a:effectRef idx="0">
+            <a:schemeClr val="accent1"/>
+          </a:effectRef>
+          <a:fontRef idx="minor">
+            <a:schemeClr val="lt1"/>
+          </a:fontRef>
+        </p:style>
+        <p:txBody>
+          <a:bodyPr rtlCol="0" anchor="ctr"/>
+          <a:lstStyle/>
+          <a:p>
+            <a:pPr algn="ctr"/>
+            <a:endParaRPr lang="en-US" altLang="ja-JP" dirty="0">
+              <a:solidFill>
+                <a:schemeClr val="tx1"/>
+              </a:solidFill>
+            </a:endParaRPr>
+          </a:p>
+          <a:p>
+            <a:pPr algn="ctr"/>
+            <a:r>
+              <a:rPr lang="ja-JP" altLang="en-US" sz="3200" dirty="0">
+                <a:solidFill>
+                  <a:schemeClr val="tx1"/>
+                </a:solidFill>
+                <a:latin typeface="メイリオ" panose="020B0604030504040204" pitchFamily="50" charset="-128"/>
+                <a:ea typeface="メイリオ" panose="020B0604030504040204" pitchFamily="50" charset="-128"/>
+              </a:rPr>
+              <a:t>↑　↓　←　→</a:t>
+            </a:r>
+            <a:endParaRPr lang="en-US" altLang="ja-JP" sz="3200" dirty="0">
+              <a:solidFill>
+                <a:schemeClr val="tx1"/>
+              </a:solidFill>
+              <a:latin typeface="メイリオ" panose="020B0604030504040204" pitchFamily="50" charset="-128"/>
+              <a:ea typeface="メイリオ" panose="020B0604030504040204" pitchFamily="50" charset="-128"/>
+            </a:endParaRPr>
+          </a:p>
+          <a:p>
+            <a:pPr algn="ctr"/>
+            <a:r>
+              <a:rPr kumimoji="1" lang="ja-JP" altLang="en-US" sz="3200" dirty="0">
+                <a:solidFill>
+                  <a:schemeClr val="tx1"/>
+                </a:solidFill>
+                <a:latin typeface="メイリオ" panose="020B0604030504040204" pitchFamily="50" charset="-128"/>
+                <a:ea typeface="メイリオ" panose="020B0604030504040204" pitchFamily="50" charset="-128"/>
+              </a:rPr>
+              <a:t>スペースで止める</a:t>
+            </a:r>
+            <a:endParaRPr kumimoji="1" lang="en-US" altLang="ja-JP" sz="3200" dirty="0">
+              <a:solidFill>
+                <a:schemeClr val="tx1"/>
+              </a:solidFill>
+              <a:latin typeface="メイリオ" panose="020B0604030504040204" pitchFamily="50" charset="-128"/>
+              <a:ea typeface="メイリオ" panose="020B0604030504040204" pitchFamily="50" charset="-128"/>
+            </a:endParaRPr>
+          </a:p>
+        </p:txBody>
+      </p:sp>
+      <p:pic>
+        <p:nvPicPr>
+          <p:cNvPr id="9" name="図 8">
+            <a:extLst>
+              <a:ext uri="{FF2B5EF4-FFF2-40B4-BE49-F238E27FC236}">
+                <a16:creationId xmlns:a16="http://schemas.microsoft.com/office/drawing/2014/main" id="{05B52EF4-83E1-45B0-AA9E-EBBCD65FBCE7}"/>
+              </a:ext>
+            </a:extLst>
+          </p:cNvPr>
+          <p:cNvPicPr>
+            <a:picLocks noChangeAspect="1"/>
+          </p:cNvPicPr>
+          <p:nvPr/>
+        </p:nvPicPr>
+        <p:blipFill>
+          <a:blip r:embed="rId3"/>
+          <a:stretch>
+            <a:fillRect/>
+          </a:stretch>
+        </p:blipFill>
+        <p:spPr>
+          <a:xfrm>
+            <a:off x="3663999" y="1194224"/>
+            <a:ext cx="1102568" cy="1648357"/>
+          </a:xfrm>
+          <a:prstGeom prst="rect">
+            <a:avLst/>
+          </a:prstGeom>
+        </p:spPr>
+      </p:pic>
+      <p:pic>
+        <p:nvPicPr>
+          <p:cNvPr id="12" name="図 11">
+            <a:extLst>
+              <a:ext uri="{FF2B5EF4-FFF2-40B4-BE49-F238E27FC236}">
+                <a16:creationId xmlns:a16="http://schemas.microsoft.com/office/drawing/2014/main" id="{77A588C8-9C41-42FC-AC42-0CA488F60093}"/>
+              </a:ext>
+            </a:extLst>
+          </p:cNvPr>
+          <p:cNvPicPr>
+            <a:picLocks noChangeAspect="1"/>
+          </p:cNvPicPr>
+          <p:nvPr/>
+        </p:nvPicPr>
+        <p:blipFill>
+          <a:blip r:embed="rId4"/>
+          <a:stretch>
+            <a:fillRect/>
+          </a:stretch>
+        </p:blipFill>
+        <p:spPr>
+          <a:xfrm>
+            <a:off x="8956743" y="1435111"/>
+            <a:ext cx="2509662" cy="1828590"/>
+          </a:xfrm>
+          <a:prstGeom prst="rect">
+            <a:avLst/>
+          </a:prstGeom>
+        </p:spPr>
+      </p:pic>
+      <p:sp>
+        <p:nvSpPr>
+          <p:cNvPr id="10" name="正方形/長方形 9">
+            <a:extLst>
+              <a:ext uri="{FF2B5EF4-FFF2-40B4-BE49-F238E27FC236}">
+                <a16:creationId xmlns:a16="http://schemas.microsoft.com/office/drawing/2014/main" id="{CC48DAE9-6E2F-4AB5-A805-0F43BF2F2202}"/>
+              </a:ext>
+            </a:extLst>
+          </p:cNvPr>
+          <p:cNvSpPr/>
+          <p:nvPr/>
+        </p:nvSpPr>
+        <p:spPr>
+          <a:xfrm>
+            <a:off x="6096000" y="4015420"/>
+            <a:ext cx="5251704" cy="2293940"/>
+          </a:xfrm>
+          <a:prstGeom prst="rect">
+            <a:avLst/>
+          </a:prstGeom>
+          <a:solidFill>
+            <a:schemeClr val="bg1"/>
+          </a:solidFill>
+        </p:spPr>
+        <p:style>
+          <a:lnRef idx="2">
+            <a:schemeClr val="accent1">
+              <a:shade val="50000"/>
+            </a:schemeClr>
+          </a:lnRef>
+          <a:fillRef idx="1">
+            <a:schemeClr val="accent1"/>
+          </a:fillRef>
+          <a:effectRef idx="0">
+            <a:schemeClr val="accent1"/>
+          </a:effectRef>
+          <a:fontRef idx="minor">
+            <a:schemeClr val="lt1"/>
+          </a:fontRef>
+        </p:style>
+        <p:txBody>
+          <a:bodyPr rtlCol="0" anchor="ctr"/>
+          <a:lstStyle/>
+          <a:p>
+            <a:r>
+              <a:rPr lang="ja-JP" altLang="en-US" sz="3200" dirty="0">
+                <a:solidFill>
+                  <a:schemeClr val="tx1"/>
+                </a:solidFill>
+                <a:latin typeface="メイリオ" panose="020B0604030504040204" pitchFamily="50" charset="-128"/>
+                <a:ea typeface="メイリオ" panose="020B0604030504040204" pitchFamily="50" charset="-128"/>
+              </a:rPr>
+              <a:t>右クリックで雨粒を選択</a:t>
+            </a:r>
+            <a:endParaRPr lang="en-US" altLang="ja-JP" sz="3200" dirty="0">
+              <a:solidFill>
+                <a:schemeClr val="tx1"/>
+              </a:solidFill>
+              <a:latin typeface="メイリオ" panose="020B0604030504040204" pitchFamily="50" charset="-128"/>
+              <a:ea typeface="メイリオ" panose="020B0604030504040204" pitchFamily="50" charset="-128"/>
+            </a:endParaRPr>
+          </a:p>
+          <a:p>
+            <a:r>
+              <a:rPr lang="ja-JP" altLang="en-US" sz="3200" dirty="0">
+                <a:solidFill>
+                  <a:schemeClr val="tx1"/>
+                </a:solidFill>
+                <a:latin typeface="メイリオ" panose="020B0604030504040204" pitchFamily="50" charset="-128"/>
+                <a:ea typeface="メイリオ" panose="020B0604030504040204" pitchFamily="50" charset="-128"/>
+              </a:rPr>
+              <a:t>次に繋ぎたい雨粒を</a:t>
+            </a:r>
+            <a:endParaRPr lang="en-US" altLang="ja-JP" sz="3200" dirty="0">
+              <a:solidFill>
+                <a:schemeClr val="tx1"/>
+              </a:solidFill>
+              <a:latin typeface="メイリオ" panose="020B0604030504040204" pitchFamily="50" charset="-128"/>
+              <a:ea typeface="メイリオ" panose="020B0604030504040204" pitchFamily="50" charset="-128"/>
+            </a:endParaRPr>
+          </a:p>
+          <a:p>
+            <a:r>
+              <a:rPr lang="ja-JP" altLang="en-US" sz="3200" dirty="0">
+                <a:solidFill>
+                  <a:schemeClr val="tx1"/>
+                </a:solidFill>
+                <a:latin typeface="メイリオ" panose="020B0604030504040204" pitchFamily="50" charset="-128"/>
+                <a:ea typeface="メイリオ" panose="020B0604030504040204" pitchFamily="50" charset="-128"/>
+              </a:rPr>
+              <a:t>右クリック</a:t>
+            </a:r>
+            <a:endParaRPr lang="en-US" altLang="ja-JP" sz="3200" dirty="0">
+              <a:solidFill>
+                <a:schemeClr val="tx1"/>
+              </a:solidFill>
+              <a:latin typeface="メイリオ" panose="020B0604030504040204" pitchFamily="50" charset="-128"/>
+              <a:ea typeface="メイリオ" panose="020B0604030504040204" pitchFamily="50" charset="-128"/>
+            </a:endParaRPr>
+          </a:p>
+          <a:p>
+            <a:pPr algn="ctr"/>
+            <a:endParaRPr lang="en-US" altLang="ja-JP" dirty="0">
+              <a:solidFill>
+                <a:schemeClr val="tx1"/>
+              </a:solidFill>
+            </a:endParaRPr>
+          </a:p>
+        </p:txBody>
+      </p:sp>
+    </p:spTree>
+  </p:cSld>
+  <p:clrMapOvr>
+    <a:masterClrMapping/>
+  </p:clrMapOvr>
+</p:sld>
+</file>
+
 <file path=ppt/slides/slide9.xml><?xml version="1.0" encoding="utf-8"?>
 <p:sld xmlns:a="http://schemas.openxmlformats.org/drawingml/2006/main" xmlns:r="http://schemas.openxmlformats.org/officeDocument/2006/relationships" xmlns:p="http://schemas.openxmlformats.org/presentationml/2006/main">
   <p:cSld>
@@ -8350,10 +9003,10 @@
       </p:grpSpPr>
       <p:sp>
         <p:nvSpPr>
-          <p:cNvPr id="2" name="正方形/長方形 1">
-            <a:extLst>
-              <a:ext uri="{FF2B5EF4-FFF2-40B4-BE49-F238E27FC236}">
-                <a16:creationId xmlns:a16="http://schemas.microsoft.com/office/drawing/2014/main" id="{9F7CA3D4-E67C-4023-B580-346E725E68BF}"/>
+          <p:cNvPr id="4" name="正方形/長方形 3">
+            <a:extLst>
+              <a:ext uri="{FF2B5EF4-FFF2-40B4-BE49-F238E27FC236}">
+                <a16:creationId xmlns:a16="http://schemas.microsoft.com/office/drawing/2014/main" id="{6840A768-F67B-4920-B60C-4E4E518CFD24}"/>
               </a:ext>
             </a:extLst>
           </p:cNvPr>
@@ -8362,27 +9015,168 @@
         </p:nvSpPr>
         <p:spPr>
           <a:xfrm>
-            <a:off x="2569464" y="457201"/>
-            <a:ext cx="7863840" cy="4325112"/>
+            <a:off x="184014" y="188174"/>
+            <a:ext cx="5911986" cy="2854054"/>
+          </a:xfrm>
+          <a:prstGeom prst="rect">
+            <a:avLst/>
+          </a:prstGeom>
+          <a:ln>
+            <a:noFill/>
+          </a:ln>
+        </p:spPr>
+        <p:style>
+          <a:lnRef idx="2">
+            <a:schemeClr val="accent6"/>
+          </a:lnRef>
+          <a:fillRef idx="1">
+            <a:schemeClr val="lt1"/>
+          </a:fillRef>
+          <a:effectRef idx="0">
+            <a:schemeClr val="accent6"/>
+          </a:effectRef>
+          <a:fontRef idx="minor">
+            <a:schemeClr val="dk1"/>
+          </a:fontRef>
+        </p:style>
+        <p:txBody>
+          <a:bodyPr rtlCol="0" anchor="ctr"/>
+          <a:lstStyle/>
+          <a:p>
+            <a:pPr algn="ctr"/>
+            <a:r>
+              <a:rPr lang="ja-JP" altLang="en-US" sz="4800" dirty="0">
+                <a:latin typeface="メイリオ" panose="020B0604030504040204" pitchFamily="50" charset="-128"/>
+                <a:ea typeface="メイリオ" panose="020B0604030504040204" pitchFamily="50" charset="-128"/>
+              </a:rPr>
+              <a:t>既存のゲームとの</a:t>
+            </a:r>
+            <a:endParaRPr lang="en-US" altLang="ja-JP" sz="4800" dirty="0">
+              <a:latin typeface="メイリオ" panose="020B0604030504040204" pitchFamily="50" charset="-128"/>
+              <a:ea typeface="メイリオ" panose="020B0604030504040204" pitchFamily="50" charset="-128"/>
+            </a:endParaRPr>
+          </a:p>
+          <a:p>
+            <a:pPr algn="ctr"/>
+            <a:r>
+              <a:rPr lang="ja-JP" altLang="en-US" sz="4800" dirty="0">
+                <a:latin typeface="メイリオ" panose="020B0604030504040204" pitchFamily="50" charset="-128"/>
+                <a:ea typeface="メイリオ" panose="020B0604030504040204" pitchFamily="50" charset="-128"/>
+              </a:rPr>
+              <a:t>差別点</a:t>
+            </a:r>
+            <a:endParaRPr lang="en-US" altLang="ja-JP" sz="4800" dirty="0">
+              <a:latin typeface="メイリオ" panose="020B0604030504040204" pitchFamily="50" charset="-128"/>
+              <a:ea typeface="メイリオ" panose="020B0604030504040204" pitchFamily="50" charset="-128"/>
+            </a:endParaRPr>
+          </a:p>
+          <a:p>
+            <a:pPr algn="ctr"/>
+            <a:endParaRPr kumimoji="1" lang="ja-JP" altLang="en-US" sz="4800" dirty="0">
+              <a:latin typeface="メイリオ" panose="020B0604030504040204" pitchFamily="50" charset="-128"/>
+              <a:ea typeface="メイリオ" panose="020B0604030504040204" pitchFamily="50" charset="-128"/>
+            </a:endParaRPr>
+          </a:p>
+        </p:txBody>
+      </p:sp>
+      <p:pic>
+        <p:nvPicPr>
+          <p:cNvPr id="5" name="図 4">
+            <a:extLst>
+              <a:ext uri="{FF2B5EF4-FFF2-40B4-BE49-F238E27FC236}">
+                <a16:creationId xmlns:a16="http://schemas.microsoft.com/office/drawing/2014/main" id="{3258D720-4F32-47AB-A04F-C0226CFDB304}"/>
+              </a:ext>
+            </a:extLst>
+          </p:cNvPr>
+          <p:cNvPicPr>
+            <a:picLocks noChangeAspect="1"/>
+          </p:cNvPicPr>
+          <p:nvPr/>
+        </p:nvPicPr>
+        <p:blipFill>
+          <a:blip r:embed="rId2"/>
+          <a:stretch>
+            <a:fillRect/>
+          </a:stretch>
+        </p:blipFill>
+        <p:spPr>
+          <a:xfrm>
+            <a:off x="5911986" y="2348834"/>
+            <a:ext cx="6280014" cy="3981450"/>
           </a:xfrm>
           <a:prstGeom prst="rect">
             <a:avLst/>
           </a:prstGeom>
         </p:spPr>
+      </p:pic>
+      <p:pic>
+        <p:nvPicPr>
+          <p:cNvPr id="8" name="図 7">
+            <a:extLst>
+              <a:ext uri="{FF2B5EF4-FFF2-40B4-BE49-F238E27FC236}">
+                <a16:creationId xmlns:a16="http://schemas.microsoft.com/office/drawing/2014/main" id="{E15A6B13-698C-466F-8857-1D17DD41414E}"/>
+              </a:ext>
+            </a:extLst>
+          </p:cNvPr>
+          <p:cNvPicPr>
+            <a:picLocks noChangeAspect="1"/>
+          </p:cNvPicPr>
+          <p:nvPr/>
+        </p:nvPicPr>
+        <p:blipFill>
+          <a:blip r:embed="rId3"/>
+          <a:stretch>
+            <a:fillRect/>
+          </a:stretch>
+        </p:blipFill>
+        <p:spPr>
+          <a:xfrm>
+            <a:off x="0" y="2244059"/>
+            <a:ext cx="5911986" cy="4086225"/>
+          </a:xfrm>
+          <a:prstGeom prst="rect">
+            <a:avLst/>
+          </a:prstGeom>
+        </p:spPr>
+      </p:pic>
+      <p:sp>
+        <p:nvSpPr>
+          <p:cNvPr id="9" name="正方形/長方形 8">
+            <a:extLst>
+              <a:ext uri="{FF2B5EF4-FFF2-40B4-BE49-F238E27FC236}">
+                <a16:creationId xmlns:a16="http://schemas.microsoft.com/office/drawing/2014/main" id="{AE2D33BF-6DBF-49C0-BADC-46794B569439}"/>
+              </a:ext>
+            </a:extLst>
+          </p:cNvPr>
+          <p:cNvSpPr/>
+          <p:nvPr/>
+        </p:nvSpPr>
+        <p:spPr>
+          <a:xfrm>
+            <a:off x="5911986" y="804085"/>
+            <a:ext cx="4994531" cy="777828"/>
+          </a:xfrm>
+          <a:prstGeom prst="rect">
+            <a:avLst/>
+          </a:prstGeom>
+          <a:ln>
+            <a:solidFill>
+              <a:schemeClr val="bg1"/>
+            </a:solidFill>
+          </a:ln>
+        </p:spPr>
         <p:style>
           <a:lnRef idx="2">
-            <a:schemeClr val="accent1">
-              <a:shade val="50000"/>
-            </a:schemeClr>
+            <a:schemeClr val="dk1"/>
           </a:lnRef>
           <a:fillRef idx="1">
-            <a:schemeClr val="accent1"/>
+            <a:schemeClr val="lt1"/>
           </a:fillRef>
           <a:effectRef idx="0">
-            <a:schemeClr val="accent1"/>
+            <a:schemeClr val="dk1"/>
           </a:effectRef>
           <a:fontRef idx="minor">
-            <a:schemeClr val="lt1"/>
+            <a:schemeClr val="dk1"/>
           </a:fontRef>
         </p:style>
         <p:txBody>
@@ -8391,45 +9185,49 @@
           <a:p>
             <a:pPr algn="ctr"/>
             <a:r>
-              <a:rPr kumimoji="1" lang="ja-JP" altLang="en-US" dirty="0"/>
-              <a:t>雨粒をどうする　お題を簡単にするより</a:t>
-            </a:r>
-            <a:endParaRPr kumimoji="1" lang="en-US" altLang="ja-JP" dirty="0"/>
+              <a:rPr kumimoji="1" lang="ja-JP" altLang="en-US" sz="3600" dirty="0">
+                <a:solidFill>
+                  <a:srgbClr val="FF0000"/>
+                </a:solidFill>
+                <a:latin typeface="メイリオ" panose="020B0604030504040204" pitchFamily="50" charset="-128"/>
+                <a:ea typeface="メイリオ" panose="020B0604030504040204" pitchFamily="50" charset="-128"/>
+              </a:rPr>
+              <a:t>このゲームは</a:t>
+            </a:r>
+            <a:endParaRPr kumimoji="1" lang="en-US" altLang="ja-JP" sz="3600" dirty="0">
+              <a:solidFill>
+                <a:srgbClr val="FF0000"/>
+              </a:solidFill>
+              <a:latin typeface="メイリオ" panose="020B0604030504040204" pitchFamily="50" charset="-128"/>
+              <a:ea typeface="メイリオ" panose="020B0604030504040204" pitchFamily="50" charset="-128"/>
+            </a:endParaRPr>
           </a:p>
           <a:p>
             <a:pPr algn="ctr"/>
             <a:r>
-              <a:rPr lang="ja-JP" altLang="en-US" dirty="0"/>
-              <a:t>もともとのシステムを見ろ</a:t>
-            </a:r>
-            <a:endParaRPr lang="en-US" altLang="ja-JP" dirty="0"/>
-          </a:p>
-          <a:p>
-            <a:pPr algn="ctr"/>
-            <a:r>
-              <a:rPr kumimoji="1" lang="ja-JP" altLang="en-US" dirty="0"/>
-              <a:t>　</a:t>
-            </a:r>
-            <a:endParaRPr kumimoji="1" lang="en-US" altLang="ja-JP" dirty="0"/>
-          </a:p>
-          <a:p>
-            <a:pPr algn="ctr"/>
-            <a:r>
-              <a:rPr lang="ja-JP" altLang="en-US" dirty="0"/>
-              <a:t>頭で自分のゲームをプレイしてみろ</a:t>
-            </a:r>
-            <a:endParaRPr lang="en-US" altLang="ja-JP" dirty="0"/>
-          </a:p>
-          <a:p>
-            <a:pPr algn="ctr"/>
-            <a:endParaRPr kumimoji="1" lang="ja-JP" altLang="en-US" dirty="0"/>
+              <a:rPr lang="ja-JP" altLang="en-US" sz="3600" dirty="0">
+                <a:solidFill>
+                  <a:srgbClr val="FF0000"/>
+                </a:solidFill>
+                <a:latin typeface="メイリオ" panose="020B0604030504040204" pitchFamily="50" charset="-128"/>
+                <a:ea typeface="メイリオ" panose="020B0604030504040204" pitchFamily="50" charset="-128"/>
+              </a:rPr>
+              <a:t>マウスとキーボードを同時に使う</a:t>
+            </a:r>
+            <a:endParaRPr kumimoji="1" lang="ja-JP" altLang="en-US" sz="3600" dirty="0">
+              <a:solidFill>
+                <a:srgbClr val="FF0000"/>
+              </a:solidFill>
+              <a:latin typeface="メイリオ" panose="020B0604030504040204" pitchFamily="50" charset="-128"/>
+              <a:ea typeface="メイリオ" panose="020B0604030504040204" pitchFamily="50" charset="-128"/>
+            </a:endParaRPr>
           </a:p>
         </p:txBody>
       </p:sp>
     </p:spTree>
     <p:extLst>
       <p:ext uri="{BB962C8B-B14F-4D97-AF65-F5344CB8AC3E}">
-        <p14:creationId xmlns:p14="http://schemas.microsoft.com/office/powerpoint/2010/main" val="1752989940"/>
+        <p14:creationId xmlns:p14="http://schemas.microsoft.com/office/powerpoint/2010/main" val="1417576500"/>
       </p:ext>
     </p:extLst>
   </p:cSld>
